--- a/docs/SpaceX-徹底解剖.pptx
+++ b/docs/SpaceX-徹底解剖.pptx
@@ -338,7 +338,7 @@
                 <a:latin typeface="Calibri"/>
               </a:defRPr>
             </a:pPr>
-            <a:endParaRPr lang="en-US"/>
+            <a:endParaRPr lang="ja-JP" altLang="en-US"/>
           </a:p>
         </c:txPr>
         <c:crossAx val="2094734552"/>
@@ -391,7 +391,7 @@
                 <a:latin typeface="Calibri"/>
               </a:defRPr>
             </a:pPr>
-            <a:endParaRPr lang="en-US"/>
+            <a:endParaRPr lang="ja-JP" altLang="en-US"/>
           </a:p>
         </c:txPr>
         <c:crossAx val="2094734554"/>
@@ -666,7 +666,7 @@
                 <a:latin typeface="Calibri"/>
               </a:defRPr>
             </a:pPr>
-            <a:endParaRPr lang="en-US"/>
+            <a:endParaRPr lang="ja-JP" altLang="en-US"/>
           </a:p>
         </c:txPr>
         <c:crossAx val="2094734552"/>
@@ -718,7 +718,7 @@
                 <a:latin typeface="Calibri"/>
               </a:defRPr>
             </a:pPr>
-            <a:endParaRPr lang="en-US"/>
+            <a:endParaRPr lang="ja-JP" altLang="en-US"/>
           </a:p>
         </c:txPr>
         <c:crossAx val="2094734554"/>
@@ -972,7 +972,7 @@
                 <a:latin typeface="Calibri"/>
               </a:defRPr>
             </a:pPr>
-            <a:endParaRPr lang="en-US"/>
+            <a:endParaRPr lang="ja-JP" altLang="en-US"/>
           </a:p>
         </c:txPr>
         <c:crossAx val="2094734552"/>
@@ -1024,7 +1024,7 @@
                 <a:latin typeface="Calibri"/>
               </a:defRPr>
             </a:pPr>
-            <a:endParaRPr lang="en-US"/>
+            <a:endParaRPr lang="ja-JP" altLang="en-US"/>
           </a:p>
         </c:txPr>
         <c:crossAx val="2094734554"/>
@@ -1453,10 +1453,10 @@
           <a:lstStyle/>
           <a:p>
             <a:r>
-              <a:rPr lang="en-US" dirty="0"/>
+              <a:rPr lang="ja-JP" altLang="en-US" dirty="0"/>
               <a:t>表紙。右のロケットは著作権フリーの自作ベクター。SpaceX公式写真はCC0のため差し替え可。</a:t>
             </a:r>
-            <a:endParaRPr lang="en-US" dirty="0"/>
+            <a:endParaRPr lang="ja-JP" altLang="en-US" dirty="0"/>
           </a:p>
         </p:txBody>
       </p:sp>
@@ -1476,10 +1476,10 @@
           <a:lstStyle/>
           <a:p>
             <a:fld id="{F7021451-1387-4CA6-816F-3879F97B5CBC}" type="slidenum">
-              <a:rPr lang="en-US"/>
+              <a:rPr lang="ja-JP" altLang="en-US"/>
               <a:t>1</a:t>
             </a:fld>
-            <a:endParaRPr lang="en-US"/>
+            <a:endParaRPr lang="ja-JP" altLang="en-US"/>
           </a:p>
         </p:txBody>
       </p:sp>
@@ -1541,10 +1541,10 @@
           <a:lstStyle/>
           <a:p>
             <a:r>
-              <a:rPr lang="en-US" dirty="0"/>
+              <a:rPr lang="ja-JP" altLang="en-US" dirty="0"/>
               <a:t>感情で判断しないためにKill Criteriaを事前に決めておくことが目的。特に$100割れは機械的に実行する。</a:t>
             </a:r>
-            <a:endParaRPr lang="en-US" dirty="0"/>
+            <a:endParaRPr lang="ja-JP" altLang="en-US" dirty="0"/>
           </a:p>
         </p:txBody>
       </p:sp>
@@ -1564,10 +1564,10 @@
           <a:lstStyle/>
           <a:p>
             <a:fld id="{F7021451-1387-4CA6-816F-3879F97B5CBC}" type="slidenum">
-              <a:rPr lang="en-US"/>
+              <a:rPr lang="ja-JP" altLang="en-US"/>
               <a:t>10</a:t>
             </a:fld>
-            <a:endParaRPr lang="en-US"/>
+            <a:endParaRPr lang="ja-JP" altLang="en-US"/>
           </a:p>
         </p:txBody>
       </p:sp>
@@ -1629,10 +1629,10 @@
           <a:lstStyle/>
           <a:p>
             <a:r>
-              <a:rPr lang="en-US" dirty="0"/>
+              <a:rPr lang="ja-JP" altLang="en-US" dirty="0"/>
               <a:t>3つの結論。以降のスライドはこの3点を裏付ける構成。</a:t>
             </a:r>
-            <a:endParaRPr lang="en-US" dirty="0"/>
+            <a:endParaRPr lang="ja-JP" altLang="en-US" dirty="0"/>
           </a:p>
         </p:txBody>
       </p:sp>
@@ -1652,10 +1652,10 @@
           <a:lstStyle/>
           <a:p>
             <a:fld id="{F7021451-1387-4CA6-816F-3879F97B5CBC}" type="slidenum">
-              <a:rPr lang="en-US"/>
+              <a:rPr lang="ja-JP" altLang="en-US"/>
               <a:t>2</a:t>
             </a:fld>
-            <a:endParaRPr lang="en-US"/>
+            <a:endParaRPr lang="ja-JP" altLang="en-US"/>
           </a:p>
         </p:txBody>
       </p:sp>
@@ -1717,10 +1717,10 @@
           <a:lstStyle/>
           <a:p>
             <a:r>
-              <a:rPr lang="en-US" dirty="0"/>
+              <a:rPr lang="ja-JP" altLang="en-US" dirty="0"/>
               <a:t>Falcon 9の開発費$390Mは、NASAが同じものを従来型調達で作った場合の試算$3.6-4Bの約1/9。これが後の全ての原資になる。</a:t>
             </a:r>
-            <a:endParaRPr lang="en-US" dirty="0"/>
+            <a:endParaRPr lang="ja-JP" altLang="en-US" dirty="0"/>
           </a:p>
         </p:txBody>
       </p:sp>
@@ -1740,10 +1740,10 @@
           <a:lstStyle/>
           <a:p>
             <a:fld id="{F7021451-1387-4CA6-816F-3879F97B5CBC}" type="slidenum">
-              <a:rPr lang="en-US"/>
+              <a:rPr lang="ja-JP" altLang="en-US"/>
               <a:t>3</a:t>
             </a:fld>
-            <a:endParaRPr lang="en-US"/>
+            <a:endParaRPr lang="ja-JP" altLang="en-US"/>
           </a:p>
         </p:txBody>
       </p:sp>
@@ -1805,10 +1805,10 @@
           <a:lstStyle/>
           <a:p>
             <a:r>
-              <a:rPr lang="en-US" dirty="0"/>
+              <a:rPr lang="ja-JP" altLang="en-US" dirty="0"/>
               <a:t>売上ではStarlinkが55%。営業利益では実質100%。AI部門は成長率247%だが赤字。</a:t>
             </a:r>
-            <a:endParaRPr lang="en-US" dirty="0"/>
+            <a:endParaRPr lang="ja-JP" altLang="en-US" dirty="0"/>
           </a:p>
         </p:txBody>
       </p:sp>
@@ -1828,10 +1828,10 @@
           <a:lstStyle/>
           <a:p>
             <a:fld id="{F7021451-1387-4CA6-816F-3879F97B5CBC}" type="slidenum">
-              <a:rPr lang="en-US"/>
+              <a:rPr lang="ja-JP" altLang="en-US"/>
               <a:t>4</a:t>
             </a:fld>
-            <a:endParaRPr lang="en-US"/>
+            <a:endParaRPr lang="ja-JP" altLang="en-US"/>
           </a:p>
         </p:txBody>
       </p:sp>
@@ -1893,10 +1893,10 @@
           <a:lstStyle/>
           <a:p>
             <a:r>
-              <a:rPr lang="en-US" dirty="0"/>
+              <a:rPr lang="ja-JP" altLang="en-US" dirty="0"/>
               <a:t>外に売れば$74M取れるロケットを、自社Starlink用には$17.5Mで使える。この差が縦統合の威力。</a:t>
             </a:r>
-            <a:endParaRPr lang="en-US" dirty="0"/>
+            <a:endParaRPr lang="ja-JP" altLang="en-US" dirty="0"/>
           </a:p>
         </p:txBody>
       </p:sp>
@@ -1916,10 +1916,10 @@
           <a:lstStyle/>
           <a:p>
             <a:fld id="{F7021451-1387-4CA6-816F-3879F97B5CBC}" type="slidenum">
-              <a:rPr lang="en-US"/>
+              <a:rPr lang="ja-JP" altLang="en-US"/>
               <a:t>5</a:t>
             </a:fld>
-            <a:endParaRPr lang="en-US"/>
+            <a:endParaRPr lang="ja-JP" altLang="en-US"/>
           </a:p>
         </p:txBody>
       </p:sp>
@@ -1981,10 +1981,10 @@
           <a:lstStyle/>
           <a:p>
             <a:r>
-              <a:rPr lang="en-US" dirty="0"/>
+              <a:rPr lang="ja-JP" altLang="en-US" dirty="0"/>
               <a:t>Falcon 9事業は儲かっている。赤字はStarshipへの意図的な投資。2025年の支出は$3B（前年$1.84B）と加速中。</a:t>
             </a:r>
-            <a:endParaRPr lang="en-US" dirty="0"/>
+            <a:endParaRPr lang="ja-JP" altLang="en-US" dirty="0"/>
           </a:p>
         </p:txBody>
       </p:sp>
@@ -2004,10 +2004,10 @@
           <a:lstStyle/>
           <a:p>
             <a:fld id="{F7021451-1387-4CA6-816F-3879F97B5CBC}" type="slidenum">
-              <a:rPr lang="en-US"/>
+              <a:rPr lang="ja-JP" altLang="en-US"/>
               <a:t>6</a:t>
             </a:fld>
-            <a:endParaRPr lang="en-US"/>
+            <a:endParaRPr lang="ja-JP" altLang="en-US"/>
           </a:p>
         </p:txBody>
       </p:sp>
@@ -2069,10 +2069,10 @@
           <a:lstStyle/>
           <a:p>
             <a:r>
-              <a:rPr lang="en-US" dirty="0"/>
+              <a:rPr lang="ja-JP" altLang="en-US" dirty="0"/>
               <a:t>人類の稼働衛星の過半数がStarlink。2〜4日に1回のペースで打ち上げ続けている。</a:t>
             </a:r>
-            <a:endParaRPr lang="en-US" dirty="0"/>
+            <a:endParaRPr lang="ja-JP" altLang="en-US" dirty="0"/>
           </a:p>
         </p:txBody>
       </p:sp>
@@ -2092,10 +2092,10 @@
           <a:lstStyle/>
           <a:p>
             <a:fld id="{F7021451-1387-4CA6-816F-3879F97B5CBC}" type="slidenum">
-              <a:rPr lang="en-US"/>
+              <a:rPr lang="ja-JP" altLang="en-US"/>
               <a:t>7</a:t>
             </a:fld>
-            <a:endParaRPr lang="en-US"/>
+            <a:endParaRPr lang="ja-JP" altLang="en-US"/>
           </a:p>
         </p:txBody>
       </p:sp>
@@ -2157,10 +2157,10 @@
           <a:lstStyle/>
           <a:p>
             <a:r>
-              <a:rPr lang="en-US" dirty="0"/>
+              <a:rPr lang="ja-JP" altLang="en-US" dirty="0"/>
               <a:t>発表済みのDC計画は合計190GW・777件。日本全国の電力ピーク需要を超える規模。</a:t>
             </a:r>
-            <a:endParaRPr lang="en-US" dirty="0"/>
+            <a:endParaRPr lang="ja-JP" altLang="en-US" dirty="0"/>
           </a:p>
         </p:txBody>
       </p:sp>
@@ -2180,10 +2180,10 @@
           <a:lstStyle/>
           <a:p>
             <a:fld id="{F7021451-1387-4CA6-816F-3879F97B5CBC}" type="slidenum">
-              <a:rPr lang="en-US"/>
+              <a:rPr lang="ja-JP" altLang="en-US"/>
               <a:t>8</a:t>
             </a:fld>
-            <a:endParaRPr lang="en-US"/>
+            <a:endParaRPr lang="ja-JP" altLang="en-US"/>
           </a:p>
         </p:txBody>
       </p:sp>
@@ -2245,10 +2245,10 @@
           <a:lstStyle/>
           <a:p>
             <a:r>
-              <a:rPr lang="en-US" dirty="0"/>
+              <a:rPr lang="ja-JP" altLang="en-US" dirty="0"/>
               <a:t>Muskの理屈では宇宙太陽光は核融合の代替ではなく「完成済みの核融合炉から直接電気を引く方法」。核融合が成功してもTeslaの電池が売れるので彼は困らない。</a:t>
             </a:r>
-            <a:endParaRPr lang="en-US" dirty="0"/>
+            <a:endParaRPr lang="ja-JP" altLang="en-US" dirty="0"/>
           </a:p>
         </p:txBody>
       </p:sp>
@@ -2268,10 +2268,10 @@
           <a:lstStyle/>
           <a:p>
             <a:fld id="{F7021451-1387-4CA6-816F-3879F97B5CBC}" type="slidenum">
-              <a:rPr lang="en-US"/>
+              <a:rPr lang="ja-JP" altLang="en-US"/>
               <a:t>9</a:t>
             </a:fld>
-            <a:endParaRPr lang="en-US"/>
+            <a:endParaRPr lang="ja-JP" altLang="en-US"/>
           </a:p>
         </p:txBody>
       </p:sp>
@@ -2498,7 +2498,7 @@
     </p:bodyStyle>
     <p:otherStyle>
       <a:defPPr>
-        <a:defRPr lang="en-US"/>
+        <a:defRPr lang="ja-JP" altLang="en-US"/>
       </a:defPPr>
       <a:lvl1pPr marL="0" algn="l" defTabSz="914400" rtl="0" eaLnBrk="1" latinLnBrk="0" hangingPunct="1">
         <a:defRPr sz="1800" kern="1200">
@@ -2644,34 +2644,7 @@
       </p:pic>
       <p:sp>
         <p:nvSpPr>
-          <p:cNvPr id="3" name="Shape 0"/>
-          <p:cNvSpPr/>
-          <p:nvPr/>
-        </p:nvSpPr>
-        <p:spPr>
-          <a:xfrm>
-            <a:off x="7635240" y="0"/>
-            <a:ext cx="1371600" cy="6858000"/>
-          </a:xfrm>
-          <a:prstGeom prst="rect">
-            <a:avLst/>
-          </a:prstGeom>
-          <a:solidFill>
-            <a:srgbClr val="0A0E1F">
-              <a:alpha val="65000"/>
-            </a:srgbClr>
-          </a:solidFill>
-          <a:ln w="12700">
-            <a:solidFill>
-              <a:srgbClr val="333333"/>
-            </a:solidFill>
-            <a:prstDash val="solid"/>
-          </a:ln>
-        </p:spPr>
-      </p:sp>
-      <p:sp>
-        <p:nvSpPr>
-          <p:cNvPr id="4" name="Text 1"/>
+          <p:cNvPr id="3" name="Text 0"/>
           <p:cNvSpPr/>
           <p:nvPr/>
         </p:nvSpPr>
@@ -2694,23 +2667,23 @@
               <a:buNone/>
             </a:pPr>
             <a:r>
-              <a:rPr lang="en-US" sz="1100" b="1" spc="160" kern="0" dirty="0">
+              <a:rPr lang="ja-JP" altLang="en-US" sz="1100" b="1" spc="160" kern="0" dirty="0">
                 <a:solidFill>
                   <a:srgbClr val="FF6B35"/>
                 </a:solidFill>
                 <a:latin typeface="Calibri" pitchFamily="34" charset="0"/>
-                <a:ea typeface="Calibri" pitchFamily="34" charset="-122"/>
+                <a:ea typeface="Yu Gothic" pitchFamily="34" charset="-122"/>
                 <a:cs typeface="Calibri" pitchFamily="34" charset="-120"/>
               </a:rPr>
               <a:t>SPACE EXPLORATION TECHNOLOGIES  |  NASDAQ: SPCX</a:t>
             </a:r>
-            <a:endParaRPr lang="en-US" sz="1100" dirty="0"/>
-          </a:p>
-        </p:txBody>
-      </p:sp>
-      <p:sp>
-        <p:nvSpPr>
-          <p:cNvPr id="5" name="Text 2"/>
+            <a:endParaRPr lang="ja-JP" altLang="en-US" sz="1100" dirty="0"/>
+          </a:p>
+        </p:txBody>
+      </p:sp>
+      <p:sp>
+        <p:nvSpPr>
+          <p:cNvPr id="4" name="Text 1"/>
           <p:cNvSpPr/>
           <p:nvPr/>
         </p:nvSpPr>
@@ -2733,23 +2706,23 @@
               <a:buNone/>
             </a:pPr>
             <a:r>
-              <a:rPr lang="en-US" sz="4600" b="1" dirty="0">
+              <a:rPr lang="ja-JP" altLang="en-US" sz="4600" b="1" dirty="0">
                 <a:solidFill>
                   <a:srgbClr val="FFFFFF"/>
                 </a:solidFill>
                 <a:latin typeface="Cambria" pitchFamily="34" charset="0"/>
-                <a:ea typeface="Cambria" pitchFamily="34" charset="-122"/>
+                <a:ea typeface="Yu Gothic" pitchFamily="34" charset="-122"/>
                 <a:cs typeface="Cambria" pitchFamily="34" charset="-120"/>
               </a:rPr>
               <a:t>SpaceX 徹底解剖</a:t>
             </a:r>
-            <a:endParaRPr lang="en-US" sz="4600" dirty="0"/>
-          </a:p>
-        </p:txBody>
-      </p:sp>
-      <p:sp>
-        <p:nvSpPr>
-          <p:cNvPr id="6" name="Text 3"/>
+            <a:endParaRPr lang="ja-JP" altLang="en-US" sz="4600" dirty="0"/>
+          </a:p>
+        </p:txBody>
+      </p:sp>
+      <p:sp>
+        <p:nvSpPr>
+          <p:cNvPr id="5" name="Text 2"/>
           <p:cNvSpPr/>
           <p:nvPr/>
         </p:nvSpPr>
@@ -2772,23 +2745,23 @@
               <a:buNone/>
             </a:pPr>
             <a:r>
-              <a:rPr lang="en-US" sz="1700" dirty="0">
+              <a:rPr lang="ja-JP" altLang="en-US" sz="1700" dirty="0">
                 <a:solidFill>
                   <a:srgbClr val="C5CBDC"/>
                 </a:solidFill>
                 <a:latin typeface="Calibri" pitchFamily="34" charset="0"/>
-                <a:ea typeface="Calibri" pitchFamily="34" charset="-122"/>
+                <a:ea typeface="Yu Gothic" pitchFamily="34" charset="-122"/>
                 <a:cs typeface="Calibri" pitchFamily="34" charset="-120"/>
               </a:rPr>
               <a:t>打ち上げ経済圏・Starlink・そして電力戦争へ</a:t>
             </a:r>
-            <a:endParaRPr lang="en-US" sz="1700" dirty="0"/>
-          </a:p>
-        </p:txBody>
-      </p:sp>
-      <p:sp>
-        <p:nvSpPr>
-          <p:cNvPr id="7" name="Text 4"/>
+            <a:endParaRPr lang="ja-JP" altLang="en-US" sz="1700" dirty="0"/>
+          </a:p>
+        </p:txBody>
+      </p:sp>
+      <p:sp>
+        <p:nvSpPr>
+          <p:cNvPr id="6" name="Text 3"/>
           <p:cNvSpPr/>
           <p:nvPr/>
         </p:nvSpPr>
@@ -2811,23 +2784,23 @@
               <a:buNone/>
             </a:pPr>
             <a:r>
-              <a:rPr lang="en-US" sz="1200" dirty="0">
+              <a:rPr lang="ja-JP" altLang="en-US" sz="1200" dirty="0">
                 <a:solidFill>
                   <a:srgbClr val="858FAB"/>
                 </a:solidFill>
                 <a:latin typeface="Calibri" pitchFamily="34" charset="0"/>
-                <a:ea typeface="Calibri" pitchFamily="34" charset="-122"/>
+                <a:ea typeface="Yu Gothic" pitchFamily="34" charset="-122"/>
                 <a:cs typeface="Calibri" pitchFamily="34" charset="-120"/>
               </a:rPr>
               <a:t>2026年8月8日  |  Q2 2026決算・ロックアップ解除を踏まえて</a:t>
             </a:r>
-            <a:endParaRPr lang="en-US" sz="1200" dirty="0"/>
-          </a:p>
-        </p:txBody>
-      </p:sp>
-      <p:sp>
-        <p:nvSpPr>
-          <p:cNvPr id="8" name="Shape 5"/>
+            <a:endParaRPr lang="ja-JP" altLang="en-US" sz="1200" dirty="0"/>
+          </a:p>
+        </p:txBody>
+      </p:sp>
+      <p:sp>
+        <p:nvSpPr>
+          <p:cNvPr id="7" name="Shape 4"/>
           <p:cNvSpPr/>
           <p:nvPr/>
         </p:nvSpPr>
@@ -2854,7 +2827,7 @@
       </p:sp>
       <p:sp>
         <p:nvSpPr>
-          <p:cNvPr id="9" name="Text 6"/>
+          <p:cNvPr id="8" name="Text 5"/>
           <p:cNvSpPr/>
           <p:nvPr/>
         </p:nvSpPr>
@@ -2877,23 +2850,23 @@
               <a:buNone/>
             </a:pPr>
             <a:r>
-              <a:rPr lang="en-US" sz="2100" b="1" dirty="0">
+              <a:rPr lang="ja-JP" altLang="en-US" sz="2100" b="1" dirty="0">
                 <a:solidFill>
                   <a:srgbClr val="FFB627"/>
                 </a:solidFill>
                 <a:latin typeface="Cambria" pitchFamily="34" charset="0"/>
-                <a:ea typeface="Cambria" pitchFamily="34" charset="-122"/>
+                <a:ea typeface="Yu Gothic" pitchFamily="34" charset="-122"/>
                 <a:cs typeface="Cambria" pitchFamily="34" charset="-120"/>
               </a:rPr>
               <a:t>$7.81B</a:t>
             </a:r>
-            <a:endParaRPr lang="en-US" sz="2100" dirty="0"/>
-          </a:p>
-        </p:txBody>
-      </p:sp>
-      <p:sp>
-        <p:nvSpPr>
-          <p:cNvPr id="10" name="Text 7"/>
+            <a:endParaRPr lang="ja-JP" altLang="en-US" sz="2100" dirty="0"/>
+          </a:p>
+        </p:txBody>
+      </p:sp>
+      <p:sp>
+        <p:nvSpPr>
+          <p:cNvPr id="9" name="Text 6"/>
           <p:cNvSpPr/>
           <p:nvPr/>
         </p:nvSpPr>
@@ -2916,23 +2889,23 @@
               <a:buNone/>
             </a:pPr>
             <a:r>
-              <a:rPr lang="en-US" sz="1050" dirty="0">
+              <a:rPr lang="ja-JP" altLang="en-US" sz="1050" dirty="0">
                 <a:solidFill>
                   <a:srgbClr val="858FAB"/>
                 </a:solidFill>
                 <a:latin typeface="Calibri" pitchFamily="34" charset="0"/>
-                <a:ea typeface="Calibri" pitchFamily="34" charset="-122"/>
+                <a:ea typeface="Yu Gothic" pitchFamily="34" charset="-122"/>
                 <a:cs typeface="Calibri" pitchFamily="34" charset="-120"/>
               </a:rPr>
               <a:t>四半期売上 (+92%)</a:t>
             </a:r>
-            <a:endParaRPr lang="en-US" sz="1050" dirty="0"/>
-          </a:p>
-        </p:txBody>
-      </p:sp>
-      <p:sp>
-        <p:nvSpPr>
-          <p:cNvPr id="11" name="Shape 8"/>
+            <a:endParaRPr lang="ja-JP" altLang="en-US" sz="1050" dirty="0"/>
+          </a:p>
+        </p:txBody>
+      </p:sp>
+      <p:sp>
+        <p:nvSpPr>
+          <p:cNvPr id="10" name="Shape 7"/>
           <p:cNvSpPr/>
           <p:nvPr/>
         </p:nvSpPr>
@@ -2959,7 +2932,7 @@
       </p:sp>
       <p:sp>
         <p:nvSpPr>
-          <p:cNvPr id="12" name="Text 9"/>
+          <p:cNvPr id="11" name="Text 8"/>
           <p:cNvSpPr/>
           <p:nvPr/>
         </p:nvSpPr>
@@ -2982,23 +2955,23 @@
               <a:buNone/>
             </a:pPr>
             <a:r>
-              <a:rPr lang="en-US" sz="2100" b="1" dirty="0">
+              <a:rPr lang="ja-JP" altLang="en-US" sz="2100" b="1" dirty="0">
                 <a:solidFill>
                   <a:srgbClr val="FFB627"/>
                 </a:solidFill>
                 <a:latin typeface="Cambria" pitchFamily="34" charset="0"/>
-                <a:ea typeface="Cambria" pitchFamily="34" charset="-122"/>
+                <a:ea typeface="Yu Gothic" pitchFamily="34" charset="-122"/>
                 <a:cs typeface="Cambria" pitchFamily="34" charset="-120"/>
               </a:rPr>
               <a:t>12,400機</a:t>
             </a:r>
-            <a:endParaRPr lang="en-US" sz="2100" dirty="0"/>
-          </a:p>
-        </p:txBody>
-      </p:sp>
-      <p:sp>
-        <p:nvSpPr>
-          <p:cNvPr id="13" name="Text 10"/>
+            <a:endParaRPr lang="ja-JP" altLang="en-US" sz="2100" dirty="0"/>
+          </a:p>
+        </p:txBody>
+      </p:sp>
+      <p:sp>
+        <p:nvSpPr>
+          <p:cNvPr id="12" name="Text 9"/>
           <p:cNvSpPr/>
           <p:nvPr/>
         </p:nvSpPr>
@@ -3021,23 +2994,23 @@
               <a:buNone/>
             </a:pPr>
             <a:r>
-              <a:rPr lang="en-US" sz="1050" dirty="0">
+              <a:rPr lang="ja-JP" altLang="en-US" sz="1050" dirty="0">
                 <a:solidFill>
                   <a:srgbClr val="858FAB"/>
                 </a:solidFill>
                 <a:latin typeface="Calibri" pitchFamily="34" charset="0"/>
-                <a:ea typeface="Calibri" pitchFamily="34" charset="-122"/>
+                <a:ea typeface="Yu Gothic" pitchFamily="34" charset="-122"/>
                 <a:cs typeface="Calibri" pitchFamily="34" charset="-120"/>
               </a:rPr>
               <a:t>Starlink累計打上</a:t>
             </a:r>
-            <a:endParaRPr lang="en-US" sz="1050" dirty="0"/>
-          </a:p>
-        </p:txBody>
-      </p:sp>
-      <p:sp>
-        <p:nvSpPr>
-          <p:cNvPr id="14" name="Shape 11"/>
+            <a:endParaRPr lang="ja-JP" altLang="en-US" sz="1050" dirty="0"/>
+          </a:p>
+        </p:txBody>
+      </p:sp>
+      <p:sp>
+        <p:nvSpPr>
+          <p:cNvPr id="13" name="Shape 10"/>
           <p:cNvSpPr/>
           <p:nvPr/>
         </p:nvSpPr>
@@ -3064,7 +3037,7 @@
       </p:sp>
       <p:sp>
         <p:nvSpPr>
-          <p:cNvPr id="15" name="Text 12"/>
+          <p:cNvPr id="14" name="Text 11"/>
           <p:cNvSpPr/>
           <p:nvPr/>
         </p:nvSpPr>
@@ -3087,23 +3060,23 @@
               <a:buNone/>
             </a:pPr>
             <a:r>
-              <a:rPr lang="en-US" sz="2100" b="1" dirty="0">
+              <a:rPr lang="ja-JP" altLang="en-US" sz="2100" b="1" dirty="0">
                 <a:solidFill>
                   <a:srgbClr val="FFB627"/>
                 </a:solidFill>
                 <a:latin typeface="Cambria" pitchFamily="34" charset="0"/>
-                <a:ea typeface="Cambria" pitchFamily="34" charset="-122"/>
+                <a:ea typeface="Yu Gothic" pitchFamily="34" charset="-122"/>
                 <a:cs typeface="Cambria" pitchFamily="34" charset="-120"/>
               </a:rPr>
               <a:t>$15-20M</a:t>
             </a:r>
-            <a:endParaRPr lang="en-US" sz="2100" dirty="0"/>
-          </a:p>
-        </p:txBody>
-      </p:sp>
-      <p:sp>
-        <p:nvSpPr>
-          <p:cNvPr id="16" name="Text 13"/>
+            <a:endParaRPr lang="ja-JP" altLang="en-US" sz="2100" dirty="0"/>
+          </a:p>
+        </p:txBody>
+      </p:sp>
+      <p:sp>
+        <p:nvSpPr>
+          <p:cNvPr id="15" name="Text 12"/>
           <p:cNvSpPr/>
           <p:nvPr/>
         </p:nvSpPr>
@@ -3126,17 +3099,17 @@
               <a:buNone/>
             </a:pPr>
             <a:r>
-              <a:rPr lang="en-US" sz="1050" dirty="0">
+              <a:rPr lang="ja-JP" altLang="en-US" sz="1050" dirty="0">
                 <a:solidFill>
                   <a:srgbClr val="858FAB"/>
                 </a:solidFill>
                 <a:latin typeface="Calibri" pitchFamily="34" charset="0"/>
-                <a:ea typeface="Calibri" pitchFamily="34" charset="-122"/>
+                <a:ea typeface="Yu Gothic" pitchFamily="34" charset="-122"/>
                 <a:cs typeface="Calibri" pitchFamily="34" charset="-120"/>
               </a:rPr>
               <a:t>打上1回の社内原価</a:t>
             </a:r>
-            <a:endParaRPr lang="en-US" sz="1050" dirty="0"/>
+            <a:endParaRPr lang="ja-JP" altLang="en-US" sz="1050" dirty="0"/>
           </a:p>
         </p:txBody>
       </p:sp>
@@ -3197,17 +3170,17 @@
               <a:buNone/>
             </a:pPr>
             <a:r>
-              <a:rPr lang="en-US" sz="3000" b="1" dirty="0">
+              <a:rPr lang="ja-JP" altLang="en-US" sz="3000" b="1" dirty="0">
                 <a:solidFill>
                   <a:srgbClr val="FFFFFF"/>
                 </a:solidFill>
                 <a:latin typeface="Cambria" pitchFamily="34" charset="0"/>
-                <a:ea typeface="Cambria" pitchFamily="34" charset="-122"/>
+                <a:ea typeface="Yu Gothic" pitchFamily="34" charset="-122"/>
                 <a:cs typeface="Cambria" pitchFamily="34" charset="-120"/>
               </a:rPr>
               <a:t>投資判断 — 3シナリオと降りる線</a:t>
             </a:r>
-            <a:endParaRPr lang="en-US" sz="3000" dirty="0"/>
+            <a:endParaRPr lang="ja-JP" altLang="en-US" sz="3000" dirty="0"/>
           </a:p>
         </p:txBody>
       </p:sp>
@@ -3236,17 +3209,17 @@
               <a:buNone/>
             </a:pPr>
             <a:r>
-              <a:rPr lang="en-US" sz="1350" dirty="0">
+              <a:rPr lang="ja-JP" altLang="en-US" sz="1350" dirty="0">
                 <a:solidFill>
                   <a:srgbClr val="FFB627"/>
                 </a:solidFill>
                 <a:latin typeface="Calibri" pitchFamily="34" charset="0"/>
-                <a:ea typeface="Calibri" pitchFamily="34" charset="-122"/>
+                <a:ea typeface="Yu Gothic" pitchFamily="34" charset="-122"/>
                 <a:cs typeface="Calibri" pitchFamily="34" charset="-120"/>
               </a:rPr>
               <a:t>保有: SPCX 3株 @ $135 / 現在値 $108〜115</a:t>
             </a:r>
-            <a:endParaRPr lang="en-US" sz="1350" dirty="0"/>
+            <a:endParaRPr lang="ja-JP" altLang="en-US" sz="1350" dirty="0"/>
           </a:p>
         </p:txBody>
       </p:sp>
@@ -3302,17 +3275,17 @@
               <a:buNone/>
             </a:pPr>
             <a:r>
-              <a:rPr lang="en-US" sz="2000" b="1" dirty="0">
+              <a:rPr lang="ja-JP" altLang="en-US" sz="2000" b="1" dirty="0">
                 <a:solidFill>
                   <a:srgbClr val="4ECB8E"/>
                 </a:solidFill>
                 <a:latin typeface="Cambria" pitchFamily="34" charset="0"/>
-                <a:ea typeface="Cambria" pitchFamily="34" charset="-122"/>
+                <a:ea typeface="Yu Gothic" pitchFamily="34" charset="-122"/>
                 <a:cs typeface="Cambria" pitchFamily="34" charset="-120"/>
               </a:rPr>
               <a:t>Bull</a:t>
             </a:r>
-            <a:endParaRPr lang="en-US" sz="2000" dirty="0"/>
+            <a:endParaRPr lang="ja-JP" altLang="en-US" sz="2000" dirty="0"/>
           </a:p>
         </p:txBody>
       </p:sp>
@@ -3341,17 +3314,17 @@
               <a:buNone/>
             </a:pPr>
             <a:r>
-              <a:rPr lang="en-US" sz="1200" dirty="0">
+              <a:rPr lang="ja-JP" altLang="en-US" sz="1200" dirty="0">
                 <a:solidFill>
                   <a:srgbClr val="858FAB"/>
                 </a:solidFill>
                 <a:latin typeface="Calibri" pitchFamily="34" charset="0"/>
-                <a:ea typeface="Calibri" pitchFamily="34" charset="-122"/>
+                <a:ea typeface="Yu Gothic" pitchFamily="34" charset="-122"/>
                 <a:cs typeface="Calibri" pitchFamily="34" charset="-120"/>
               </a:rPr>
               <a:t>確率 25%</a:t>
             </a:r>
-            <a:endParaRPr lang="en-US" sz="1200" dirty="0"/>
+            <a:endParaRPr lang="ja-JP" altLang="en-US" sz="1200" dirty="0"/>
           </a:p>
         </p:txBody>
       </p:sp>
@@ -3380,17 +3353,17 @@
               <a:buNone/>
             </a:pPr>
             <a:r>
-              <a:rPr lang="en-US" sz="2400" b="1" dirty="0">
+              <a:rPr lang="ja-JP" altLang="en-US" sz="2400" b="1" dirty="0">
                 <a:solidFill>
                   <a:srgbClr val="FFFFFF"/>
                 </a:solidFill>
                 <a:latin typeface="Cambria" pitchFamily="34" charset="0"/>
-                <a:ea typeface="Cambria" pitchFamily="34" charset="-122"/>
+                <a:ea typeface="Yu Gothic" pitchFamily="34" charset="-122"/>
                 <a:cs typeface="Cambria" pitchFamily="34" charset="-120"/>
               </a:rPr>
               <a:t>$145〜160</a:t>
             </a:r>
-            <a:endParaRPr lang="en-US" sz="2400" dirty="0"/>
+            <a:endParaRPr lang="ja-JP" altLang="en-US" sz="2400" dirty="0"/>
           </a:p>
         </p:txBody>
       </p:sp>
@@ -3422,17 +3395,17 @@
               <a:buNone/>
             </a:pPr>
             <a:r>
-              <a:rPr lang="en-US" sz="1050" dirty="0">
+              <a:rPr lang="ja-JP" altLang="en-US" sz="1050" dirty="0">
                 <a:solidFill>
                   <a:srgbClr val="C5CBDC"/>
                 </a:solidFill>
                 <a:latin typeface="Calibri" pitchFamily="34" charset="0"/>
-                <a:ea typeface="Calibri" pitchFamily="34" charset="-122"/>
+                <a:ea typeface="Yu Gothic" pitchFamily="34" charset="-122"/>
                 <a:cs typeface="Calibri" pitchFamily="34" charset="-120"/>
               </a:rPr>
               <a:t>Starlink単独IPOの発表、またはStarship商業運用の開始</a:t>
             </a:r>
-            <a:endParaRPr lang="en-US" sz="1050" dirty="0"/>
+            <a:endParaRPr lang="ja-JP" altLang="en-US" sz="1050" dirty="0"/>
           </a:p>
         </p:txBody>
       </p:sp>
@@ -3488,17 +3461,17 @@
               <a:buNone/>
             </a:pPr>
             <a:r>
-              <a:rPr lang="en-US" sz="2000" b="1" dirty="0">
+              <a:rPr lang="ja-JP" altLang="en-US" sz="2000" b="1" dirty="0">
                 <a:solidFill>
                   <a:srgbClr val="FFB627"/>
                 </a:solidFill>
                 <a:latin typeface="Cambria" pitchFamily="34" charset="0"/>
-                <a:ea typeface="Cambria" pitchFamily="34" charset="-122"/>
+                <a:ea typeface="Yu Gothic" pitchFamily="34" charset="-122"/>
                 <a:cs typeface="Cambria" pitchFamily="34" charset="-120"/>
               </a:rPr>
               <a:t>Base</a:t>
             </a:r>
-            <a:endParaRPr lang="en-US" sz="2000" dirty="0"/>
+            <a:endParaRPr lang="ja-JP" altLang="en-US" sz="2000" dirty="0"/>
           </a:p>
         </p:txBody>
       </p:sp>
@@ -3527,17 +3500,17 @@
               <a:buNone/>
             </a:pPr>
             <a:r>
-              <a:rPr lang="en-US" sz="1200" dirty="0">
+              <a:rPr lang="ja-JP" altLang="en-US" sz="1200" dirty="0">
                 <a:solidFill>
                   <a:srgbClr val="858FAB"/>
                 </a:solidFill>
                 <a:latin typeface="Calibri" pitchFamily="34" charset="0"/>
-                <a:ea typeface="Calibri" pitchFamily="34" charset="-122"/>
+                <a:ea typeface="Yu Gothic" pitchFamily="34" charset="-122"/>
                 <a:cs typeface="Calibri" pitchFamily="34" charset="-120"/>
               </a:rPr>
               <a:t>確率 50%</a:t>
             </a:r>
-            <a:endParaRPr lang="en-US" sz="1200" dirty="0"/>
+            <a:endParaRPr lang="ja-JP" altLang="en-US" sz="1200" dirty="0"/>
           </a:p>
         </p:txBody>
       </p:sp>
@@ -3566,17 +3539,17 @@
               <a:buNone/>
             </a:pPr>
             <a:r>
-              <a:rPr lang="en-US" sz="2400" b="1" dirty="0">
+              <a:rPr lang="ja-JP" altLang="en-US" sz="2400" b="1" dirty="0">
                 <a:solidFill>
                   <a:srgbClr val="FFFFFF"/>
                 </a:solidFill>
                 <a:latin typeface="Cambria" pitchFamily="34" charset="0"/>
-                <a:ea typeface="Cambria" pitchFamily="34" charset="-122"/>
+                <a:ea typeface="Yu Gothic" pitchFamily="34" charset="-122"/>
                 <a:cs typeface="Cambria" pitchFamily="34" charset="-120"/>
               </a:rPr>
               <a:t>$105〜130</a:t>
             </a:r>
-            <a:endParaRPr lang="en-US" sz="2400" dirty="0"/>
+            <a:endParaRPr lang="ja-JP" altLang="en-US" sz="2400" dirty="0"/>
           </a:p>
         </p:txBody>
       </p:sp>
@@ -3608,17 +3581,17 @@
               <a:buNone/>
             </a:pPr>
             <a:r>
-              <a:rPr lang="en-US" sz="1050" dirty="0">
+              <a:rPr lang="ja-JP" altLang="en-US" sz="1050" dirty="0">
                 <a:solidFill>
                   <a:srgbClr val="C5CBDC"/>
                 </a:solidFill>
                 <a:latin typeface="Calibri" pitchFamily="34" charset="0"/>
-                <a:ea typeface="Calibri" pitchFamily="34" charset="-122"/>
+                <a:ea typeface="Yu Gothic" pitchFamily="34" charset="-122"/>
                 <a:cs typeface="Calibri" pitchFamily="34" charset="-120"/>
               </a:rPr>
               <a:t>材料難。ロックアップ消化が続き現水準でのもみ合い</a:t>
             </a:r>
-            <a:endParaRPr lang="en-US" sz="1050" dirty="0"/>
+            <a:endParaRPr lang="ja-JP" altLang="en-US" sz="1050" dirty="0"/>
           </a:p>
         </p:txBody>
       </p:sp>
@@ -3674,17 +3647,17 @@
               <a:buNone/>
             </a:pPr>
             <a:r>
-              <a:rPr lang="en-US" sz="2000" b="1" dirty="0">
+              <a:rPr lang="ja-JP" altLang="en-US" sz="2000" b="1" dirty="0">
                 <a:solidFill>
                   <a:srgbClr val="F4646B"/>
                 </a:solidFill>
                 <a:latin typeface="Cambria" pitchFamily="34" charset="0"/>
-                <a:ea typeface="Cambria" pitchFamily="34" charset="-122"/>
+                <a:ea typeface="Yu Gothic" pitchFamily="34" charset="-122"/>
                 <a:cs typeface="Cambria" pitchFamily="34" charset="-120"/>
               </a:rPr>
               <a:t>Bear</a:t>
             </a:r>
-            <a:endParaRPr lang="en-US" sz="2000" dirty="0"/>
+            <a:endParaRPr lang="ja-JP" altLang="en-US" sz="2000" dirty="0"/>
           </a:p>
         </p:txBody>
       </p:sp>
@@ -3713,17 +3686,17 @@
               <a:buNone/>
             </a:pPr>
             <a:r>
-              <a:rPr lang="en-US" sz="1200" dirty="0">
+              <a:rPr lang="ja-JP" altLang="en-US" sz="1200" dirty="0">
                 <a:solidFill>
                   <a:srgbClr val="858FAB"/>
                 </a:solidFill>
                 <a:latin typeface="Calibri" pitchFamily="34" charset="0"/>
-                <a:ea typeface="Calibri" pitchFamily="34" charset="-122"/>
+                <a:ea typeface="Yu Gothic" pitchFamily="34" charset="-122"/>
                 <a:cs typeface="Calibri" pitchFamily="34" charset="-120"/>
               </a:rPr>
               <a:t>確率 25%</a:t>
             </a:r>
-            <a:endParaRPr lang="en-US" sz="1200" dirty="0"/>
+            <a:endParaRPr lang="ja-JP" altLang="en-US" sz="1200" dirty="0"/>
           </a:p>
         </p:txBody>
       </p:sp>
@@ -3752,17 +3725,17 @@
               <a:buNone/>
             </a:pPr>
             <a:r>
-              <a:rPr lang="en-US" sz="2400" b="1" dirty="0">
+              <a:rPr lang="ja-JP" altLang="en-US" sz="2400" b="1" dirty="0">
                 <a:solidFill>
                   <a:srgbClr val="FFFFFF"/>
                 </a:solidFill>
                 <a:latin typeface="Cambria" pitchFamily="34" charset="0"/>
-                <a:ea typeface="Cambria" pitchFamily="34" charset="-122"/>
+                <a:ea typeface="Yu Gothic" pitchFamily="34" charset="-122"/>
                 <a:cs typeface="Cambria" pitchFamily="34" charset="-120"/>
               </a:rPr>
               <a:t>$100割れ</a:t>
             </a:r>
-            <a:endParaRPr lang="en-US" sz="2400" dirty="0"/>
+            <a:endParaRPr lang="ja-JP" altLang="en-US" sz="2400" dirty="0"/>
           </a:p>
         </p:txBody>
       </p:sp>
@@ -3794,17 +3767,17 @@
               <a:buNone/>
             </a:pPr>
             <a:r>
-              <a:rPr lang="en-US" sz="1050" dirty="0">
+              <a:rPr lang="ja-JP" altLang="en-US" sz="1050" dirty="0">
                 <a:solidFill>
                   <a:srgbClr val="C5CBDC"/>
                 </a:solidFill>
                 <a:latin typeface="Calibri" pitchFamily="34" charset="0"/>
-                <a:ea typeface="Calibri" pitchFamily="34" charset="-122"/>
+                <a:ea typeface="Yu Gothic" pitchFamily="34" charset="-122"/>
                 <a:cs typeface="Calibri" pitchFamily="34" charset="-120"/>
               </a:rPr>
               <a:t>政治リスクがNASA・国防契約に波及。Starshipの重大事故</a:t>
             </a:r>
-            <a:endParaRPr lang="en-US" sz="1050" dirty="0"/>
+            <a:endParaRPr lang="ja-JP" altLang="en-US" sz="1050" dirty="0"/>
           </a:p>
         </p:txBody>
       </p:sp>
@@ -3860,17 +3833,17 @@
               <a:buNone/>
             </a:pPr>
             <a:r>
-              <a:rPr lang="en-US" sz="1300" b="1" dirty="0">
+              <a:rPr lang="ja-JP" altLang="en-US" sz="1300" b="1" dirty="0">
                 <a:solidFill>
                   <a:srgbClr val="5FD3F3"/>
                 </a:solidFill>
                 <a:latin typeface="Calibri" pitchFamily="34" charset="0"/>
-                <a:ea typeface="Calibri" pitchFamily="34" charset="-122"/>
+                <a:ea typeface="Yu Gothic" pitchFamily="34" charset="-122"/>
                 <a:cs typeface="Calibri" pitchFamily="34" charset="-120"/>
               </a:rPr>
               <a:t>監視すべき先行指標</a:t>
             </a:r>
-            <a:endParaRPr lang="en-US" sz="1300" dirty="0"/>
+            <a:endParaRPr lang="ja-JP" altLang="en-US" sz="1300" dirty="0"/>
           </a:p>
         </p:txBody>
       </p:sp>
@@ -3900,17 +3873,17 @@
               <a:buChar char="•"/>
             </a:pPr>
             <a:r>
-              <a:rPr lang="en-US" sz="1100" dirty="0">
+              <a:rPr lang="ja-JP" altLang="en-US" sz="1100" dirty="0">
                 <a:solidFill>
                   <a:srgbClr val="C5CBDC"/>
                 </a:solidFill>
                 <a:latin typeface="Calibri" pitchFamily="34" charset="0"/>
-                <a:ea typeface="Calibri" pitchFamily="34" charset="-122"/>
+                <a:ea typeface="Yu Gothic" pitchFamily="34" charset="-122"/>
                 <a:cs typeface="Calibri" pitchFamily="34" charset="-120"/>
               </a:rPr>
               <a:t>Starshipの年間支出 — 減少なら開発完了が近い</a:t>
             </a:r>
-            <a:endParaRPr lang="en-US" sz="1100" dirty="0"/>
+            <a:endParaRPr lang="ja-JP" altLang="en-US" sz="1100" dirty="0"/>
           </a:p>
         </p:txBody>
       </p:sp>
@@ -3940,17 +3913,17 @@
               <a:buChar char="•"/>
             </a:pPr>
             <a:r>
-              <a:rPr lang="en-US" sz="1100" dirty="0">
+              <a:rPr lang="ja-JP" altLang="en-US" sz="1100" dirty="0">
                 <a:solidFill>
                   <a:srgbClr val="C5CBDC"/>
                 </a:solidFill>
                 <a:latin typeface="Calibri" pitchFamily="34" charset="0"/>
-                <a:ea typeface="Calibri" pitchFamily="34" charset="-122"/>
+                <a:ea typeface="Yu Gothic" pitchFamily="34" charset="-122"/>
                 <a:cs typeface="Calibri" pitchFamily="34" charset="-120"/>
               </a:rPr>
               <a:t>Starlink契約の純増数 — 利益エンジンの健全性</a:t>
             </a:r>
-            <a:endParaRPr lang="en-US" sz="1100" dirty="0"/>
+            <a:endParaRPr lang="ja-JP" altLang="en-US" sz="1100" dirty="0"/>
           </a:p>
         </p:txBody>
       </p:sp>
@@ -3980,17 +3953,17 @@
               <a:buChar char="•"/>
             </a:pPr>
             <a:r>
-              <a:rPr lang="en-US" sz="1100" dirty="0">
+              <a:rPr lang="ja-JP" altLang="en-US" sz="1100" dirty="0">
                 <a:solidFill>
                   <a:srgbClr val="C5CBDC"/>
                 </a:solidFill>
                 <a:latin typeface="Calibri" pitchFamily="34" charset="0"/>
-                <a:ea typeface="Calibri" pitchFamily="34" charset="-122"/>
+                <a:ea typeface="Yu Gothic" pitchFamily="34" charset="-122"/>
                 <a:cs typeface="Calibri" pitchFamily="34" charset="-120"/>
               </a:rPr>
               <a:t>政府契約の新規受注と見直しの動き</a:t>
             </a:r>
-            <a:endParaRPr lang="en-US" sz="1100" dirty="0"/>
+            <a:endParaRPr lang="ja-JP" altLang="en-US" sz="1100" dirty="0"/>
           </a:p>
         </p:txBody>
       </p:sp>
@@ -4046,17 +4019,17 @@
               <a:buNone/>
             </a:pPr>
             <a:r>
-              <a:rPr lang="en-US" sz="1300" b="1" dirty="0">
+              <a:rPr lang="ja-JP" altLang="en-US" sz="1300" b="1" dirty="0">
                 <a:solidFill>
                   <a:srgbClr val="F4646B"/>
                 </a:solidFill>
                 <a:latin typeface="Calibri" pitchFamily="34" charset="0"/>
-                <a:ea typeface="Calibri" pitchFamily="34" charset="-122"/>
+                <a:ea typeface="Yu Gothic" pitchFamily="34" charset="-122"/>
                 <a:cs typeface="Calibri" pitchFamily="34" charset="-120"/>
               </a:rPr>
               <a:t>Kill Criteria（降りる線）</a:t>
             </a:r>
-            <a:endParaRPr lang="en-US" sz="1300" dirty="0"/>
+            <a:endParaRPr lang="ja-JP" altLang="en-US" sz="1300" dirty="0"/>
           </a:p>
         </p:txBody>
       </p:sp>
@@ -4086,17 +4059,17 @@
               <a:buChar char="•"/>
             </a:pPr>
             <a:r>
-              <a:rPr lang="en-US" sz="1100" dirty="0">
+              <a:rPr lang="ja-JP" altLang="en-US" sz="1100" dirty="0">
                 <a:solidFill>
                   <a:srgbClr val="C5CBDC"/>
                 </a:solidFill>
                 <a:latin typeface="Calibri" pitchFamily="34" charset="0"/>
-                <a:ea typeface="Calibri" pitchFamily="34" charset="-122"/>
+                <a:ea typeface="Yu Gothic" pitchFamily="34" charset="-122"/>
                 <a:cs typeface="Calibri" pitchFamily="34" charset="-120"/>
               </a:rPr>
               <a:t>$100を明確に下抜けたら損切りを実行する</a:t>
             </a:r>
-            <a:endParaRPr lang="en-US" sz="1100" dirty="0"/>
+            <a:endParaRPr lang="ja-JP" altLang="en-US" sz="1100" dirty="0"/>
           </a:p>
         </p:txBody>
       </p:sp>
@@ -4126,17 +4099,17 @@
               <a:buChar char="•"/>
             </a:pPr>
             <a:r>
-              <a:rPr lang="en-US" sz="1100" dirty="0">
+              <a:rPr lang="ja-JP" altLang="en-US" sz="1100" dirty="0">
                 <a:solidFill>
                   <a:srgbClr val="C5CBDC"/>
                 </a:solidFill>
                 <a:latin typeface="Calibri" pitchFamily="34" charset="0"/>
-                <a:ea typeface="Calibri" pitchFamily="34" charset="-122"/>
+                <a:ea typeface="Yu Gothic" pitchFamily="34" charset="-122"/>
                 <a:cs typeface="Calibri" pitchFamily="34" charset="-120"/>
               </a:rPr>
               <a:t>Starshipの重大事故で開発が長期停止</a:t>
             </a:r>
-            <a:endParaRPr lang="en-US" sz="1100" dirty="0"/>
+            <a:endParaRPr lang="ja-JP" altLang="en-US" sz="1100" dirty="0"/>
           </a:p>
         </p:txBody>
       </p:sp>
@@ -4166,17 +4139,17 @@
               <a:buChar char="•"/>
             </a:pPr>
             <a:r>
-              <a:rPr lang="en-US" sz="1100" dirty="0">
+              <a:rPr lang="ja-JP" altLang="en-US" sz="1100" dirty="0">
                 <a:solidFill>
                   <a:srgbClr val="C5CBDC"/>
                 </a:solidFill>
                 <a:latin typeface="Calibri" pitchFamily="34" charset="0"/>
-                <a:ea typeface="Calibri" pitchFamily="34" charset="-122"/>
+                <a:ea typeface="Yu Gothic" pitchFamily="34" charset="-122"/>
                 <a:cs typeface="Calibri" pitchFamily="34" charset="-120"/>
               </a:rPr>
               <a:t>政府契約が実際に見直し・剥奪された時点</a:t>
             </a:r>
-            <a:endParaRPr lang="en-US" sz="1100" dirty="0"/>
+            <a:endParaRPr lang="ja-JP" altLang="en-US" sz="1100" dirty="0"/>
           </a:p>
         </p:txBody>
       </p:sp>
@@ -4189,33 +4162,33 @@
         <p:spPr>
           <a:xfrm>
             <a:off x="640080" y="6053328"/>
-            <a:ext cx="10881360" cy="274320"/>
-          </a:xfrm>
-          <a:prstGeom prst="rect">
-            <a:avLst/>
-          </a:prstGeom>
-          <a:noFill/>
-          <a:ln/>
-        </p:spPr>
-        <p:txBody>
-          <a:bodyPr wrap="square" lIns="0" tIns="0" rIns="0" bIns="0" rtlCol="0" anchor="ctr"/>
-          <a:lstStyle/>
-          <a:p>
-            <a:pPr indent="0" marL="0">
-              <a:buNone/>
-            </a:pPr>
-            <a:r>
-              <a:rPr lang="en-US" sz="950" dirty="0">
+            <a:ext cx="10241280" cy="274320"/>
+          </a:xfrm>
+          <a:prstGeom prst="rect">
+            <a:avLst/>
+          </a:prstGeom>
+          <a:noFill/>
+          <a:ln/>
+        </p:spPr>
+        <p:txBody>
+          <a:bodyPr wrap="square" lIns="0" tIns="0" rIns="0" bIns="0" rtlCol="0" anchor="ctr"/>
+          <a:lstStyle/>
+          <a:p>
+            <a:pPr indent="0" marL="0">
+              <a:buNone/>
+            </a:pPr>
+            <a:r>
+              <a:rPr lang="ja-JP" altLang="en-US" sz="950" dirty="0">
                 <a:solidFill>
                   <a:srgbClr val="858FAB"/>
                 </a:solidFill>
                 <a:latin typeface="Calibri" pitchFamily="34" charset="0"/>
-                <a:ea typeface="Calibri" pitchFamily="34" charset="-122"/>
+                <a:ea typeface="Yu Gothic" pitchFamily="34" charset="-122"/>
                 <a:cs typeface="Calibri" pitchFamily="34" charset="-120"/>
               </a:rPr>
               <a:t>本資料は情報提供を目的としたもので、投資勧誘ではありません。数値には推定を含み、最終判断はご自身の責任で行ってください。</a:t>
             </a:r>
-            <a:endParaRPr lang="en-US" sz="950" dirty="0"/>
+            <a:endParaRPr lang="ja-JP" altLang="en-US" sz="950" dirty="0"/>
           </a:p>
         </p:txBody>
       </p:sp>
@@ -4244,17 +4217,17 @@
               <a:buNone/>
             </a:pPr>
             <a:r>
-              <a:rPr lang="en-US" sz="1100" dirty="0">
+              <a:rPr lang="ja-JP" altLang="en-US" sz="1100" dirty="0">
                 <a:solidFill>
                   <a:srgbClr val="858FAB"/>
                 </a:solidFill>
                 <a:latin typeface="Calibri" pitchFamily="34" charset="0"/>
-                <a:ea typeface="Calibri" pitchFamily="34" charset="-122"/>
+                <a:ea typeface="Yu Gothic" pitchFamily="34" charset="-122"/>
                 <a:cs typeface="Calibri" pitchFamily="34" charset="-120"/>
               </a:rPr>
               <a:t>10</a:t>
             </a:r>
-            <a:endParaRPr lang="en-US" sz="1100" dirty="0"/>
+            <a:endParaRPr lang="ja-JP" altLang="en-US" sz="1100" dirty="0"/>
           </a:p>
         </p:txBody>
       </p:sp>
@@ -4315,17 +4288,17 @@
               <a:buNone/>
             </a:pPr>
             <a:r>
-              <a:rPr lang="en-US" sz="3000" b="1" dirty="0">
+              <a:rPr lang="ja-JP" altLang="en-US" sz="3000" b="1" dirty="0">
                 <a:solidFill>
                   <a:srgbClr val="FFFFFF"/>
                 </a:solidFill>
                 <a:latin typeface="Cambria" pitchFamily="34" charset="0"/>
-                <a:ea typeface="Cambria" pitchFamily="34" charset="-122"/>
+                <a:ea typeface="Yu Gothic" pitchFamily="34" charset="-122"/>
                 <a:cs typeface="Cambria" pitchFamily="34" charset="-120"/>
               </a:rPr>
               <a:t>エグゼクティブサマリー</a:t>
             </a:r>
-            <a:endParaRPr lang="en-US" sz="3000" dirty="0"/>
+            <a:endParaRPr lang="ja-JP" altLang="en-US" sz="3000" dirty="0"/>
           </a:p>
         </p:txBody>
       </p:sp>
@@ -4354,17 +4327,17 @@
               <a:buNone/>
             </a:pPr>
             <a:r>
-              <a:rPr lang="en-US" sz="1350" dirty="0">
+              <a:rPr lang="ja-JP" altLang="en-US" sz="1350" dirty="0">
                 <a:solidFill>
                   <a:srgbClr val="FFB627"/>
                 </a:solidFill>
                 <a:latin typeface="Calibri" pitchFamily="34" charset="0"/>
-                <a:ea typeface="Calibri" pitchFamily="34" charset="-122"/>
+                <a:ea typeface="Yu Gothic" pitchFamily="34" charset="-122"/>
                 <a:cs typeface="Calibri" pitchFamily="34" charset="-120"/>
               </a:rPr>
               <a:t>本資料の結論</a:t>
             </a:r>
-            <a:endParaRPr lang="en-US" sz="1350" dirty="0"/>
+            <a:endParaRPr lang="ja-JP" altLang="en-US" sz="1350" dirty="0"/>
           </a:p>
         </p:txBody>
       </p:sp>
@@ -4445,17 +4418,17 @@
               <a:buNone/>
             </a:pPr>
             <a:r>
-              <a:rPr lang="en-US" sz="1300" b="1" dirty="0">
+              <a:rPr lang="ja-JP" altLang="en-US" sz="1300" b="1" dirty="0">
                 <a:solidFill>
                   <a:srgbClr val="0A0E1F"/>
                 </a:solidFill>
                 <a:latin typeface="Calibri" pitchFamily="34" charset="0"/>
-                <a:ea typeface="Calibri" pitchFamily="34" charset="-122"/>
+                <a:ea typeface="Yu Gothic" pitchFamily="34" charset="-122"/>
                 <a:cs typeface="Calibri" pitchFamily="34" charset="-120"/>
               </a:rPr>
               <a:t>1</a:t>
             </a:r>
-            <a:endParaRPr lang="en-US" sz="1300" dirty="0"/>
+            <a:endParaRPr lang="ja-JP" altLang="en-US" sz="1300" dirty="0"/>
           </a:p>
         </p:txBody>
       </p:sp>
@@ -4484,17 +4457,17 @@
               <a:buNone/>
             </a:pPr>
             <a:r>
-              <a:rPr lang="en-US" sz="1800" b="1" dirty="0">
+              <a:rPr lang="ja-JP" altLang="en-US" sz="1800" b="1" dirty="0">
                 <a:solidFill>
                   <a:srgbClr val="FF6B35"/>
                 </a:solidFill>
                 <a:latin typeface="Cambria" pitchFamily="34" charset="0"/>
-                <a:ea typeface="Cambria" pitchFamily="34" charset="-122"/>
+                <a:ea typeface="Yu Gothic" pitchFamily="34" charset="-122"/>
                 <a:cs typeface="Cambria" pitchFamily="34" charset="-120"/>
               </a:rPr>
               <a:t>Starlinkが全社を養う</a:t>
             </a:r>
-            <a:endParaRPr lang="en-US" sz="1800" dirty="0"/>
+            <a:endParaRPr lang="ja-JP" altLang="en-US" sz="1800" dirty="0"/>
           </a:p>
         </p:txBody>
       </p:sp>
@@ -4526,17 +4499,17 @@
               <a:buNone/>
             </a:pPr>
             <a:r>
-              <a:rPr lang="en-US" sz="1300" dirty="0">
+              <a:rPr lang="ja-JP" altLang="en-US" sz="1300" dirty="0">
                 <a:solidFill>
                   <a:srgbClr val="C5CBDC"/>
                 </a:solidFill>
                 <a:latin typeface="Calibri" pitchFamily="34" charset="0"/>
-                <a:ea typeface="Calibri" pitchFamily="34" charset="-122"/>
+                <a:ea typeface="Yu Gothic" pitchFamily="34" charset="-122"/>
                 <a:cs typeface="Calibri" pitchFamily="34" charset="-120"/>
               </a:rPr>
               <a:t>3事業のうち唯一の黒字。営業利益$1.66B。売上の55%を占め、利益は事実上100%。契約数1,200万件は前年比2倍。</a:t>
             </a:r>
-            <a:endParaRPr lang="en-US" sz="1300" dirty="0"/>
+            <a:endParaRPr lang="ja-JP" altLang="en-US" sz="1300" dirty="0"/>
           </a:p>
         </p:txBody>
       </p:sp>
@@ -4617,17 +4590,17 @@
               <a:buNone/>
             </a:pPr>
             <a:r>
-              <a:rPr lang="en-US" sz="1300" b="1" dirty="0">
+              <a:rPr lang="ja-JP" altLang="en-US" sz="1300" b="1" dirty="0">
                 <a:solidFill>
                   <a:srgbClr val="0A0E1F"/>
                 </a:solidFill>
                 <a:latin typeface="Calibri" pitchFamily="34" charset="0"/>
-                <a:ea typeface="Calibri" pitchFamily="34" charset="-122"/>
+                <a:ea typeface="Yu Gothic" pitchFamily="34" charset="-122"/>
                 <a:cs typeface="Calibri" pitchFamily="34" charset="-120"/>
               </a:rPr>
               <a:t>2</a:t>
             </a:r>
-            <a:endParaRPr lang="en-US" sz="1300" dirty="0"/>
+            <a:endParaRPr lang="ja-JP" altLang="en-US" sz="1300" dirty="0"/>
           </a:p>
         </p:txBody>
       </p:sp>
@@ -4656,17 +4629,17 @@
               <a:buNone/>
             </a:pPr>
             <a:r>
-              <a:rPr lang="en-US" sz="1800" b="1" dirty="0">
+              <a:rPr lang="ja-JP" altLang="en-US" sz="1800" b="1" dirty="0">
                 <a:solidFill>
                   <a:srgbClr val="FFB627"/>
                 </a:solidFill>
                 <a:latin typeface="Cambria" pitchFamily="34" charset="0"/>
-                <a:ea typeface="Cambria" pitchFamily="34" charset="-122"/>
+                <a:ea typeface="Yu Gothic" pitchFamily="34" charset="-122"/>
                 <a:cs typeface="Cambria" pitchFamily="34" charset="-120"/>
               </a:rPr>
               <a:t>打ち上げは「強いが赤字」</a:t>
             </a:r>
-            <a:endParaRPr lang="en-US" sz="1800" dirty="0"/>
+            <a:endParaRPr lang="ja-JP" altLang="en-US" sz="1800" dirty="0"/>
           </a:p>
         </p:txBody>
       </p:sp>
@@ -4698,17 +4671,17 @@
               <a:buNone/>
             </a:pPr>
             <a:r>
-              <a:rPr lang="en-US" sz="1300" dirty="0">
+              <a:rPr lang="ja-JP" altLang="en-US" sz="1300" dirty="0">
                 <a:solidFill>
                   <a:srgbClr val="C5CBDC"/>
                 </a:solidFill>
                 <a:latin typeface="Calibri" pitchFamily="34" charset="0"/>
-                <a:ea typeface="Calibri" pitchFamily="34" charset="-122"/>
+                <a:ea typeface="Yu Gothic" pitchFamily="34" charset="-122"/>
                 <a:cs typeface="Calibri" pitchFamily="34" charset="-120"/>
               </a:rPr>
               <a:t>Falcon 9の粗利率は約75%。部門赤字-$542Mの正体はStarship開発費で、四半期あたり約$1B。事業の弱さではない。</a:t>
             </a:r>
-            <a:endParaRPr lang="en-US" sz="1300" dirty="0"/>
+            <a:endParaRPr lang="ja-JP" altLang="en-US" sz="1300" dirty="0"/>
           </a:p>
         </p:txBody>
       </p:sp>
@@ -4789,17 +4762,17 @@
               <a:buNone/>
             </a:pPr>
             <a:r>
-              <a:rPr lang="en-US" sz="1300" b="1" dirty="0">
+              <a:rPr lang="ja-JP" altLang="en-US" sz="1300" b="1" dirty="0">
                 <a:solidFill>
                   <a:srgbClr val="0A0E1F"/>
                 </a:solidFill>
                 <a:latin typeface="Calibri" pitchFamily="34" charset="0"/>
-                <a:ea typeface="Calibri" pitchFamily="34" charset="-122"/>
+                <a:ea typeface="Yu Gothic" pitchFamily="34" charset="-122"/>
                 <a:cs typeface="Calibri" pitchFamily="34" charset="-120"/>
               </a:rPr>
               <a:t>3</a:t>
             </a:r>
-            <a:endParaRPr lang="en-US" sz="1300" dirty="0"/>
+            <a:endParaRPr lang="ja-JP" altLang="en-US" sz="1300" dirty="0"/>
           </a:p>
         </p:txBody>
       </p:sp>
@@ -4828,17 +4801,17 @@
               <a:buNone/>
             </a:pPr>
             <a:r>
-              <a:rPr lang="en-US" sz="1800" b="1" dirty="0">
+              <a:rPr lang="ja-JP" altLang="en-US" sz="1800" b="1" dirty="0">
                 <a:solidFill>
                   <a:srgbClr val="5FD3F3"/>
                 </a:solidFill>
                 <a:latin typeface="Cambria" pitchFamily="34" charset="0"/>
-                <a:ea typeface="Cambria" pitchFamily="34" charset="-122"/>
+                <a:ea typeface="Yu Gothic" pitchFamily="34" charset="-122"/>
                 <a:cs typeface="Cambria" pitchFamily="34" charset="-120"/>
               </a:rPr>
               <a:t>次の主戦場は電力</a:t>
             </a:r>
-            <a:endParaRPr lang="en-US" sz="1800" dirty="0"/>
+            <a:endParaRPr lang="ja-JP" altLang="en-US" sz="1800" dirty="0"/>
           </a:p>
         </p:txBody>
       </p:sp>
@@ -4870,17 +4843,17 @@
               <a:buNone/>
             </a:pPr>
             <a:r>
-              <a:rPr lang="en-US" sz="1300" dirty="0">
+              <a:rPr lang="ja-JP" altLang="en-US" sz="1300" dirty="0">
                 <a:solidFill>
                   <a:srgbClr val="C5CBDC"/>
                 </a:solidFill>
                 <a:latin typeface="Calibri" pitchFamily="34" charset="0"/>
-                <a:ea typeface="Calibri" pitchFamily="34" charset="-122"/>
+                <a:ea typeface="Yu Gothic" pitchFamily="34" charset="-122"/>
                 <a:cs typeface="Calibri" pitchFamily="34" charset="-120"/>
               </a:rPr>
               <a:t>2030年のDC需要219GWに地上の送電網が追いつかない。SpaceXはFCCに軌道DC衛星100万機を申請済み。</a:t>
             </a:r>
-            <a:endParaRPr lang="en-US" sz="1300" dirty="0"/>
+            <a:endParaRPr lang="ja-JP" altLang="en-US" sz="1300" dirty="0"/>
           </a:p>
         </p:txBody>
       </p:sp>
@@ -4909,17 +4882,17 @@
               <a:buNone/>
             </a:pPr>
             <a:r>
-              <a:rPr lang="en-US" sz="1100" dirty="0">
+              <a:rPr lang="ja-JP" altLang="en-US" sz="1100" dirty="0">
                 <a:solidFill>
                   <a:srgbClr val="858FAB"/>
                 </a:solidFill>
                 <a:latin typeface="Calibri" pitchFamily="34" charset="0"/>
-                <a:ea typeface="Calibri" pitchFamily="34" charset="-122"/>
+                <a:ea typeface="Yu Gothic" pitchFamily="34" charset="-122"/>
                 <a:cs typeface="Calibri" pitchFamily="34" charset="-120"/>
               </a:rPr>
               <a:t>02</a:t>
             </a:r>
-            <a:endParaRPr lang="en-US" sz="1100" dirty="0"/>
+            <a:endParaRPr lang="ja-JP" altLang="en-US" sz="1100" dirty="0"/>
           </a:p>
         </p:txBody>
       </p:sp>
@@ -4980,17 +4953,17 @@
               <a:buNone/>
             </a:pPr>
             <a:r>
-              <a:rPr lang="en-US" sz="3000" b="1" dirty="0">
+              <a:rPr lang="ja-JP" altLang="en-US" sz="3000" b="1" dirty="0">
                 <a:solidFill>
                   <a:srgbClr val="FFFFFF"/>
                 </a:solidFill>
                 <a:latin typeface="Cambria" pitchFamily="34" charset="0"/>
-                <a:ea typeface="Cambria" pitchFamily="34" charset="-122"/>
+                <a:ea typeface="Yu Gothic" pitchFamily="34" charset="-122"/>
                 <a:cs typeface="Cambria" pitchFamily="34" charset="-120"/>
               </a:rPr>
               <a:t>24年の軌跡</a:t>
             </a:r>
-            <a:endParaRPr lang="en-US" sz="3000" dirty="0"/>
+            <a:endParaRPr lang="ja-JP" altLang="en-US" sz="3000" dirty="0"/>
           </a:p>
         </p:txBody>
       </p:sp>
@@ -5019,17 +4992,17 @@
               <a:buNone/>
             </a:pPr>
             <a:r>
-              <a:rPr lang="en-US" sz="1350" dirty="0">
+              <a:rPr lang="ja-JP" altLang="en-US" sz="1350" dirty="0">
                 <a:solidFill>
                   <a:srgbClr val="FFB627"/>
                 </a:solidFill>
                 <a:latin typeface="Calibri" pitchFamily="34" charset="0"/>
-                <a:ea typeface="Calibri" pitchFamily="34" charset="-122"/>
+                <a:ea typeface="Yu Gothic" pitchFamily="34" charset="-122"/>
                 <a:cs typeface="Calibri" pitchFamily="34" charset="-120"/>
               </a:rPr>
               <a:t>倒産寸前から史上最大のIPOまで</a:t>
             </a:r>
-            <a:endParaRPr lang="en-US" sz="1350" dirty="0"/>
+            <a:endParaRPr lang="ja-JP" altLang="en-US" sz="1350" dirty="0"/>
           </a:p>
         </p:txBody>
       </p:sp>
@@ -5042,11 +5015,11 @@
         <p:spPr>
           <a:xfrm>
             <a:off x="640080" y="1572768"/>
-            <a:ext cx="5349240" cy="1078992"/>
+            <a:ext cx="5349240" cy="1024128"/>
           </a:xfrm>
           <a:prstGeom prst="roundRect">
             <a:avLst>
-              <a:gd name="adj" fmla="val 7627"/>
+              <a:gd name="adj" fmla="val 8036"/>
             </a:avLst>
           </a:prstGeom>
           <a:solidFill>
@@ -5085,17 +5058,17 @@
               <a:buNone/>
             </a:pPr>
             <a:r>
-              <a:rPr lang="en-US" sz="1600" b="1" dirty="0">
+              <a:rPr lang="ja-JP" altLang="en-US" sz="1600" b="1" dirty="0">
                 <a:solidFill>
                   <a:srgbClr val="FF6B35"/>
                 </a:solidFill>
                 <a:latin typeface="Cambria" pitchFamily="34" charset="0"/>
-                <a:ea typeface="Cambria" pitchFamily="34" charset="-122"/>
+                <a:ea typeface="Yu Gothic" pitchFamily="34" charset="-122"/>
                 <a:cs typeface="Cambria" pitchFamily="34" charset="-120"/>
               </a:rPr>
               <a:t>2002</a:t>
             </a:r>
-            <a:endParaRPr lang="en-US" sz="1600" dirty="0"/>
+            <a:endParaRPr lang="ja-JP" altLang="en-US" sz="1600" dirty="0"/>
           </a:p>
         </p:txBody>
       </p:sp>
@@ -5124,17 +5097,17 @@
               <a:buNone/>
             </a:pPr>
             <a:r>
-              <a:rPr lang="en-US" sz="1500" b="1" dirty="0">
+              <a:rPr lang="ja-JP" altLang="en-US" sz="1500" b="1" dirty="0">
                 <a:solidFill>
                   <a:srgbClr val="FFFFFF"/>
                 </a:solidFill>
                 <a:latin typeface="Cambria" pitchFamily="34" charset="0"/>
-                <a:ea typeface="Cambria" pitchFamily="34" charset="-122"/>
+                <a:ea typeface="Yu Gothic" pitchFamily="34" charset="-122"/>
                 <a:cs typeface="Cambria" pitchFamily="34" charset="-120"/>
               </a:rPr>
               <a:t>創業</a:t>
             </a:r>
-            <a:endParaRPr lang="en-US" sz="1500" dirty="0"/>
+            <a:endParaRPr lang="ja-JP" altLang="en-US" sz="1500" dirty="0"/>
           </a:p>
         </p:txBody>
       </p:sp>
@@ -5163,17 +5136,17 @@
               <a:buNone/>
             </a:pPr>
             <a:r>
-              <a:rPr lang="en-US" sz="1150" dirty="0">
+              <a:rPr lang="ja-JP" altLang="en-US" sz="1150" dirty="0">
                 <a:solidFill>
                   <a:srgbClr val="C5CBDC"/>
                 </a:solidFill>
                 <a:latin typeface="Calibri" pitchFamily="34" charset="0"/>
-                <a:ea typeface="Calibri" pitchFamily="34" charset="-122"/>
+                <a:ea typeface="Yu Gothic" pitchFamily="34" charset="-122"/>
                 <a:cs typeface="Calibri" pitchFamily="34" charset="-120"/>
               </a:rPr>
               <a:t>ロシアでICBM購入を断られ「自分で作る」と決断</a:t>
             </a:r>
-            <a:endParaRPr lang="en-US" sz="1150" dirty="0"/>
+            <a:endParaRPr lang="ja-JP" altLang="en-US" sz="1150" dirty="0"/>
           </a:p>
         </p:txBody>
       </p:sp>
@@ -5186,11 +5159,11 @@
         <p:spPr>
           <a:xfrm>
             <a:off x="6172200" y="1572768"/>
-            <a:ext cx="5349240" cy="1078992"/>
+            <a:ext cx="5349240" cy="1024128"/>
           </a:xfrm>
           <a:prstGeom prst="roundRect">
             <a:avLst>
-              <a:gd name="adj" fmla="val 7627"/>
+              <a:gd name="adj" fmla="val 8036"/>
             </a:avLst>
           </a:prstGeom>
           <a:solidFill>
@@ -5229,17 +5202,17 @@
               <a:buNone/>
             </a:pPr>
             <a:r>
-              <a:rPr lang="en-US" sz="1600" b="1" dirty="0">
+              <a:rPr lang="ja-JP" altLang="en-US" sz="1600" b="1" dirty="0">
                 <a:solidFill>
                   <a:srgbClr val="FF6B35"/>
                 </a:solidFill>
                 <a:latin typeface="Cambria" pitchFamily="34" charset="0"/>
-                <a:ea typeface="Cambria" pitchFamily="34" charset="-122"/>
+                <a:ea typeface="Yu Gothic" pitchFamily="34" charset="-122"/>
                 <a:cs typeface="Cambria" pitchFamily="34" charset="-120"/>
               </a:rPr>
               <a:t>2008</a:t>
             </a:r>
-            <a:endParaRPr lang="en-US" sz="1600" dirty="0"/>
+            <a:endParaRPr lang="ja-JP" altLang="en-US" sz="1600" dirty="0"/>
           </a:p>
         </p:txBody>
       </p:sp>
@@ -5268,17 +5241,17 @@
               <a:buNone/>
             </a:pPr>
             <a:r>
-              <a:rPr lang="en-US" sz="1500" b="1" dirty="0">
+              <a:rPr lang="ja-JP" altLang="en-US" sz="1500" b="1" dirty="0">
                 <a:solidFill>
                   <a:srgbClr val="FFFFFF"/>
                 </a:solidFill>
                 <a:latin typeface="Cambria" pitchFamily="34" charset="0"/>
-                <a:ea typeface="Cambria" pitchFamily="34" charset="-122"/>
+                <a:ea typeface="Yu Gothic" pitchFamily="34" charset="-122"/>
                 <a:cs typeface="Cambria" pitchFamily="34" charset="-120"/>
               </a:rPr>
               <a:t>崖っぷち</a:t>
             </a:r>
-            <a:endParaRPr lang="en-US" sz="1500" dirty="0"/>
+            <a:endParaRPr lang="ja-JP" altLang="en-US" sz="1500" dirty="0"/>
           </a:p>
         </p:txBody>
       </p:sp>
@@ -5307,17 +5280,17 @@
               <a:buNone/>
             </a:pPr>
             <a:r>
-              <a:rPr lang="en-US" sz="1150" dirty="0">
+              <a:rPr lang="ja-JP" altLang="en-US" sz="1150" dirty="0">
                 <a:solidFill>
                   <a:srgbClr val="C5CBDC"/>
                 </a:solidFill>
                 <a:latin typeface="Calibri" pitchFamily="34" charset="0"/>
-                <a:ea typeface="Calibri" pitchFamily="34" charset="-122"/>
+                <a:ea typeface="Yu Gothic" pitchFamily="34" charset="-122"/>
                 <a:cs typeface="Calibri" pitchFamily="34" charset="-120"/>
               </a:rPr>
               <a:t>Falcon 1が4回目で初成功。NASA CRS契約$1.6Bで倒産回避</a:t>
             </a:r>
-            <a:endParaRPr lang="en-US" sz="1150" dirty="0"/>
+            <a:endParaRPr lang="ja-JP" altLang="en-US" sz="1150" dirty="0"/>
           </a:p>
         </p:txBody>
       </p:sp>
@@ -5329,12 +5302,12 @@
         </p:nvSpPr>
         <p:spPr>
           <a:xfrm>
-            <a:off x="640080" y="2807208"/>
-            <a:ext cx="5349240" cy="1078992"/>
+            <a:off x="640080" y="2743200"/>
+            <a:ext cx="5349240" cy="1024128"/>
           </a:xfrm>
           <a:prstGeom prst="roundRect">
             <a:avLst>
-              <a:gd name="adj" fmla="val 7627"/>
+              <a:gd name="adj" fmla="val 8036"/>
             </a:avLst>
           </a:prstGeom>
           <a:solidFill>
@@ -5356,7 +5329,7 @@
         </p:nvSpPr>
         <p:spPr>
           <a:xfrm>
-            <a:off x="822960" y="2953512"/>
+            <a:off x="822960" y="2889504"/>
             <a:ext cx="1051560" cy="310896"/>
           </a:xfrm>
           <a:prstGeom prst="rect">
@@ -5373,17 +5346,17 @@
               <a:buNone/>
             </a:pPr>
             <a:r>
-              <a:rPr lang="en-US" sz="1600" b="1" dirty="0">
+              <a:rPr lang="ja-JP" altLang="en-US" sz="1600" b="1" dirty="0">
                 <a:solidFill>
                   <a:srgbClr val="FF6B35"/>
                 </a:solidFill>
                 <a:latin typeface="Cambria" pitchFamily="34" charset="0"/>
-                <a:ea typeface="Cambria" pitchFamily="34" charset="-122"/>
+                <a:ea typeface="Yu Gothic" pitchFamily="34" charset="-122"/>
                 <a:cs typeface="Cambria" pitchFamily="34" charset="-120"/>
               </a:rPr>
               <a:t>2010</a:t>
             </a:r>
-            <a:endParaRPr lang="en-US" sz="1600" dirty="0"/>
+            <a:endParaRPr lang="ja-JP" altLang="en-US" sz="1600" dirty="0"/>
           </a:p>
         </p:txBody>
       </p:sp>
@@ -5395,7 +5368,7 @@
         </p:nvSpPr>
         <p:spPr>
           <a:xfrm>
-            <a:off x="1847088" y="2953512"/>
+            <a:off x="1847088" y="2889504"/>
             <a:ext cx="3931920" cy="310896"/>
           </a:xfrm>
           <a:prstGeom prst="rect">
@@ -5412,17 +5385,17 @@
               <a:buNone/>
             </a:pPr>
             <a:r>
-              <a:rPr lang="en-US" sz="1500" b="1" dirty="0">
+              <a:rPr lang="ja-JP" altLang="en-US" sz="1500" b="1" dirty="0">
                 <a:solidFill>
                   <a:srgbClr val="FFFFFF"/>
                 </a:solidFill>
                 <a:latin typeface="Cambria" pitchFamily="34" charset="0"/>
-                <a:ea typeface="Cambria" pitchFamily="34" charset="-122"/>
+                <a:ea typeface="Yu Gothic" pitchFamily="34" charset="-122"/>
                 <a:cs typeface="Cambria" pitchFamily="34" charset="-120"/>
               </a:rPr>
               <a:t>Falcon 9初飛行</a:t>
             </a:r>
-            <a:endParaRPr lang="en-US" sz="1500" dirty="0"/>
+            <a:endParaRPr lang="ja-JP" altLang="en-US" sz="1500" dirty="0"/>
           </a:p>
         </p:txBody>
       </p:sp>
@@ -5434,7 +5407,7 @@
         </p:nvSpPr>
         <p:spPr>
           <a:xfrm>
-            <a:off x="822960" y="3337560"/>
+            <a:off x="822960" y="3273552"/>
             <a:ext cx="4983480" cy="438912"/>
           </a:xfrm>
           <a:prstGeom prst="rect">
@@ -5451,17 +5424,17 @@
               <a:buNone/>
             </a:pPr>
             <a:r>
-              <a:rPr lang="en-US" sz="1150" dirty="0">
+              <a:rPr lang="ja-JP" altLang="en-US" sz="1150" dirty="0">
                 <a:solidFill>
                   <a:srgbClr val="C5CBDC"/>
                 </a:solidFill>
                 <a:latin typeface="Calibri" pitchFamily="34" charset="0"/>
-                <a:ea typeface="Calibri" pitchFamily="34" charset="-122"/>
+                <a:ea typeface="Yu Gothic" pitchFamily="34" charset="-122"/>
                 <a:cs typeface="Calibri" pitchFamily="34" charset="-120"/>
               </a:rPr>
               <a:t>開発費$390M。NASA試算($3.6-4B)の約1/9で完成</a:t>
             </a:r>
-            <a:endParaRPr lang="en-US" sz="1150" dirty="0"/>
+            <a:endParaRPr lang="ja-JP" altLang="en-US" sz="1150" dirty="0"/>
           </a:p>
         </p:txBody>
       </p:sp>
@@ -5473,12 +5446,12 @@
         </p:nvSpPr>
         <p:spPr>
           <a:xfrm>
-            <a:off x="6172200" y="2807208"/>
-            <a:ext cx="5349240" cy="1078992"/>
+            <a:off x="6172200" y="2743200"/>
+            <a:ext cx="5349240" cy="1024128"/>
           </a:xfrm>
           <a:prstGeom prst="roundRect">
             <a:avLst>
-              <a:gd name="adj" fmla="val 7627"/>
+              <a:gd name="adj" fmla="val 8036"/>
             </a:avLst>
           </a:prstGeom>
           <a:solidFill>
@@ -5500,7 +5473,7 @@
         </p:nvSpPr>
         <p:spPr>
           <a:xfrm>
-            <a:off x="6355080" y="2953512"/>
+            <a:off x="6355080" y="2889504"/>
             <a:ext cx="1051560" cy="310896"/>
           </a:xfrm>
           <a:prstGeom prst="rect">
@@ -5517,17 +5490,17 @@
               <a:buNone/>
             </a:pPr>
             <a:r>
-              <a:rPr lang="en-US" sz="1600" b="1" dirty="0">
+              <a:rPr lang="ja-JP" altLang="en-US" sz="1600" b="1" dirty="0">
                 <a:solidFill>
                   <a:srgbClr val="FF6B35"/>
                 </a:solidFill>
                 <a:latin typeface="Cambria" pitchFamily="34" charset="0"/>
-                <a:ea typeface="Cambria" pitchFamily="34" charset="-122"/>
+                <a:ea typeface="Yu Gothic" pitchFamily="34" charset="-122"/>
                 <a:cs typeface="Cambria" pitchFamily="34" charset="-120"/>
               </a:rPr>
               <a:t>2015</a:t>
             </a:r>
-            <a:endParaRPr lang="en-US" sz="1600" dirty="0"/>
+            <a:endParaRPr lang="ja-JP" altLang="en-US" sz="1600" dirty="0"/>
           </a:p>
         </p:txBody>
       </p:sp>
@@ -5539,7 +5512,7 @@
         </p:nvSpPr>
         <p:spPr>
           <a:xfrm>
-            <a:off x="7379208" y="2953512"/>
+            <a:off x="7379208" y="2889504"/>
             <a:ext cx="3931920" cy="310896"/>
           </a:xfrm>
           <a:prstGeom prst="rect">
@@ -5556,17 +5529,17 @@
               <a:buNone/>
             </a:pPr>
             <a:r>
-              <a:rPr lang="en-US" sz="1500" b="1" dirty="0">
+              <a:rPr lang="ja-JP" altLang="en-US" sz="1500" b="1" dirty="0">
                 <a:solidFill>
                   <a:srgbClr val="FFFFFF"/>
                 </a:solidFill>
                 <a:latin typeface="Cambria" pitchFamily="34" charset="0"/>
-                <a:ea typeface="Cambria" pitchFamily="34" charset="-122"/>
+                <a:ea typeface="Yu Gothic" pitchFamily="34" charset="-122"/>
                 <a:cs typeface="Cambria" pitchFamily="34" charset="-120"/>
               </a:rPr>
               <a:t>着陸成功</a:t>
             </a:r>
-            <a:endParaRPr lang="en-US" sz="1500" dirty="0"/>
+            <a:endParaRPr lang="ja-JP" altLang="en-US" sz="1500" dirty="0"/>
           </a:p>
         </p:txBody>
       </p:sp>
@@ -5578,7 +5551,7 @@
         </p:nvSpPr>
         <p:spPr>
           <a:xfrm>
-            <a:off x="6355080" y="3337560"/>
+            <a:off x="6355080" y="3273552"/>
             <a:ext cx="4983480" cy="438912"/>
           </a:xfrm>
           <a:prstGeom prst="rect">
@@ -5595,17 +5568,17 @@
               <a:buNone/>
             </a:pPr>
             <a:r>
-              <a:rPr lang="en-US" sz="1150" dirty="0">
+              <a:rPr lang="ja-JP" altLang="en-US" sz="1150" dirty="0">
                 <a:solidFill>
                   <a:srgbClr val="C5CBDC"/>
                 </a:solidFill>
                 <a:latin typeface="Calibri" pitchFamily="34" charset="0"/>
-                <a:ea typeface="Calibri" pitchFamily="34" charset="-122"/>
+                <a:ea typeface="Yu Gothic" pitchFamily="34" charset="-122"/>
                 <a:cs typeface="Calibri" pitchFamily="34" charset="-120"/>
               </a:rPr>
               <a:t>第1段の地上帰還に世界初成功。再利用時代が始まる</a:t>
             </a:r>
-            <a:endParaRPr lang="en-US" sz="1150" dirty="0"/>
+            <a:endParaRPr lang="ja-JP" altLang="en-US" sz="1150" dirty="0"/>
           </a:p>
         </p:txBody>
       </p:sp>
@@ -5617,12 +5590,12 @@
         </p:nvSpPr>
         <p:spPr>
           <a:xfrm>
-            <a:off x="640080" y="4041648"/>
-            <a:ext cx="5349240" cy="1078992"/>
+            <a:off x="640080" y="3913632"/>
+            <a:ext cx="5349240" cy="1024128"/>
           </a:xfrm>
           <a:prstGeom prst="roundRect">
             <a:avLst>
-              <a:gd name="adj" fmla="val 7627"/>
+              <a:gd name="adj" fmla="val 8036"/>
             </a:avLst>
           </a:prstGeom>
           <a:solidFill>
@@ -5644,7 +5617,7 @@
         </p:nvSpPr>
         <p:spPr>
           <a:xfrm>
-            <a:off x="822960" y="4187952"/>
+            <a:off x="822960" y="4059936"/>
             <a:ext cx="1051560" cy="310896"/>
           </a:xfrm>
           <a:prstGeom prst="rect">
@@ -5661,17 +5634,17 @@
               <a:buNone/>
             </a:pPr>
             <a:r>
-              <a:rPr lang="en-US" sz="1600" b="1" dirty="0">
+              <a:rPr lang="ja-JP" altLang="en-US" sz="1600" b="1" dirty="0">
                 <a:solidFill>
                   <a:srgbClr val="FF6B35"/>
                 </a:solidFill>
                 <a:latin typeface="Cambria" pitchFamily="34" charset="0"/>
-                <a:ea typeface="Cambria" pitchFamily="34" charset="-122"/>
+                <a:ea typeface="Yu Gothic" pitchFamily="34" charset="-122"/>
                 <a:cs typeface="Cambria" pitchFamily="34" charset="-120"/>
               </a:rPr>
               <a:t>2019</a:t>
             </a:r>
-            <a:endParaRPr lang="en-US" sz="1600" dirty="0"/>
+            <a:endParaRPr lang="ja-JP" altLang="en-US" sz="1600" dirty="0"/>
           </a:p>
         </p:txBody>
       </p:sp>
@@ -5683,7 +5656,7 @@
         </p:nvSpPr>
         <p:spPr>
           <a:xfrm>
-            <a:off x="1847088" y="4187952"/>
+            <a:off x="1847088" y="4059936"/>
             <a:ext cx="3931920" cy="310896"/>
           </a:xfrm>
           <a:prstGeom prst="rect">
@@ -5700,17 +5673,17 @@
               <a:buNone/>
             </a:pPr>
             <a:r>
-              <a:rPr lang="en-US" sz="1500" b="1" dirty="0">
+              <a:rPr lang="ja-JP" altLang="en-US" sz="1500" b="1" dirty="0">
                 <a:solidFill>
                   <a:srgbClr val="FFFFFF"/>
                 </a:solidFill>
                 <a:latin typeface="Cambria" pitchFamily="34" charset="0"/>
-                <a:ea typeface="Cambria" pitchFamily="34" charset="-122"/>
+                <a:ea typeface="Yu Gothic" pitchFamily="34" charset="-122"/>
                 <a:cs typeface="Cambria" pitchFamily="34" charset="-120"/>
               </a:rPr>
               <a:t>Starlink開始</a:t>
             </a:r>
-            <a:endParaRPr lang="en-US" sz="1500" dirty="0"/>
+            <a:endParaRPr lang="ja-JP" altLang="en-US" sz="1500" dirty="0"/>
           </a:p>
         </p:txBody>
       </p:sp>
@@ -5722,7 +5695,7 @@
         </p:nvSpPr>
         <p:spPr>
           <a:xfrm>
-            <a:off x="822960" y="4572000"/>
+            <a:off x="822960" y="4443984"/>
             <a:ext cx="4983480" cy="438912"/>
           </a:xfrm>
           <a:prstGeom prst="rect">
@@ -5739,17 +5712,17 @@
               <a:buNone/>
             </a:pPr>
             <a:r>
-              <a:rPr lang="en-US" sz="1150" dirty="0">
+              <a:rPr lang="ja-JP" altLang="en-US" sz="1150" dirty="0">
                 <a:solidFill>
                   <a:srgbClr val="C5CBDC"/>
                 </a:solidFill>
                 <a:latin typeface="Calibri" pitchFamily="34" charset="0"/>
-                <a:ea typeface="Calibri" pitchFamily="34" charset="-122"/>
+                <a:ea typeface="Yu Gothic" pitchFamily="34" charset="-122"/>
                 <a:cs typeface="Calibri" pitchFamily="34" charset="-120"/>
               </a:rPr>
               <a:t>衛星量産と打ち上げの垂直統合が回り出す</a:t>
             </a:r>
-            <a:endParaRPr lang="en-US" sz="1150" dirty="0"/>
+            <a:endParaRPr lang="ja-JP" altLang="en-US" sz="1150" dirty="0"/>
           </a:p>
         </p:txBody>
       </p:sp>
@@ -5761,12 +5734,12 @@
         </p:nvSpPr>
         <p:spPr>
           <a:xfrm>
-            <a:off x="6172200" y="4041648"/>
-            <a:ext cx="5349240" cy="1078992"/>
+            <a:off x="6172200" y="3913632"/>
+            <a:ext cx="5349240" cy="1024128"/>
           </a:xfrm>
           <a:prstGeom prst="roundRect">
             <a:avLst>
-              <a:gd name="adj" fmla="val 7627"/>
+              <a:gd name="adj" fmla="val 8036"/>
             </a:avLst>
           </a:prstGeom>
           <a:solidFill>
@@ -5788,7 +5761,7 @@
         </p:nvSpPr>
         <p:spPr>
           <a:xfrm>
-            <a:off x="6355080" y="4187952"/>
+            <a:off x="6355080" y="4059936"/>
             <a:ext cx="1051560" cy="310896"/>
           </a:xfrm>
           <a:prstGeom prst="rect">
@@ -5805,17 +5778,17 @@
               <a:buNone/>
             </a:pPr>
             <a:r>
-              <a:rPr lang="en-US" sz="1600" b="1" dirty="0">
+              <a:rPr lang="ja-JP" altLang="en-US" sz="1600" b="1" dirty="0">
                 <a:solidFill>
                   <a:srgbClr val="FF6B35"/>
                 </a:solidFill>
                 <a:latin typeface="Cambria" pitchFamily="34" charset="0"/>
-                <a:ea typeface="Cambria" pitchFamily="34" charset="-122"/>
+                <a:ea typeface="Yu Gothic" pitchFamily="34" charset="-122"/>
                 <a:cs typeface="Cambria" pitchFamily="34" charset="-120"/>
               </a:rPr>
               <a:t>2023</a:t>
             </a:r>
-            <a:endParaRPr lang="en-US" sz="1600" dirty="0"/>
+            <a:endParaRPr lang="ja-JP" altLang="en-US" sz="1600" dirty="0"/>
           </a:p>
         </p:txBody>
       </p:sp>
@@ -5827,7 +5800,7 @@
         </p:nvSpPr>
         <p:spPr>
           <a:xfrm>
-            <a:off x="7379208" y="4187952"/>
+            <a:off x="7379208" y="4059936"/>
             <a:ext cx="3931920" cy="310896"/>
           </a:xfrm>
           <a:prstGeom prst="rect">
@@ -5844,17 +5817,17 @@
               <a:buNone/>
             </a:pPr>
             <a:r>
-              <a:rPr lang="en-US" sz="1500" b="1" dirty="0">
+              <a:rPr lang="ja-JP" altLang="en-US" sz="1500" b="1" dirty="0">
                 <a:solidFill>
                   <a:srgbClr val="FFFFFF"/>
                 </a:solidFill>
                 <a:latin typeface="Cambria" pitchFamily="34" charset="0"/>
-                <a:ea typeface="Cambria" pitchFamily="34" charset="-122"/>
+                <a:ea typeface="Yu Gothic" pitchFamily="34" charset="-122"/>
                 <a:cs typeface="Cambria" pitchFamily="34" charset="-120"/>
               </a:rPr>
               <a:t>Starship初飛行</a:t>
             </a:r>
-            <a:endParaRPr lang="en-US" sz="1500" dirty="0"/>
+            <a:endParaRPr lang="ja-JP" altLang="en-US" sz="1500" dirty="0"/>
           </a:p>
         </p:txBody>
       </p:sp>
@@ -5866,7 +5839,7 @@
         </p:nvSpPr>
         <p:spPr>
           <a:xfrm>
-            <a:off x="6355080" y="4572000"/>
+            <a:off x="6355080" y="4443984"/>
             <a:ext cx="4983480" cy="438912"/>
           </a:xfrm>
           <a:prstGeom prst="rect">
@@ -5883,17 +5856,17 @@
               <a:buNone/>
             </a:pPr>
             <a:r>
-              <a:rPr lang="en-US" sz="1150" dirty="0">
+              <a:rPr lang="ja-JP" altLang="en-US" sz="1150" dirty="0">
                 <a:solidFill>
                   <a:srgbClr val="C5CBDC"/>
                 </a:solidFill>
                 <a:latin typeface="Calibri" pitchFamily="34" charset="0"/>
-                <a:ea typeface="Calibri" pitchFamily="34" charset="-122"/>
+                <a:ea typeface="Yu Gothic" pitchFamily="34" charset="-122"/>
                 <a:cs typeface="Calibri" pitchFamily="34" charset="-120"/>
               </a:rPr>
               <a:t>完全再利用への挑戦。累計開発費は$15B超へ</a:t>
             </a:r>
-            <a:endParaRPr lang="en-US" sz="1150" dirty="0"/>
+            <a:endParaRPr lang="ja-JP" altLang="en-US" sz="1150" dirty="0"/>
           </a:p>
         </p:txBody>
       </p:sp>
@@ -5905,12 +5878,12 @@
         </p:nvSpPr>
         <p:spPr>
           <a:xfrm>
-            <a:off x="640080" y="5276088"/>
-            <a:ext cx="5349240" cy="1078992"/>
+            <a:off x="640080" y="5084064"/>
+            <a:ext cx="5349240" cy="1024128"/>
           </a:xfrm>
           <a:prstGeom prst="roundRect">
             <a:avLst>
-              <a:gd name="adj" fmla="val 7627"/>
+              <a:gd name="adj" fmla="val 8036"/>
             </a:avLst>
           </a:prstGeom>
           <a:solidFill>
@@ -5932,7 +5905,7 @@
         </p:nvSpPr>
         <p:spPr>
           <a:xfrm>
-            <a:off x="822960" y="5422392"/>
+            <a:off x="822960" y="5230368"/>
             <a:ext cx="1051560" cy="310896"/>
           </a:xfrm>
           <a:prstGeom prst="rect">
@@ -5949,17 +5922,17 @@
               <a:buNone/>
             </a:pPr>
             <a:r>
-              <a:rPr lang="en-US" sz="1600" b="1" dirty="0">
+              <a:rPr lang="ja-JP" altLang="en-US" sz="1600" b="1" dirty="0">
                 <a:solidFill>
                   <a:srgbClr val="FF6B35"/>
                 </a:solidFill>
                 <a:latin typeface="Cambria" pitchFamily="34" charset="0"/>
-                <a:ea typeface="Cambria" pitchFamily="34" charset="-122"/>
+                <a:ea typeface="Yu Gothic" pitchFamily="34" charset="-122"/>
                 <a:cs typeface="Cambria" pitchFamily="34" charset="-120"/>
               </a:rPr>
               <a:t>2026.6</a:t>
             </a:r>
-            <a:endParaRPr lang="en-US" sz="1600" dirty="0"/>
+            <a:endParaRPr lang="ja-JP" altLang="en-US" sz="1600" dirty="0"/>
           </a:p>
         </p:txBody>
       </p:sp>
@@ -5971,7 +5944,7 @@
         </p:nvSpPr>
         <p:spPr>
           <a:xfrm>
-            <a:off x="1847088" y="5422392"/>
+            <a:off x="1847088" y="5230368"/>
             <a:ext cx="3931920" cy="310896"/>
           </a:xfrm>
           <a:prstGeom prst="rect">
@@ -5988,17 +5961,17 @@
               <a:buNone/>
             </a:pPr>
             <a:r>
-              <a:rPr lang="en-US" sz="1500" b="1" dirty="0">
+              <a:rPr lang="ja-JP" altLang="en-US" sz="1500" b="1" dirty="0">
                 <a:solidFill>
                   <a:srgbClr val="FFFFFF"/>
                 </a:solidFill>
                 <a:latin typeface="Cambria" pitchFamily="34" charset="0"/>
-                <a:ea typeface="Cambria" pitchFamily="34" charset="-122"/>
+                <a:ea typeface="Yu Gothic" pitchFamily="34" charset="-122"/>
                 <a:cs typeface="Cambria" pitchFamily="34" charset="-120"/>
               </a:rPr>
               <a:t>IPO</a:t>
             </a:r>
-            <a:endParaRPr lang="en-US" sz="1500" dirty="0"/>
+            <a:endParaRPr lang="ja-JP" altLang="en-US" sz="1500" dirty="0"/>
           </a:p>
         </p:txBody>
       </p:sp>
@@ -6010,7 +5983,7 @@
         </p:nvSpPr>
         <p:spPr>
           <a:xfrm>
-            <a:off x="822960" y="5806440"/>
+            <a:off x="822960" y="5614416"/>
             <a:ext cx="4983480" cy="438912"/>
           </a:xfrm>
           <a:prstGeom prst="rect">
@@ -6027,17 +6000,17 @@
               <a:buNone/>
             </a:pPr>
             <a:r>
-              <a:rPr lang="en-US" sz="1150" dirty="0">
+              <a:rPr lang="ja-JP" altLang="en-US" sz="1150" dirty="0">
                 <a:solidFill>
                   <a:srgbClr val="C5CBDC"/>
                 </a:solidFill>
                 <a:latin typeface="Calibri" pitchFamily="34" charset="0"/>
-                <a:ea typeface="Calibri" pitchFamily="34" charset="-122"/>
+                <a:ea typeface="Yu Gothic" pitchFamily="34" charset="-122"/>
                 <a:cs typeface="Calibri" pitchFamily="34" charset="-120"/>
               </a:rPr>
               <a:t>NASDAQ上場。公開価格$135、時価総額$1.75兆</a:t>
             </a:r>
-            <a:endParaRPr lang="en-US" sz="1150" dirty="0"/>
+            <a:endParaRPr lang="ja-JP" altLang="en-US" sz="1150" dirty="0"/>
           </a:p>
         </p:txBody>
       </p:sp>
@@ -6049,12 +6022,12 @@
         </p:nvSpPr>
         <p:spPr>
           <a:xfrm>
-            <a:off x="6172200" y="5276088"/>
-            <a:ext cx="5349240" cy="1078992"/>
+            <a:off x="6172200" y="5084064"/>
+            <a:ext cx="5349240" cy="1024128"/>
           </a:xfrm>
           <a:prstGeom prst="roundRect">
             <a:avLst>
-              <a:gd name="adj" fmla="val 7627"/>
+              <a:gd name="adj" fmla="val 8036"/>
             </a:avLst>
           </a:prstGeom>
           <a:solidFill>
@@ -6076,7 +6049,7 @@
         </p:nvSpPr>
         <p:spPr>
           <a:xfrm>
-            <a:off x="6355080" y="5422392"/>
+            <a:off x="6355080" y="5230368"/>
             <a:ext cx="1051560" cy="310896"/>
           </a:xfrm>
           <a:prstGeom prst="rect">
@@ -6093,17 +6066,17 @@
               <a:buNone/>
             </a:pPr>
             <a:r>
-              <a:rPr lang="en-US" sz="1600" b="1" dirty="0">
+              <a:rPr lang="ja-JP" altLang="en-US" sz="1600" b="1" dirty="0">
                 <a:solidFill>
                   <a:srgbClr val="FF6B35"/>
                 </a:solidFill>
                 <a:latin typeface="Cambria" pitchFamily="34" charset="0"/>
-                <a:ea typeface="Cambria" pitchFamily="34" charset="-122"/>
+                <a:ea typeface="Yu Gothic" pitchFamily="34" charset="-122"/>
                 <a:cs typeface="Cambria" pitchFamily="34" charset="-120"/>
               </a:rPr>
               <a:t>2026.8</a:t>
             </a:r>
-            <a:endParaRPr lang="en-US" sz="1600" dirty="0"/>
+            <a:endParaRPr lang="ja-JP" altLang="en-US" sz="1600" dirty="0"/>
           </a:p>
         </p:txBody>
       </p:sp>
@@ -6115,7 +6088,7 @@
         </p:nvSpPr>
         <p:spPr>
           <a:xfrm>
-            <a:off x="7379208" y="5422392"/>
+            <a:off x="7379208" y="5230368"/>
             <a:ext cx="3931920" cy="310896"/>
           </a:xfrm>
           <a:prstGeom prst="rect">
@@ -6132,17 +6105,17 @@
               <a:buNone/>
             </a:pPr>
             <a:r>
-              <a:rPr lang="en-US" sz="1500" b="1" dirty="0">
+              <a:rPr lang="ja-JP" altLang="en-US" sz="1500" b="1" dirty="0">
                 <a:solidFill>
                   <a:srgbClr val="FFFFFF"/>
                 </a:solidFill>
                 <a:latin typeface="Cambria" pitchFamily="34" charset="0"/>
-                <a:ea typeface="Cambria" pitchFamily="34" charset="-122"/>
+                <a:ea typeface="Yu Gothic" pitchFamily="34" charset="-122"/>
                 <a:cs typeface="Cambria" pitchFamily="34" charset="-120"/>
               </a:rPr>
               <a:t>初決算</a:t>
             </a:r>
-            <a:endParaRPr lang="en-US" sz="1500" dirty="0"/>
+            <a:endParaRPr lang="ja-JP" altLang="en-US" sz="1500" dirty="0"/>
           </a:p>
         </p:txBody>
       </p:sp>
@@ -6154,7 +6127,7 @@
         </p:nvSpPr>
         <p:spPr>
           <a:xfrm>
-            <a:off x="6355080" y="5806440"/>
+            <a:off x="6355080" y="5614416"/>
             <a:ext cx="4983480" cy="438912"/>
           </a:xfrm>
           <a:prstGeom prst="rect">
@@ -6171,17 +6144,17 @@
               <a:buNone/>
             </a:pPr>
             <a:r>
-              <a:rPr lang="en-US" sz="1150" dirty="0">
+              <a:rPr lang="ja-JP" altLang="en-US" sz="1150" dirty="0">
                 <a:solidFill>
                   <a:srgbClr val="C5CBDC"/>
                 </a:solidFill>
                 <a:latin typeface="Calibri" pitchFamily="34" charset="0"/>
-                <a:ea typeface="Calibri" pitchFamily="34" charset="-122"/>
+                <a:ea typeface="Yu Gothic" pitchFamily="34" charset="-122"/>
                 <a:cs typeface="Calibri" pitchFamily="34" charset="-120"/>
               </a:rPr>
               <a:t>売上$7.81B(+92%)。同時にロックアップ解除が開始</a:t>
             </a:r>
-            <a:endParaRPr lang="en-US" sz="1150" dirty="0"/>
+            <a:endParaRPr lang="ja-JP" altLang="en-US" sz="1150" dirty="0"/>
           </a:p>
         </p:txBody>
       </p:sp>
@@ -6210,17 +6183,17 @@
               <a:buNone/>
             </a:pPr>
             <a:r>
-              <a:rPr lang="en-US" sz="1100" dirty="0">
+              <a:rPr lang="ja-JP" altLang="en-US" sz="1100" dirty="0">
                 <a:solidFill>
                   <a:srgbClr val="858FAB"/>
                 </a:solidFill>
                 <a:latin typeface="Calibri" pitchFamily="34" charset="0"/>
-                <a:ea typeface="Calibri" pitchFamily="34" charset="-122"/>
+                <a:ea typeface="Yu Gothic" pitchFamily="34" charset="-122"/>
                 <a:cs typeface="Calibri" pitchFamily="34" charset="-120"/>
               </a:rPr>
               <a:t>03</a:t>
             </a:r>
-            <a:endParaRPr lang="en-US" sz="1100" dirty="0"/>
+            <a:endParaRPr lang="ja-JP" altLang="en-US" sz="1100" dirty="0"/>
           </a:p>
         </p:txBody>
       </p:sp>
@@ -6281,17 +6254,17 @@
               <a:buNone/>
             </a:pPr>
             <a:r>
-              <a:rPr lang="en-US" sz="3000" b="1" dirty="0">
+              <a:rPr lang="ja-JP" altLang="en-US" sz="3000" b="1" dirty="0">
                 <a:solidFill>
                   <a:srgbClr val="FFFFFF"/>
                 </a:solidFill>
                 <a:latin typeface="Cambria" pitchFamily="34" charset="0"/>
-                <a:ea typeface="Cambria" pitchFamily="34" charset="-122"/>
+                <a:ea typeface="Yu Gothic" pitchFamily="34" charset="-122"/>
                 <a:cs typeface="Cambria" pitchFamily="34" charset="-120"/>
               </a:rPr>
               <a:t>Q2 2026決算 — 3事業の実像</a:t>
             </a:r>
-            <a:endParaRPr lang="en-US" sz="3000" dirty="0"/>
+            <a:endParaRPr lang="ja-JP" altLang="en-US" sz="3000" dirty="0"/>
           </a:p>
         </p:txBody>
       </p:sp>
@@ -6320,17 +6293,17 @@
               <a:buNone/>
             </a:pPr>
             <a:r>
-              <a:rPr lang="en-US" sz="1350" dirty="0">
+              <a:rPr lang="ja-JP" altLang="en-US" sz="1350" dirty="0">
                 <a:solidFill>
                   <a:srgbClr val="FFB627"/>
                 </a:solidFill>
                 <a:latin typeface="Calibri" pitchFamily="34" charset="0"/>
-                <a:ea typeface="Calibri" pitchFamily="34" charset="-122"/>
+                <a:ea typeface="Yu Gothic" pitchFamily="34" charset="-122"/>
                 <a:cs typeface="Calibri" pitchFamily="34" charset="-120"/>
               </a:rPr>
               <a:t>売上$7.81B (+92% YoY) / 純損失 -$541M</a:t>
             </a:r>
-            <a:endParaRPr lang="en-US" sz="1350" dirty="0"/>
+            <a:endParaRPr lang="ja-JP" altLang="en-US" sz="1350" dirty="0"/>
           </a:p>
         </p:txBody>
       </p:sp>
@@ -6375,17 +6348,17 @@
               <a:buNone/>
             </a:pPr>
             <a:r>
-              <a:rPr lang="en-US" sz="1600" b="1" dirty="0">
+              <a:rPr lang="ja-JP" altLang="en-US" sz="1600" b="1" dirty="0">
                 <a:solidFill>
                   <a:srgbClr val="FFFFFF"/>
                 </a:solidFill>
                 <a:latin typeface="Cambria" pitchFamily="34" charset="0"/>
-                <a:ea typeface="Cambria" pitchFamily="34" charset="-122"/>
+                <a:ea typeface="Yu Gothic" pitchFamily="34" charset="-122"/>
                 <a:cs typeface="Cambria" pitchFamily="34" charset="-120"/>
               </a:rPr>
               <a:t>営業損益で見ると構図が反転する</a:t>
             </a:r>
-            <a:endParaRPr lang="en-US" sz="1600" dirty="0"/>
+            <a:endParaRPr lang="ja-JP" altLang="en-US" sz="1600" dirty="0"/>
           </a:p>
         </p:txBody>
       </p:sp>
@@ -6441,17 +6414,17 @@
               <a:buNone/>
             </a:pPr>
             <a:r>
-              <a:rPr lang="en-US" sz="1400" b="1" dirty="0">
+              <a:rPr lang="ja-JP" altLang="en-US" sz="1400" b="1" dirty="0">
                 <a:solidFill>
                   <a:srgbClr val="FFFFFF"/>
                 </a:solidFill>
                 <a:latin typeface="Calibri" pitchFamily="34" charset="0"/>
-                <a:ea typeface="Calibri" pitchFamily="34" charset="-122"/>
+                <a:ea typeface="Yu Gothic" pitchFamily="34" charset="-122"/>
                 <a:cs typeface="Calibri" pitchFamily="34" charset="-120"/>
               </a:rPr>
               <a:t>Connectivity</a:t>
             </a:r>
-            <a:endParaRPr lang="en-US" sz="1400" dirty="0"/>
+            <a:endParaRPr lang="ja-JP" altLang="en-US" sz="1400" dirty="0"/>
           </a:p>
         </p:txBody>
       </p:sp>
@@ -6480,17 +6453,17 @@
               <a:buNone/>
             </a:pPr>
             <a:r>
-              <a:rPr lang="en-US" sz="1150" dirty="0">
+              <a:rPr lang="ja-JP" altLang="en-US" sz="1150" dirty="0">
                 <a:solidFill>
                   <a:srgbClr val="858FAB"/>
                 </a:solidFill>
                 <a:latin typeface="Calibri" pitchFamily="34" charset="0"/>
-                <a:ea typeface="Calibri" pitchFamily="34" charset="-122"/>
+                <a:ea typeface="Yu Gothic" pitchFamily="34" charset="-122"/>
                 <a:cs typeface="Calibri" pitchFamily="34" charset="-120"/>
               </a:rPr>
               <a:t>成長率 +66%</a:t>
             </a:r>
-            <a:endParaRPr lang="en-US" sz="1150" dirty="0"/>
+            <a:endParaRPr lang="ja-JP" altLang="en-US" sz="1150" dirty="0"/>
           </a:p>
         </p:txBody>
       </p:sp>
@@ -6519,17 +6492,17 @@
               <a:buNone/>
             </a:pPr>
             <a:r>
-              <a:rPr lang="en-US" sz="1800" b="1" dirty="0">
+              <a:rPr lang="ja-JP" altLang="en-US" sz="1800" b="1" dirty="0">
                 <a:solidFill>
                   <a:srgbClr val="4ECB8E"/>
                 </a:solidFill>
                 <a:latin typeface="Cambria" pitchFamily="34" charset="0"/>
-                <a:ea typeface="Cambria" pitchFamily="34" charset="-122"/>
+                <a:ea typeface="Yu Gothic" pitchFamily="34" charset="-122"/>
                 <a:cs typeface="Cambria" pitchFamily="34" charset="-120"/>
               </a:rPr>
               <a:t>+$1.66B</a:t>
             </a:r>
-            <a:endParaRPr lang="en-US" sz="1800" dirty="0"/>
+            <a:endParaRPr lang="ja-JP" altLang="en-US" sz="1800" dirty="0"/>
           </a:p>
         </p:txBody>
       </p:sp>
@@ -6558,17 +6531,17 @@
               <a:buNone/>
             </a:pPr>
             <a:r>
-              <a:rPr lang="en-US" sz="1050" dirty="0">
+              <a:rPr lang="ja-JP" altLang="en-US" sz="1050" dirty="0">
                 <a:solidFill>
                   <a:srgbClr val="C5CBDC"/>
                 </a:solidFill>
                 <a:latin typeface="Calibri" pitchFamily="34" charset="0"/>
-                <a:ea typeface="Calibri" pitchFamily="34" charset="-122"/>
+                <a:ea typeface="Yu Gothic" pitchFamily="34" charset="-122"/>
                 <a:cs typeface="Calibri" pitchFamily="34" charset="-120"/>
               </a:rPr>
               <a:t>唯一の黒字。契約1,200万件</a:t>
             </a:r>
-            <a:endParaRPr lang="en-US" sz="1050" dirty="0"/>
+            <a:endParaRPr lang="ja-JP" altLang="en-US" sz="1050" dirty="0"/>
           </a:p>
         </p:txBody>
       </p:sp>
@@ -6624,17 +6597,17 @@
               <a:buNone/>
             </a:pPr>
             <a:r>
-              <a:rPr lang="en-US" sz="1400" b="1" dirty="0">
+              <a:rPr lang="ja-JP" altLang="en-US" sz="1400" b="1" dirty="0">
                 <a:solidFill>
                   <a:srgbClr val="FFFFFF"/>
                 </a:solidFill>
                 <a:latin typeface="Calibri" pitchFamily="34" charset="0"/>
-                <a:ea typeface="Calibri" pitchFamily="34" charset="-122"/>
+                <a:ea typeface="Yu Gothic" pitchFamily="34" charset="-122"/>
                 <a:cs typeface="Calibri" pitchFamily="34" charset="-120"/>
               </a:rPr>
               <a:t>AI</a:t>
             </a:r>
-            <a:endParaRPr lang="en-US" sz="1400" dirty="0"/>
+            <a:endParaRPr lang="ja-JP" altLang="en-US" sz="1400" dirty="0"/>
           </a:p>
         </p:txBody>
       </p:sp>
@@ -6663,17 +6636,17 @@
               <a:buNone/>
             </a:pPr>
             <a:r>
-              <a:rPr lang="en-US" sz="1150" dirty="0">
+              <a:rPr lang="ja-JP" altLang="en-US" sz="1150" dirty="0">
                 <a:solidFill>
                   <a:srgbClr val="858FAB"/>
                 </a:solidFill>
                 <a:latin typeface="Calibri" pitchFamily="34" charset="0"/>
-                <a:ea typeface="Calibri" pitchFamily="34" charset="-122"/>
+                <a:ea typeface="Yu Gothic" pitchFamily="34" charset="-122"/>
                 <a:cs typeface="Calibri" pitchFamily="34" charset="-120"/>
               </a:rPr>
               <a:t>成長率 +247%</a:t>
             </a:r>
-            <a:endParaRPr lang="en-US" sz="1150" dirty="0"/>
+            <a:endParaRPr lang="ja-JP" altLang="en-US" sz="1150" dirty="0"/>
           </a:p>
         </p:txBody>
       </p:sp>
@@ -6702,17 +6675,17 @@
               <a:buNone/>
             </a:pPr>
             <a:r>
-              <a:rPr lang="en-US" sz="1800" b="1" dirty="0">
+              <a:rPr lang="ja-JP" altLang="en-US" sz="1800" b="1" dirty="0">
                 <a:solidFill>
                   <a:srgbClr val="F4646B"/>
                 </a:solidFill>
                 <a:latin typeface="Cambria" pitchFamily="34" charset="0"/>
-                <a:ea typeface="Cambria" pitchFamily="34" charset="-122"/>
+                <a:ea typeface="Yu Gothic" pitchFamily="34" charset="-122"/>
                 <a:cs typeface="Cambria" pitchFamily="34" charset="-120"/>
               </a:rPr>
               <a:t>-$1.26B</a:t>
             </a:r>
-            <a:endParaRPr lang="en-US" sz="1800" dirty="0"/>
+            <a:endParaRPr lang="ja-JP" altLang="en-US" sz="1800" dirty="0"/>
           </a:p>
         </p:txBody>
       </p:sp>
@@ -6741,17 +6714,17 @@
               <a:buNone/>
             </a:pPr>
             <a:r>
-              <a:rPr lang="en-US" sz="1050" dirty="0">
+              <a:rPr lang="ja-JP" altLang="en-US" sz="1050" dirty="0">
                 <a:solidFill>
                   <a:srgbClr val="C5CBDC"/>
                 </a:solidFill>
                 <a:latin typeface="Calibri" pitchFamily="34" charset="0"/>
-                <a:ea typeface="Calibri" pitchFamily="34" charset="-122"/>
+                <a:ea typeface="Yu Gothic" pitchFamily="34" charset="-122"/>
                 <a:cs typeface="Calibri" pitchFamily="34" charset="-120"/>
               </a:rPr>
               <a:t>設備投資$15.8B/四半期</a:t>
             </a:r>
-            <a:endParaRPr lang="en-US" sz="1050" dirty="0"/>
+            <a:endParaRPr lang="ja-JP" altLang="en-US" sz="1050" dirty="0"/>
           </a:p>
         </p:txBody>
       </p:sp>
@@ -6807,17 +6780,17 @@
               <a:buNone/>
             </a:pPr>
             <a:r>
-              <a:rPr lang="en-US" sz="1400" b="1" dirty="0">
+              <a:rPr lang="ja-JP" altLang="en-US" sz="1400" b="1" dirty="0">
                 <a:solidFill>
                   <a:srgbClr val="FFFFFF"/>
                 </a:solidFill>
                 <a:latin typeface="Calibri" pitchFamily="34" charset="0"/>
-                <a:ea typeface="Calibri" pitchFamily="34" charset="-122"/>
+                <a:ea typeface="Yu Gothic" pitchFamily="34" charset="-122"/>
                 <a:cs typeface="Calibri" pitchFamily="34" charset="-120"/>
               </a:rPr>
               <a:t>Space</a:t>
             </a:r>
-            <a:endParaRPr lang="en-US" sz="1400" dirty="0"/>
+            <a:endParaRPr lang="ja-JP" altLang="en-US" sz="1400" dirty="0"/>
           </a:p>
         </p:txBody>
       </p:sp>
@@ -6846,17 +6819,17 @@
               <a:buNone/>
             </a:pPr>
             <a:r>
-              <a:rPr lang="en-US" sz="1150" dirty="0">
+              <a:rPr lang="ja-JP" altLang="en-US" sz="1150" dirty="0">
                 <a:solidFill>
                   <a:srgbClr val="858FAB"/>
                 </a:solidFill>
                 <a:latin typeface="Calibri" pitchFamily="34" charset="0"/>
-                <a:ea typeface="Calibri" pitchFamily="34" charset="-122"/>
+                <a:ea typeface="Yu Gothic" pitchFamily="34" charset="-122"/>
                 <a:cs typeface="Calibri" pitchFamily="34" charset="-120"/>
               </a:rPr>
               <a:t>成長率 +29%</a:t>
             </a:r>
-            <a:endParaRPr lang="en-US" sz="1150" dirty="0"/>
+            <a:endParaRPr lang="ja-JP" altLang="en-US" sz="1150" dirty="0"/>
           </a:p>
         </p:txBody>
       </p:sp>
@@ -6885,17 +6858,17 @@
               <a:buNone/>
             </a:pPr>
             <a:r>
-              <a:rPr lang="en-US" sz="1800" b="1" dirty="0">
+              <a:rPr lang="ja-JP" altLang="en-US" sz="1800" b="1" dirty="0">
                 <a:solidFill>
                   <a:srgbClr val="F4646B"/>
                 </a:solidFill>
                 <a:latin typeface="Cambria" pitchFamily="34" charset="0"/>
-                <a:ea typeface="Cambria" pitchFamily="34" charset="-122"/>
+                <a:ea typeface="Yu Gothic" pitchFamily="34" charset="-122"/>
                 <a:cs typeface="Cambria" pitchFamily="34" charset="-120"/>
               </a:rPr>
               <a:t>-$0.54B</a:t>
             </a:r>
-            <a:endParaRPr lang="en-US" sz="1800" dirty="0"/>
+            <a:endParaRPr lang="ja-JP" altLang="en-US" sz="1800" dirty="0"/>
           </a:p>
         </p:txBody>
       </p:sp>
@@ -6924,17 +6897,17 @@
               <a:buNone/>
             </a:pPr>
             <a:r>
-              <a:rPr lang="en-US" sz="1050" dirty="0">
+              <a:rPr lang="ja-JP" altLang="en-US" sz="1050" dirty="0">
                 <a:solidFill>
                   <a:srgbClr val="C5CBDC"/>
                 </a:solidFill>
                 <a:latin typeface="Calibri" pitchFamily="34" charset="0"/>
-                <a:ea typeface="Calibri" pitchFamily="34" charset="-122"/>
+                <a:ea typeface="Yu Gothic" pitchFamily="34" charset="-122"/>
                 <a:cs typeface="Calibri" pitchFamily="34" charset="-120"/>
               </a:rPr>
               <a:t>Starship開発費が重い</a:t>
             </a:r>
-            <a:endParaRPr lang="en-US" sz="1050" dirty="0"/>
+            <a:endParaRPr lang="ja-JP" altLang="en-US" sz="1050" dirty="0"/>
           </a:p>
         </p:txBody>
       </p:sp>
@@ -6963,17 +6936,17 @@
               <a:buNone/>
             </a:pPr>
             <a:r>
-              <a:rPr lang="en-US" sz="1200" i="1" dirty="0">
+              <a:rPr lang="ja-JP" altLang="en-US" sz="1200" i="1" dirty="0">
                 <a:solidFill>
                   <a:srgbClr val="FFB627"/>
                 </a:solidFill>
                 <a:latin typeface="Calibri" pitchFamily="34" charset="0"/>
-                <a:ea typeface="Calibri" pitchFamily="34" charset="-122"/>
+                <a:ea typeface="Yu Gothic" pitchFamily="34" charset="-122"/>
                 <a:cs typeface="Calibri" pitchFamily="34" charset="-120"/>
               </a:rPr>
               <a:t>決算は大幅ビート。それでも株価が下げたのは、四半期capex $18.4B（うちAIに$15.8B）への警戒。</a:t>
             </a:r>
-            <a:endParaRPr lang="en-US" sz="1200" dirty="0"/>
+            <a:endParaRPr lang="ja-JP" altLang="en-US" sz="1200" dirty="0"/>
           </a:p>
         </p:txBody>
       </p:sp>
@@ -7002,17 +6975,17 @@
               <a:buNone/>
             </a:pPr>
             <a:r>
-              <a:rPr lang="en-US" sz="1100" dirty="0">
+              <a:rPr lang="ja-JP" altLang="en-US" sz="1100" dirty="0">
                 <a:solidFill>
                   <a:srgbClr val="858FAB"/>
                 </a:solidFill>
                 <a:latin typeface="Calibri" pitchFamily="34" charset="0"/>
-                <a:ea typeface="Calibri" pitchFamily="34" charset="-122"/>
+                <a:ea typeface="Yu Gothic" pitchFamily="34" charset="-122"/>
                 <a:cs typeface="Calibri" pitchFamily="34" charset="-120"/>
               </a:rPr>
               <a:t>04</a:t>
             </a:r>
-            <a:endParaRPr lang="en-US" sz="1100" dirty="0"/>
+            <a:endParaRPr lang="ja-JP" altLang="en-US" sz="1100" dirty="0"/>
           </a:p>
         </p:txBody>
       </p:sp>
@@ -7073,17 +7046,17 @@
               <a:buNone/>
             </a:pPr>
             <a:r>
-              <a:rPr lang="en-US" sz="3000" b="1" dirty="0">
+              <a:rPr lang="ja-JP" altLang="en-US" sz="3000" b="1" dirty="0">
                 <a:solidFill>
                   <a:srgbClr val="FFFFFF"/>
                 </a:solidFill>
                 <a:latin typeface="Cambria" pitchFamily="34" charset="0"/>
-                <a:ea typeface="Cambria" pitchFamily="34" charset="-122"/>
+                <a:ea typeface="Yu Gothic" pitchFamily="34" charset="-122"/>
                 <a:cs typeface="Cambria" pitchFamily="34" charset="-120"/>
               </a:rPr>
               <a:t>打ち上げ経済学</a:t>
             </a:r>
-            <a:endParaRPr lang="en-US" sz="3000" dirty="0"/>
+            <a:endParaRPr lang="ja-JP" altLang="en-US" sz="3000" dirty="0"/>
           </a:p>
         </p:txBody>
       </p:sp>
@@ -7112,17 +7085,17 @@
               <a:buNone/>
             </a:pPr>
             <a:r>
-              <a:rPr lang="en-US" sz="1350" dirty="0">
+              <a:rPr lang="ja-JP" altLang="en-US" sz="1350" dirty="0">
                 <a:solidFill>
                   <a:srgbClr val="FFB627"/>
                 </a:solidFill>
                 <a:latin typeface="Calibri" pitchFamily="34" charset="0"/>
-                <a:ea typeface="Calibri" pitchFamily="34" charset="-122"/>
+                <a:ea typeface="Yu Gothic" pitchFamily="34" charset="-122"/>
                 <a:cs typeface="Calibri" pitchFamily="34" charset="-120"/>
               </a:rPr>
               <a:t>同じ仕事を、他社の1/4〜1/10のコストでやる</a:t>
             </a:r>
-            <a:endParaRPr lang="en-US" sz="1350" dirty="0"/>
+            <a:endParaRPr lang="ja-JP" altLang="en-US" sz="1350" dirty="0"/>
           </a:p>
         </p:txBody>
       </p:sp>
@@ -7134,7 +7107,7 @@
         </p:nvGraphicFramePr>
         <p:xfrm>
           <a:off x="640080" y="1627632"/>
-          <a:ext cx="6537960" cy="3703320"/>
+          <a:ext cx="6537960" cy="4041648"/>
         </p:xfrm>
         <a:graphic xmlns:a="http://schemas.openxmlformats.org/drawingml/2006/main">
           <a:graphicData uri="http://schemas.openxmlformats.org/drawingml/2006/chart">
@@ -7151,11 +7124,11 @@
         <p:spPr>
           <a:xfrm>
             <a:off x="7498080" y="1627632"/>
-            <a:ext cx="4023360" cy="1481328"/>
+            <a:ext cx="4023360" cy="1554480"/>
           </a:xfrm>
           <a:prstGeom prst="roundRect">
             <a:avLst>
-              <a:gd name="adj" fmla="val 5556"/>
+              <a:gd name="adj" fmla="val 5294"/>
             </a:avLst>
           </a:prstGeom>
           <a:solidFill>
@@ -7194,17 +7167,17 @@
               <a:buNone/>
             </a:pPr>
             <a:r>
-              <a:rPr lang="en-US" sz="3800" b="1" dirty="0">
+              <a:rPr lang="ja-JP" altLang="en-US" sz="3800" b="1" dirty="0">
                 <a:solidFill>
                   <a:srgbClr val="FF6B35"/>
                 </a:solidFill>
                 <a:latin typeface="Cambria" pitchFamily="34" charset="0"/>
-                <a:ea typeface="Cambria" pitchFamily="34" charset="-122"/>
+                <a:ea typeface="Yu Gothic" pitchFamily="34" charset="-122"/>
                 <a:cs typeface="Cambria" pitchFamily="34" charset="-120"/>
               </a:rPr>
               <a:t>約75%</a:t>
             </a:r>
-            <a:endParaRPr lang="en-US" sz="3800" dirty="0"/>
+            <a:endParaRPr lang="ja-JP" altLang="en-US" sz="3800" dirty="0"/>
           </a:p>
         </p:txBody>
       </p:sp>
@@ -7233,17 +7206,17 @@
               <a:buNone/>
             </a:pPr>
             <a:r>
-              <a:rPr lang="en-US" sz="1200" dirty="0">
+              <a:rPr lang="ja-JP" altLang="en-US" sz="1200" dirty="0">
                 <a:solidFill>
                   <a:srgbClr val="C5CBDC"/>
                 </a:solidFill>
                 <a:latin typeface="Calibri" pitchFamily="34" charset="0"/>
-                <a:ea typeface="Calibri" pitchFamily="34" charset="-122"/>
+                <a:ea typeface="Yu Gothic" pitchFamily="34" charset="-122"/>
                 <a:cs typeface="Calibri" pitchFamily="34" charset="-120"/>
               </a:rPr>
               <a:t>Falcon 9の粗利率（外販$74M − 社内原価$17.5M）</a:t>
             </a:r>
-            <a:endParaRPr lang="en-US" sz="1200" dirty="0"/>
+            <a:endParaRPr lang="ja-JP" altLang="en-US" sz="1200" dirty="0"/>
           </a:p>
         </p:txBody>
       </p:sp>
@@ -7255,7 +7228,7 @@
         </p:nvSpPr>
         <p:spPr>
           <a:xfrm>
-            <a:off x="7498080" y="3383280"/>
+            <a:off x="7498080" y="3456432"/>
             <a:ext cx="146304" cy="146304"/>
           </a:xfrm>
           <a:prstGeom prst="ellipse">
@@ -7280,7 +7253,7 @@
         </p:nvSpPr>
         <p:spPr>
           <a:xfrm>
-            <a:off x="7754112" y="3310128"/>
+            <a:off x="7754112" y="3383280"/>
             <a:ext cx="3749040" cy="274320"/>
           </a:xfrm>
           <a:prstGeom prst="rect">
@@ -7297,17 +7270,17 @@
               <a:buNone/>
             </a:pPr>
             <a:r>
-              <a:rPr lang="en-US" sz="1300" b="1" dirty="0">
+              <a:rPr lang="ja-JP" altLang="en-US" sz="1300" b="1" dirty="0">
                 <a:solidFill>
                   <a:srgbClr val="FFFFFF"/>
                 </a:solidFill>
                 <a:latin typeface="Calibri" pitchFamily="34" charset="0"/>
-                <a:ea typeface="Calibri" pitchFamily="34" charset="-122"/>
+                <a:ea typeface="Yu Gothic" pitchFamily="34" charset="-122"/>
                 <a:cs typeface="Calibri" pitchFamily="34" charset="-120"/>
               </a:rPr>
               <a:t>再利用</a:t>
             </a:r>
-            <a:endParaRPr lang="en-US" sz="1300" dirty="0"/>
+            <a:endParaRPr lang="ja-JP" altLang="en-US" sz="1300" dirty="0"/>
           </a:p>
         </p:txBody>
       </p:sp>
@@ -7319,7 +7292,7 @@
         </p:nvSpPr>
         <p:spPr>
           <a:xfrm>
-            <a:off x="7754112" y="3584448"/>
+            <a:off x="7754112" y="3657600"/>
             <a:ext cx="3749040" cy="402336"/>
           </a:xfrm>
           <a:prstGeom prst="rect">
@@ -7336,17 +7309,17 @@
               <a:buNone/>
             </a:pPr>
             <a:r>
-              <a:rPr lang="en-US" sz="1050" dirty="0">
+              <a:rPr lang="ja-JP" altLang="en-US" sz="1050" dirty="0">
                 <a:solidFill>
                   <a:srgbClr val="858FAB"/>
                 </a:solidFill>
                 <a:latin typeface="Calibri" pitchFamily="34" charset="0"/>
-                <a:ea typeface="Calibri" pitchFamily="34" charset="-122"/>
+                <a:ea typeface="Yu Gothic" pitchFamily="34" charset="-122"/>
                 <a:cs typeface="Calibri" pitchFamily="34" charset="-120"/>
               </a:rPr>
               <a:t>1機のブースターを20回以上使い回す。整備費は約$1M</a:t>
             </a:r>
-            <a:endParaRPr lang="en-US" sz="1050" dirty="0"/>
+            <a:endParaRPr lang="ja-JP" altLang="en-US" sz="1050" dirty="0"/>
           </a:p>
         </p:txBody>
       </p:sp>
@@ -7358,7 +7331,7 @@
         </p:nvSpPr>
         <p:spPr>
           <a:xfrm>
-            <a:off x="7498080" y="4096512"/>
+            <a:off x="7498080" y="4224528"/>
             <a:ext cx="146304" cy="146304"/>
           </a:xfrm>
           <a:prstGeom prst="ellipse">
@@ -7383,7 +7356,7 @@
         </p:nvSpPr>
         <p:spPr>
           <a:xfrm>
-            <a:off x="7754112" y="4023360"/>
+            <a:off x="7754112" y="4151376"/>
             <a:ext cx="3749040" cy="274320"/>
           </a:xfrm>
           <a:prstGeom prst="rect">
@@ -7400,17 +7373,17 @@
               <a:buNone/>
             </a:pPr>
             <a:r>
-              <a:rPr lang="en-US" sz="1300" b="1" dirty="0">
+              <a:rPr lang="ja-JP" altLang="en-US" sz="1300" b="1" dirty="0">
                 <a:solidFill>
                   <a:srgbClr val="FFFFFF"/>
                 </a:solidFill>
                 <a:latin typeface="Calibri" pitchFamily="34" charset="0"/>
-                <a:ea typeface="Calibri" pitchFamily="34" charset="-122"/>
+                <a:ea typeface="Yu Gothic" pitchFamily="34" charset="-122"/>
                 <a:cs typeface="Calibri" pitchFamily="34" charset="-120"/>
               </a:rPr>
               <a:t>使い捨ての壁</a:t>
             </a:r>
-            <a:endParaRPr lang="en-US" sz="1300" dirty="0"/>
+            <a:endParaRPr lang="ja-JP" altLang="en-US" sz="1300" dirty="0"/>
           </a:p>
         </p:txBody>
       </p:sp>
@@ -7422,7 +7395,7 @@
         </p:nvSpPr>
         <p:spPr>
           <a:xfrm>
-            <a:off x="7754112" y="4297680"/>
+            <a:off x="7754112" y="4425696"/>
             <a:ext cx="3749040" cy="402336"/>
           </a:xfrm>
           <a:prstGeom prst="rect">
@@ -7439,17 +7412,17 @@
               <a:buNone/>
             </a:pPr>
             <a:r>
-              <a:rPr lang="en-US" sz="1050" dirty="0">
+              <a:rPr lang="ja-JP" altLang="en-US" sz="1050" dirty="0">
                 <a:solidFill>
                   <a:srgbClr val="858FAB"/>
                 </a:solidFill>
                 <a:latin typeface="Calibri" pitchFamily="34" charset="0"/>
-                <a:ea typeface="Calibri" pitchFamily="34" charset="-122"/>
+                <a:ea typeface="Yu Gothic" pitchFamily="34" charset="-122"/>
                 <a:cs typeface="Calibri" pitchFamily="34" charset="-120"/>
               </a:rPr>
               <a:t>Ariane 6もVulcanも毎回ロケットを新造している</a:t>
             </a:r>
-            <a:endParaRPr lang="en-US" sz="1050" dirty="0"/>
+            <a:endParaRPr lang="ja-JP" altLang="en-US" sz="1050" dirty="0"/>
           </a:p>
         </p:txBody>
       </p:sp>
@@ -7461,7 +7434,7 @@
         </p:nvSpPr>
         <p:spPr>
           <a:xfrm>
-            <a:off x="7498080" y="4809744"/>
+            <a:off x="7498080" y="4992624"/>
             <a:ext cx="146304" cy="146304"/>
           </a:xfrm>
           <a:prstGeom prst="ellipse">
@@ -7486,7 +7459,7 @@
         </p:nvSpPr>
         <p:spPr>
           <a:xfrm>
-            <a:off x="7754112" y="4736592"/>
+            <a:off x="7754112" y="4919472"/>
             <a:ext cx="3749040" cy="274320"/>
           </a:xfrm>
           <a:prstGeom prst="rect">
@@ -7503,17 +7476,17 @@
               <a:buNone/>
             </a:pPr>
             <a:r>
-              <a:rPr lang="en-US" sz="1300" b="1" dirty="0">
+              <a:rPr lang="ja-JP" altLang="en-US" sz="1300" b="1" dirty="0">
                 <a:solidFill>
                   <a:srgbClr val="FFFFFF"/>
                 </a:solidFill>
                 <a:latin typeface="Calibri" pitchFamily="34" charset="0"/>
-                <a:ea typeface="Calibri" pitchFamily="34" charset="-122"/>
+                <a:ea typeface="Yu Gothic" pitchFamily="34" charset="-122"/>
                 <a:cs typeface="Calibri" pitchFamily="34" charset="-120"/>
               </a:rPr>
               <a:t>売り手市場</a:t>
             </a:r>
-            <a:endParaRPr lang="en-US" sz="1300" dirty="0"/>
+            <a:endParaRPr lang="ja-JP" altLang="en-US" sz="1300" dirty="0"/>
           </a:p>
         </p:txBody>
       </p:sp>
@@ -7525,7 +7498,7 @@
         </p:nvSpPr>
         <p:spPr>
           <a:xfrm>
-            <a:off x="7754112" y="5010912"/>
+            <a:off x="7754112" y="5193792"/>
             <a:ext cx="3749040" cy="402336"/>
           </a:xfrm>
           <a:prstGeom prst="rect">
@@ -7542,17 +7515,17 @@
               <a:buNone/>
             </a:pPr>
             <a:r>
-              <a:rPr lang="en-US" sz="1050" dirty="0">
+              <a:rPr lang="ja-JP" altLang="en-US" sz="1050" dirty="0">
                 <a:solidFill>
                   <a:srgbClr val="858FAB"/>
                 </a:solidFill>
                 <a:latin typeface="Calibri" pitchFamily="34" charset="0"/>
-                <a:ea typeface="Calibri" pitchFamily="34" charset="-122"/>
+                <a:ea typeface="Yu Gothic" pitchFamily="34" charset="-122"/>
                 <a:cs typeface="Calibri" pitchFamily="34" charset="-120"/>
               </a:rPr>
               <a:t>2026年2月に$70M→$74Mへ値上げ。それでも席が足りない</a:t>
             </a:r>
-            <a:endParaRPr lang="en-US" sz="1050" dirty="0"/>
+            <a:endParaRPr lang="ja-JP" altLang="en-US" sz="1050" dirty="0"/>
           </a:p>
         </p:txBody>
       </p:sp>
@@ -7564,7 +7537,7 @@
         </p:nvSpPr>
         <p:spPr>
           <a:xfrm>
-            <a:off x="640080" y="5779008"/>
+            <a:off x="640080" y="5852160"/>
             <a:ext cx="6537960" cy="274320"/>
           </a:xfrm>
           <a:prstGeom prst="rect">
@@ -7581,17 +7554,17 @@
               <a:buNone/>
             </a:pPr>
             <a:r>
-              <a:rPr lang="en-US" sz="1000" dirty="0">
+              <a:rPr lang="ja-JP" altLang="en-US" sz="1000" dirty="0">
                 <a:solidFill>
                   <a:srgbClr val="858FAB"/>
                 </a:solidFill>
                 <a:latin typeface="Calibri" pitchFamily="34" charset="0"/>
-                <a:ea typeface="Calibri" pitchFamily="34" charset="-122"/>
+                <a:ea typeface="Yu Gothic" pitchFamily="34" charset="-122"/>
                 <a:cs typeface="Calibri" pitchFamily="34" charset="-120"/>
               </a:rPr>
               <a:t>※ 社内原価は非公開。Musk発言と業界推定に基づく推定値</a:t>
             </a:r>
-            <a:endParaRPr lang="en-US" sz="1000" dirty="0"/>
+            <a:endParaRPr lang="ja-JP" altLang="en-US" sz="1000" dirty="0"/>
           </a:p>
         </p:txBody>
       </p:sp>
@@ -7620,17 +7593,17 @@
               <a:buNone/>
             </a:pPr>
             <a:r>
-              <a:rPr lang="en-US" sz="1100" dirty="0">
+              <a:rPr lang="ja-JP" altLang="en-US" sz="1100" dirty="0">
                 <a:solidFill>
                   <a:srgbClr val="858FAB"/>
                 </a:solidFill>
                 <a:latin typeface="Calibri" pitchFamily="34" charset="0"/>
-                <a:ea typeface="Calibri" pitchFamily="34" charset="-122"/>
+                <a:ea typeface="Yu Gothic" pitchFamily="34" charset="-122"/>
                 <a:cs typeface="Calibri" pitchFamily="34" charset="-120"/>
               </a:rPr>
               <a:t>05</a:t>
             </a:r>
-            <a:endParaRPr lang="en-US" sz="1100" dirty="0"/>
+            <a:endParaRPr lang="ja-JP" altLang="en-US" sz="1100" dirty="0"/>
           </a:p>
         </p:txBody>
       </p:sp>
@@ -7691,17 +7664,17 @@
               <a:buNone/>
             </a:pPr>
             <a:r>
-              <a:rPr lang="en-US" sz="3000" b="1" dirty="0">
+              <a:rPr lang="ja-JP" altLang="en-US" sz="3000" b="1" dirty="0">
                 <a:solidFill>
                   <a:srgbClr val="FFFFFF"/>
                 </a:solidFill>
                 <a:latin typeface="Cambria" pitchFamily="34" charset="0"/>
-                <a:ea typeface="Cambria" pitchFamily="34" charset="-122"/>
+                <a:ea typeface="Yu Gothic" pitchFamily="34" charset="-122"/>
                 <a:cs typeface="Cambria" pitchFamily="34" charset="-120"/>
               </a:rPr>
               <a:t>なぜ「粗利75%」なのに部門は赤字なのか</a:t>
             </a:r>
-            <a:endParaRPr lang="en-US" sz="3000" dirty="0"/>
+            <a:endParaRPr lang="ja-JP" altLang="en-US" sz="3000" dirty="0"/>
           </a:p>
         </p:txBody>
       </p:sp>
@@ -7730,17 +7703,17 @@
               <a:buNone/>
             </a:pPr>
             <a:r>
-              <a:rPr lang="en-US" sz="1350" dirty="0">
+              <a:rPr lang="ja-JP" altLang="en-US" sz="1350" dirty="0">
                 <a:solidFill>
                   <a:srgbClr val="FFB627"/>
                 </a:solidFill>
                 <a:latin typeface="Calibri" pitchFamily="34" charset="0"/>
-                <a:ea typeface="Calibri" pitchFamily="34" charset="-122"/>
+                <a:ea typeface="Yu Gothic" pitchFamily="34" charset="-122"/>
                 <a:cs typeface="Calibri" pitchFamily="34" charset="-120"/>
               </a:rPr>
               <a:t>Space部門 Q2 2026 の分解（推定込み）</a:t>
             </a:r>
-            <a:endParaRPr lang="en-US" sz="1350" dirty="0"/>
+            <a:endParaRPr lang="ja-JP" altLang="en-US" sz="1350" dirty="0"/>
           </a:p>
         </p:txBody>
       </p:sp>
@@ -7796,17 +7769,17 @@
               <a:buNone/>
             </a:pPr>
             <a:r>
-              <a:rPr lang="en-US" sz="1250" b="1" dirty="0">
+              <a:rPr lang="ja-JP" altLang="en-US" sz="1250" b="1" dirty="0">
                 <a:solidFill>
                   <a:srgbClr val="858FAB"/>
                 </a:solidFill>
                 <a:latin typeface="Calibri" pitchFamily="34" charset="0"/>
-                <a:ea typeface="Calibri" pitchFamily="34" charset="-122"/>
+                <a:ea typeface="Yu Gothic" pitchFamily="34" charset="-122"/>
                 <a:cs typeface="Calibri" pitchFamily="34" charset="-120"/>
               </a:rPr>
               <a:t>外部売上</a:t>
             </a:r>
-            <a:endParaRPr lang="en-US" sz="1250" dirty="0"/>
+            <a:endParaRPr lang="ja-JP" altLang="en-US" sz="1250" dirty="0"/>
           </a:p>
         </p:txBody>
       </p:sp>
@@ -7835,17 +7808,17 @@
               <a:buNone/>
             </a:pPr>
             <a:r>
-              <a:rPr lang="en-US" sz="2500" b="1" dirty="0">
+              <a:rPr lang="ja-JP" altLang="en-US" sz="2500" b="1" dirty="0">
                 <a:solidFill>
                   <a:srgbClr val="FFB627"/>
                 </a:solidFill>
                 <a:latin typeface="Cambria" pitchFamily="34" charset="0"/>
-                <a:ea typeface="Cambria" pitchFamily="34" charset="-122"/>
+                <a:ea typeface="Yu Gothic" pitchFamily="34" charset="-122"/>
                 <a:cs typeface="Cambria" pitchFamily="34" charset="-120"/>
               </a:rPr>
               <a:t>+$962M</a:t>
             </a:r>
-            <a:endParaRPr lang="en-US" sz="2500" dirty="0"/>
+            <a:endParaRPr lang="ja-JP" altLang="en-US" sz="2500" dirty="0"/>
           </a:p>
         </p:txBody>
       </p:sp>
@@ -7877,17 +7850,17 @@
               <a:buNone/>
             </a:pPr>
             <a:r>
-              <a:rPr lang="en-US" sz="1100" dirty="0">
+              <a:rPr lang="ja-JP" altLang="en-US" sz="1100" dirty="0">
                 <a:solidFill>
                   <a:srgbClr val="C5CBDC"/>
                 </a:solidFill>
                 <a:latin typeface="Calibri" pitchFamily="34" charset="0"/>
-                <a:ea typeface="Calibri" pitchFamily="34" charset="-122"/>
+                <a:ea typeface="Yu Gothic" pitchFamily="34" charset="-122"/>
                 <a:cs typeface="Calibri" pitchFamily="34" charset="-120"/>
               </a:rPr>
               <a:t>商業・NASA・国防ミッション</a:t>
             </a:r>
-            <a:endParaRPr lang="en-US" sz="1100" dirty="0"/>
+            <a:endParaRPr lang="ja-JP" altLang="en-US" sz="1100" dirty="0"/>
           </a:p>
         </p:txBody>
       </p:sp>
@@ -7916,17 +7889,17 @@
               <a:buNone/>
             </a:pPr>
             <a:r>
-              <a:rPr lang="en-US" sz="1300" dirty="0">
+              <a:rPr lang="ja-JP" altLang="en-US" sz="1300" dirty="0">
                 <a:solidFill>
                   <a:srgbClr val="FF6B35"/>
                 </a:solidFill>
                 <a:latin typeface="Calibri" pitchFamily="34" charset="0"/>
-                <a:ea typeface="Calibri" pitchFamily="34" charset="-122"/>
+                <a:ea typeface="Yu Gothic" pitchFamily="34" charset="-122"/>
                 <a:cs typeface="Calibri" pitchFamily="34" charset="-120"/>
               </a:rPr>
               <a:t>▶</a:t>
             </a:r>
-            <a:endParaRPr lang="en-US" sz="1300" dirty="0"/>
+            <a:endParaRPr lang="ja-JP" altLang="en-US" sz="1300" dirty="0"/>
           </a:p>
         </p:txBody>
       </p:sp>
@@ -7982,17 +7955,17 @@
               <a:buNone/>
             </a:pPr>
             <a:r>
-              <a:rPr lang="en-US" sz="1250" b="1" dirty="0">
+              <a:rPr lang="ja-JP" altLang="en-US" sz="1250" b="1" dirty="0">
                 <a:solidFill>
                   <a:srgbClr val="858FAB"/>
                 </a:solidFill>
                 <a:latin typeface="Calibri" pitchFamily="34" charset="0"/>
-                <a:ea typeface="Calibri" pitchFamily="34" charset="-122"/>
+                <a:ea typeface="Yu Gothic" pitchFamily="34" charset="-122"/>
                 <a:cs typeface="Calibri" pitchFamily="34" charset="-120"/>
               </a:rPr>
               <a:t>打ち上げ粗利</a:t>
             </a:r>
-            <a:endParaRPr lang="en-US" sz="1250" dirty="0"/>
+            <a:endParaRPr lang="ja-JP" altLang="en-US" sz="1250" dirty="0"/>
           </a:p>
         </p:txBody>
       </p:sp>
@@ -8021,17 +7994,17 @@
               <a:buNone/>
             </a:pPr>
             <a:r>
-              <a:rPr lang="en-US" sz="2500" b="1" dirty="0">
+              <a:rPr lang="ja-JP" altLang="en-US" sz="2500" b="1" dirty="0">
                 <a:solidFill>
                   <a:srgbClr val="4ECB8E"/>
                 </a:solidFill>
                 <a:latin typeface="Cambria" pitchFamily="34" charset="0"/>
-                <a:ea typeface="Cambria" pitchFamily="34" charset="-122"/>
+                <a:ea typeface="Yu Gothic" pitchFamily="34" charset="-122"/>
                 <a:cs typeface="Cambria" pitchFamily="34" charset="-120"/>
               </a:rPr>
               <a:t>+$450〜500M</a:t>
             </a:r>
-            <a:endParaRPr lang="en-US" sz="2500" dirty="0"/>
+            <a:endParaRPr lang="ja-JP" altLang="en-US" sz="2500" dirty="0"/>
           </a:p>
         </p:txBody>
       </p:sp>
@@ -8063,17 +8036,17 @@
               <a:buNone/>
             </a:pPr>
             <a:r>
-              <a:rPr lang="en-US" sz="1100" dirty="0">
+              <a:rPr lang="ja-JP" altLang="en-US" sz="1100" dirty="0">
                 <a:solidFill>
                   <a:srgbClr val="C5CBDC"/>
                 </a:solidFill>
                 <a:latin typeface="Calibri" pitchFamily="34" charset="0"/>
-                <a:ea typeface="Calibri" pitchFamily="34" charset="-122"/>
+                <a:ea typeface="Yu Gothic" pitchFamily="34" charset="-122"/>
                 <a:cs typeface="Calibri" pitchFamily="34" charset="-120"/>
               </a:rPr>
               <a:t>ここは黒字。事業として健全</a:t>
             </a:r>
-            <a:endParaRPr lang="en-US" sz="1100" dirty="0"/>
+            <a:endParaRPr lang="ja-JP" altLang="en-US" sz="1100" dirty="0"/>
           </a:p>
         </p:txBody>
       </p:sp>
@@ -8102,17 +8075,17 @@
               <a:buNone/>
             </a:pPr>
             <a:r>
-              <a:rPr lang="en-US" sz="1300" dirty="0">
+              <a:rPr lang="ja-JP" altLang="en-US" sz="1300" dirty="0">
                 <a:solidFill>
                   <a:srgbClr val="FF6B35"/>
                 </a:solidFill>
                 <a:latin typeface="Calibri" pitchFamily="34" charset="0"/>
-                <a:ea typeface="Calibri" pitchFamily="34" charset="-122"/>
+                <a:ea typeface="Yu Gothic" pitchFamily="34" charset="-122"/>
                 <a:cs typeface="Calibri" pitchFamily="34" charset="-120"/>
               </a:rPr>
               <a:t>▶</a:t>
             </a:r>
-            <a:endParaRPr lang="en-US" sz="1300" dirty="0"/>
+            <a:endParaRPr lang="ja-JP" altLang="en-US" sz="1300" dirty="0"/>
           </a:p>
         </p:txBody>
       </p:sp>
@@ -8168,17 +8141,17 @@
               <a:buNone/>
             </a:pPr>
             <a:r>
-              <a:rPr lang="en-US" sz="1250" b="1" dirty="0">
+              <a:rPr lang="ja-JP" altLang="en-US" sz="1250" b="1" dirty="0">
                 <a:solidFill>
                   <a:srgbClr val="858FAB"/>
                 </a:solidFill>
                 <a:latin typeface="Calibri" pitchFamily="34" charset="0"/>
-                <a:ea typeface="Calibri" pitchFamily="34" charset="-122"/>
+                <a:ea typeface="Yu Gothic" pitchFamily="34" charset="-122"/>
                 <a:cs typeface="Calibri" pitchFamily="34" charset="-120"/>
               </a:rPr>
               <a:t>Starship開発費</a:t>
             </a:r>
-            <a:endParaRPr lang="en-US" sz="1250" dirty="0"/>
+            <a:endParaRPr lang="ja-JP" altLang="en-US" sz="1250" dirty="0"/>
           </a:p>
         </p:txBody>
       </p:sp>
@@ -8207,17 +8180,17 @@
               <a:buNone/>
             </a:pPr>
             <a:r>
-              <a:rPr lang="en-US" sz="2500" b="1" dirty="0">
+              <a:rPr lang="ja-JP" altLang="en-US" sz="2500" b="1" dirty="0">
                 <a:solidFill>
                   <a:srgbClr val="F4646B"/>
                 </a:solidFill>
                 <a:latin typeface="Cambria" pitchFamily="34" charset="0"/>
-                <a:ea typeface="Cambria" pitchFamily="34" charset="-122"/>
+                <a:ea typeface="Yu Gothic" pitchFamily="34" charset="-122"/>
                 <a:cs typeface="Cambria" pitchFamily="34" charset="-120"/>
               </a:rPr>
               <a:t>−$1,000M</a:t>
             </a:r>
-            <a:endParaRPr lang="en-US" sz="2500" dirty="0"/>
+            <a:endParaRPr lang="ja-JP" altLang="en-US" sz="2500" dirty="0"/>
           </a:p>
         </p:txBody>
       </p:sp>
@@ -8249,17 +8222,17 @@
               <a:buNone/>
             </a:pPr>
             <a:r>
-              <a:rPr lang="en-US" sz="1100" dirty="0">
+              <a:rPr lang="ja-JP" altLang="en-US" sz="1100" dirty="0">
                 <a:solidFill>
                   <a:srgbClr val="C5CBDC"/>
                 </a:solidFill>
                 <a:latin typeface="Calibri" pitchFamily="34" charset="0"/>
-                <a:ea typeface="Calibri" pitchFamily="34" charset="-122"/>
+                <a:ea typeface="Yu Gothic" pitchFamily="34" charset="-122"/>
                 <a:cs typeface="Calibri" pitchFamily="34" charset="-120"/>
               </a:rPr>
               <a:t>赤字の正体。四半期あたり約$1B</a:t>
             </a:r>
-            <a:endParaRPr lang="en-US" sz="1100" dirty="0"/>
+            <a:endParaRPr lang="ja-JP" altLang="en-US" sz="1100" dirty="0"/>
           </a:p>
         </p:txBody>
       </p:sp>
@@ -8288,17 +8261,17 @@
               <a:buNone/>
             </a:pPr>
             <a:r>
-              <a:rPr lang="en-US" sz="1300" dirty="0">
+              <a:rPr lang="ja-JP" altLang="en-US" sz="1300" dirty="0">
                 <a:solidFill>
                   <a:srgbClr val="FF6B35"/>
                 </a:solidFill>
                 <a:latin typeface="Calibri" pitchFamily="34" charset="0"/>
-                <a:ea typeface="Calibri" pitchFamily="34" charset="-122"/>
+                <a:ea typeface="Yu Gothic" pitchFamily="34" charset="-122"/>
                 <a:cs typeface="Calibri" pitchFamily="34" charset="-120"/>
               </a:rPr>
               <a:t>▶</a:t>
             </a:r>
-            <a:endParaRPr lang="en-US" sz="1300" dirty="0"/>
+            <a:endParaRPr lang="ja-JP" altLang="en-US" sz="1300" dirty="0"/>
           </a:p>
         </p:txBody>
       </p:sp>
@@ -8354,17 +8327,17 @@
               <a:buNone/>
             </a:pPr>
             <a:r>
-              <a:rPr lang="en-US" sz="1250" b="1" dirty="0">
+              <a:rPr lang="ja-JP" altLang="en-US" sz="1250" b="1" dirty="0">
                 <a:solidFill>
                   <a:srgbClr val="858FAB"/>
                 </a:solidFill>
                 <a:latin typeface="Calibri" pitchFamily="34" charset="0"/>
-                <a:ea typeface="Calibri" pitchFamily="34" charset="-122"/>
+                <a:ea typeface="Yu Gothic" pitchFamily="34" charset="-122"/>
                 <a:cs typeface="Calibri" pitchFamily="34" charset="-120"/>
               </a:rPr>
               <a:t>部門営業損益</a:t>
             </a:r>
-            <a:endParaRPr lang="en-US" sz="1250" dirty="0"/>
+            <a:endParaRPr lang="ja-JP" altLang="en-US" sz="1250" dirty="0"/>
           </a:p>
         </p:txBody>
       </p:sp>
@@ -8393,17 +8366,17 @@
               <a:buNone/>
             </a:pPr>
             <a:r>
-              <a:rPr lang="en-US" sz="2500" b="1" dirty="0">
+              <a:rPr lang="ja-JP" altLang="en-US" sz="2500" b="1" dirty="0">
                 <a:solidFill>
                   <a:srgbClr val="F4646B"/>
                 </a:solidFill>
                 <a:latin typeface="Cambria" pitchFamily="34" charset="0"/>
-                <a:ea typeface="Cambria" pitchFamily="34" charset="-122"/>
+                <a:ea typeface="Yu Gothic" pitchFamily="34" charset="-122"/>
                 <a:cs typeface="Cambria" pitchFamily="34" charset="-120"/>
               </a:rPr>
               <a:t>−$542M</a:t>
             </a:r>
-            <a:endParaRPr lang="en-US" sz="2500" dirty="0"/>
+            <a:endParaRPr lang="ja-JP" altLang="en-US" sz="2500" dirty="0"/>
           </a:p>
         </p:txBody>
       </p:sp>
@@ -8435,17 +8408,17 @@
               <a:buNone/>
             </a:pPr>
             <a:r>
-              <a:rPr lang="en-US" sz="1100" dirty="0">
+              <a:rPr lang="ja-JP" altLang="en-US" sz="1100" dirty="0">
                 <a:solidFill>
                   <a:srgbClr val="C5CBDC"/>
                 </a:solidFill>
                 <a:latin typeface="Calibri" pitchFamily="34" charset="0"/>
-                <a:ea typeface="Calibri" pitchFamily="34" charset="-122"/>
+                <a:ea typeface="Yu Gothic" pitchFamily="34" charset="-122"/>
                 <a:cs typeface="Calibri" pitchFamily="34" charset="-120"/>
               </a:rPr>
               <a:t>「弱さ」ではなく未来への投資</a:t>
             </a:r>
-            <a:endParaRPr lang="en-US" sz="1100" dirty="0"/>
+            <a:endParaRPr lang="ja-JP" altLang="en-US" sz="1100" dirty="0"/>
           </a:p>
         </p:txBody>
       </p:sp>
@@ -8501,17 +8474,17 @@
               <a:buNone/>
             </a:pPr>
             <a:r>
-              <a:rPr lang="en-US" sz="1900" b="1" dirty="0">
+              <a:rPr lang="ja-JP" altLang="en-US" sz="1900" b="1" dirty="0">
                 <a:solidFill>
                   <a:srgbClr val="FFB627"/>
                 </a:solidFill>
                 <a:latin typeface="Cambria" pitchFamily="34" charset="0"/>
-                <a:ea typeface="Cambria" pitchFamily="34" charset="-122"/>
+                <a:ea typeface="Yu Gothic" pitchFamily="34" charset="-122"/>
                 <a:cs typeface="Cambria" pitchFamily="34" charset="-120"/>
               </a:rPr>
               <a:t>38倍</a:t>
             </a:r>
-            <a:endParaRPr lang="en-US" sz="1900" dirty="0"/>
+            <a:endParaRPr lang="ja-JP" altLang="en-US" sz="1900" dirty="0"/>
           </a:p>
         </p:txBody>
       </p:sp>
@@ -8543,17 +8516,17 @@
               <a:buNone/>
             </a:pPr>
             <a:r>
-              <a:rPr lang="en-US" sz="1050" dirty="0">
+              <a:rPr lang="ja-JP" altLang="en-US" sz="1050" dirty="0">
                 <a:solidFill>
                   <a:srgbClr val="C5CBDC"/>
                 </a:solidFill>
                 <a:latin typeface="Calibri" pitchFamily="34" charset="0"/>
-                <a:ea typeface="Calibri" pitchFamily="34" charset="-122"/>
+                <a:ea typeface="Yu Gothic" pitchFamily="34" charset="-122"/>
                 <a:cs typeface="Calibri" pitchFamily="34" charset="-120"/>
               </a:rPr>
               <a:t>Starship累計開発費$15B ÷ Falcon 9の$390M</a:t>
             </a:r>
-            <a:endParaRPr lang="en-US" sz="1050" dirty="0"/>
+            <a:endParaRPr lang="ja-JP" altLang="en-US" sz="1050" dirty="0"/>
           </a:p>
         </p:txBody>
       </p:sp>
@@ -8609,17 +8582,17 @@
               <a:buNone/>
             </a:pPr>
             <a:r>
-              <a:rPr lang="en-US" sz="1900" b="1" dirty="0">
+              <a:rPr lang="ja-JP" altLang="en-US" sz="1900" b="1" dirty="0">
                 <a:solidFill>
                   <a:srgbClr val="FFB627"/>
                 </a:solidFill>
                 <a:latin typeface="Cambria" pitchFamily="34" charset="0"/>
-                <a:ea typeface="Cambria" pitchFamily="34" charset="-122"/>
+                <a:ea typeface="Yu Gothic" pitchFamily="34" charset="-122"/>
                 <a:cs typeface="Cambria" pitchFamily="34" charset="-120"/>
               </a:rPr>
               <a:t>2/3</a:t>
             </a:r>
-            <a:endParaRPr lang="en-US" sz="1900" dirty="0"/>
+            <a:endParaRPr lang="ja-JP" altLang="en-US" sz="1900" dirty="0"/>
           </a:p>
         </p:txBody>
       </p:sp>
@@ -8651,17 +8624,17 @@
               <a:buNone/>
             </a:pPr>
             <a:r>
-              <a:rPr lang="en-US" sz="1050" dirty="0">
+              <a:rPr lang="ja-JP" altLang="en-US" sz="1050" dirty="0">
                 <a:solidFill>
                   <a:srgbClr val="C5CBDC"/>
                 </a:solidFill>
                 <a:latin typeface="Calibri" pitchFamily="34" charset="0"/>
-                <a:ea typeface="Calibri" pitchFamily="34" charset="-122"/>
+                <a:ea typeface="Yu Gothic" pitchFamily="34" charset="-122"/>
                 <a:cs typeface="Calibri" pitchFamily="34" charset="-120"/>
               </a:rPr>
               <a:t>打ち上げの2/3は自社Starlink向け。社内取引なので売上に計上されない</a:t>
             </a:r>
-            <a:endParaRPr lang="en-US" sz="1050" dirty="0"/>
+            <a:endParaRPr lang="ja-JP" altLang="en-US" sz="1050" dirty="0"/>
           </a:p>
         </p:txBody>
       </p:sp>
@@ -8717,17 +8690,17 @@
               <a:buNone/>
             </a:pPr>
             <a:r>
-              <a:rPr lang="en-US" sz="1900" b="1" dirty="0">
+              <a:rPr lang="ja-JP" altLang="en-US" sz="1900" b="1" dirty="0">
                 <a:solidFill>
                   <a:srgbClr val="FFB627"/>
                 </a:solidFill>
                 <a:latin typeface="Cambria" pitchFamily="34" charset="0"/>
-                <a:ea typeface="Cambria" pitchFamily="34" charset="-122"/>
+                <a:ea typeface="Yu Gothic" pitchFamily="34" charset="-122"/>
                 <a:cs typeface="Cambria" pitchFamily="34" charset="-120"/>
               </a:rPr>
               <a:t>$4B超</a:t>
             </a:r>
-            <a:endParaRPr lang="en-US" sz="1900" dirty="0"/>
+            <a:endParaRPr lang="ja-JP" altLang="en-US" sz="1900" dirty="0"/>
           </a:p>
         </p:txBody>
       </p:sp>
@@ -8759,17 +8732,17 @@
               <a:buNone/>
             </a:pPr>
             <a:r>
-              <a:rPr lang="en-US" sz="1050" dirty="0">
+              <a:rPr lang="ja-JP" altLang="en-US" sz="1050" dirty="0">
                 <a:solidFill>
                   <a:srgbClr val="C5CBDC"/>
                 </a:solidFill>
                 <a:latin typeface="Calibri" pitchFamily="34" charset="0"/>
-                <a:ea typeface="Calibri" pitchFamily="34" charset="-122"/>
+                <a:ea typeface="Yu Gothic" pitchFamily="34" charset="-122"/>
                 <a:cs typeface="Calibri" pitchFamily="34" charset="-120"/>
               </a:rPr>
               <a:t>NASA HLS契約。Starship開発費の一部は政府が負担している</a:t>
             </a:r>
-            <a:endParaRPr lang="en-US" sz="1050" dirty="0"/>
+            <a:endParaRPr lang="ja-JP" altLang="en-US" sz="1050" dirty="0"/>
           </a:p>
         </p:txBody>
       </p:sp>
@@ -8798,17 +8771,17 @@
               <a:buNone/>
             </a:pPr>
             <a:r>
-              <a:rPr lang="en-US" sz="1200" i="1" dirty="0">
+              <a:rPr lang="ja-JP" altLang="en-US" sz="1200" i="1" dirty="0">
                 <a:solidFill>
                   <a:srgbClr val="FFB627"/>
                 </a:solidFill>
                 <a:latin typeface="Calibri" pitchFamily="34" charset="0"/>
-                <a:ea typeface="Calibri" pitchFamily="34" charset="-122"/>
+                <a:ea typeface="Yu Gothic" pitchFamily="34" charset="-122"/>
                 <a:cs typeface="Calibri" pitchFamily="34" charset="-120"/>
               </a:rPr>
               <a:t>監視すべきは1点 — Starshipの年間支出が減り始めたら開発完了が近い。増え続けるなら回収は後ろ倒し。</a:t>
             </a:r>
-            <a:endParaRPr lang="en-US" sz="1200" dirty="0"/>
+            <a:endParaRPr lang="ja-JP" altLang="en-US" sz="1200" dirty="0"/>
           </a:p>
         </p:txBody>
       </p:sp>
@@ -8837,17 +8810,17 @@
               <a:buNone/>
             </a:pPr>
             <a:r>
-              <a:rPr lang="en-US" sz="1100" dirty="0">
+              <a:rPr lang="ja-JP" altLang="en-US" sz="1100" dirty="0">
                 <a:solidFill>
                   <a:srgbClr val="858FAB"/>
                 </a:solidFill>
                 <a:latin typeface="Calibri" pitchFamily="34" charset="0"/>
-                <a:ea typeface="Calibri" pitchFamily="34" charset="-122"/>
+                <a:ea typeface="Yu Gothic" pitchFamily="34" charset="-122"/>
                 <a:cs typeface="Calibri" pitchFamily="34" charset="-120"/>
               </a:rPr>
               <a:t>06</a:t>
             </a:r>
-            <a:endParaRPr lang="en-US" sz="1100" dirty="0"/>
+            <a:endParaRPr lang="ja-JP" altLang="en-US" sz="1100" dirty="0"/>
           </a:p>
         </p:txBody>
       </p:sp>
@@ -8908,17 +8881,17 @@
               <a:buNone/>
             </a:pPr>
             <a:r>
-              <a:rPr lang="en-US" sz="3000" b="1" dirty="0">
+              <a:rPr lang="ja-JP" altLang="en-US" sz="3000" b="1" dirty="0">
                 <a:solidFill>
                   <a:srgbClr val="FFFFFF"/>
                 </a:solidFill>
                 <a:latin typeface="Cambria" pitchFamily="34" charset="0"/>
-                <a:ea typeface="Cambria" pitchFamily="34" charset="-122"/>
+                <a:ea typeface="Yu Gothic" pitchFamily="34" charset="-122"/>
                 <a:cs typeface="Cambria" pitchFamily="34" charset="-120"/>
               </a:rPr>
               <a:t>Starlink — 利益エンジンの正体</a:t>
             </a:r>
-            <a:endParaRPr lang="en-US" sz="3000" dirty="0"/>
+            <a:endParaRPr lang="ja-JP" altLang="en-US" sz="3000" dirty="0"/>
           </a:p>
         </p:txBody>
       </p:sp>
@@ -8947,17 +8920,17 @@
               <a:buNone/>
             </a:pPr>
             <a:r>
-              <a:rPr lang="en-US" sz="1350" dirty="0">
+              <a:rPr lang="ja-JP" altLang="en-US" sz="1350" dirty="0">
                 <a:solidFill>
                   <a:srgbClr val="FFB627"/>
                 </a:solidFill>
                 <a:latin typeface="Calibri" pitchFamily="34" charset="0"/>
-                <a:ea typeface="Calibri" pitchFamily="34" charset="-122"/>
+                <a:ea typeface="Yu Gothic" pitchFamily="34" charset="-122"/>
                 <a:cs typeface="Calibri" pitchFamily="34" charset="-120"/>
               </a:rPr>
               <a:t>打ち上げ1回が13ヶ月で元を取る構造</a:t>
             </a:r>
-            <a:endParaRPr lang="en-US" sz="1350" dirty="0"/>
+            <a:endParaRPr lang="ja-JP" altLang="en-US" sz="1350" dirty="0"/>
           </a:p>
         </p:txBody>
       </p:sp>
@@ -8977,7 +8950,7 @@
         <p:spPr>
           <a:xfrm>
             <a:off x="6309360" y="1627632"/>
-            <a:ext cx="5212080" cy="3886200"/>
+            <a:ext cx="5212080" cy="4169664"/>
           </a:xfrm>
           <a:prstGeom prst="rect">
             <a:avLst/>
@@ -9036,17 +9009,17 @@
               <a:buNone/>
             </a:pPr>
             <a:r>
-              <a:rPr lang="en-US" sz="2400" b="1" dirty="0">
+              <a:rPr lang="ja-JP" altLang="en-US" sz="2400" b="1" dirty="0">
                 <a:solidFill>
                   <a:srgbClr val="5FD3F3"/>
                 </a:solidFill>
                 <a:latin typeface="Cambria" pitchFamily="34" charset="0"/>
-                <a:ea typeface="Cambria" pitchFamily="34" charset="-122"/>
+                <a:ea typeface="Yu Gothic" pitchFamily="34" charset="-122"/>
                 <a:cs typeface="Cambria" pitchFamily="34" charset="-120"/>
               </a:rPr>
               <a:t>12,400機</a:t>
             </a:r>
-            <a:endParaRPr lang="en-US" sz="2400" dirty="0"/>
+            <a:endParaRPr lang="ja-JP" altLang="en-US" sz="2400" dirty="0"/>
           </a:p>
         </p:txBody>
       </p:sp>
@@ -9075,17 +9048,17 @@
               <a:buNone/>
             </a:pPr>
             <a:r>
-              <a:rPr lang="en-US" sz="1200" dirty="0">
+              <a:rPr lang="ja-JP" altLang="en-US" sz="1200" dirty="0">
                 <a:solidFill>
                   <a:srgbClr val="C5CBDC"/>
                 </a:solidFill>
                 <a:latin typeface="Calibri" pitchFamily="34" charset="0"/>
-                <a:ea typeface="Calibri" pitchFamily="34" charset="-122"/>
+                <a:ea typeface="Yu Gothic" pitchFamily="34" charset="-122"/>
                 <a:cs typeface="Calibri" pitchFamily="34" charset="-120"/>
               </a:rPr>
               <a:t>累計打ち上げ</a:t>
             </a:r>
-            <a:endParaRPr lang="en-US" sz="1200" dirty="0"/>
+            <a:endParaRPr lang="ja-JP" altLang="en-US" sz="1200" dirty="0"/>
           </a:p>
         </p:txBody>
       </p:sp>
@@ -9141,17 +9114,17 @@
               <a:buNone/>
             </a:pPr>
             <a:r>
-              <a:rPr lang="en-US" sz="2400" b="1" dirty="0">
+              <a:rPr lang="ja-JP" altLang="en-US" sz="2400" b="1" dirty="0">
                 <a:solidFill>
                   <a:srgbClr val="5FD3F3"/>
                 </a:solidFill>
                 <a:latin typeface="Cambria" pitchFamily="34" charset="0"/>
-                <a:ea typeface="Cambria" pitchFamily="34" charset="-122"/>
+                <a:ea typeface="Yu Gothic" pitchFamily="34" charset="-122"/>
                 <a:cs typeface="Cambria" pitchFamily="34" charset="-120"/>
               </a:rPr>
               <a:t>10,800機</a:t>
             </a:r>
-            <a:endParaRPr lang="en-US" sz="2400" dirty="0"/>
+            <a:endParaRPr lang="ja-JP" altLang="en-US" sz="2400" dirty="0"/>
           </a:p>
         </p:txBody>
       </p:sp>
@@ -9180,17 +9153,17 @@
               <a:buNone/>
             </a:pPr>
             <a:r>
-              <a:rPr lang="en-US" sz="1200" dirty="0">
+              <a:rPr lang="ja-JP" altLang="en-US" sz="1200" dirty="0">
                 <a:solidFill>
                   <a:srgbClr val="C5CBDC"/>
                 </a:solidFill>
                 <a:latin typeface="Calibri" pitchFamily="34" charset="0"/>
-                <a:ea typeface="Calibri" pitchFamily="34" charset="-122"/>
+                <a:ea typeface="Yu Gothic" pitchFamily="34" charset="-122"/>
                 <a:cs typeface="Calibri" pitchFamily="34" charset="-120"/>
               </a:rPr>
               <a:t>現在軌道上で稼働</a:t>
             </a:r>
-            <a:endParaRPr lang="en-US" sz="1200" dirty="0"/>
+            <a:endParaRPr lang="ja-JP" altLang="en-US" sz="1200" dirty="0"/>
           </a:p>
         </p:txBody>
       </p:sp>
@@ -9246,17 +9219,17 @@
               <a:buNone/>
             </a:pPr>
             <a:r>
-              <a:rPr lang="en-US" sz="2400" b="1" dirty="0">
+              <a:rPr lang="ja-JP" altLang="en-US" sz="2400" b="1" dirty="0">
                 <a:solidFill>
                   <a:srgbClr val="FFB627"/>
                 </a:solidFill>
                 <a:latin typeface="Cambria" pitchFamily="34" charset="0"/>
-                <a:ea typeface="Cambria" pitchFamily="34" charset="-122"/>
+                <a:ea typeface="Yu Gothic" pitchFamily="34" charset="-122"/>
                 <a:cs typeface="Cambria" pitchFamily="34" charset="-120"/>
               </a:rPr>
               <a:t>1,200万</a:t>
             </a:r>
-            <a:endParaRPr lang="en-US" sz="2400" dirty="0"/>
+            <a:endParaRPr lang="ja-JP" altLang="en-US" sz="2400" dirty="0"/>
           </a:p>
         </p:txBody>
       </p:sp>
@@ -9285,17 +9258,17 @@
               <a:buNone/>
             </a:pPr>
             <a:r>
-              <a:rPr lang="en-US" sz="1200" dirty="0">
+              <a:rPr lang="ja-JP" altLang="en-US" sz="1200" dirty="0">
                 <a:solidFill>
                   <a:srgbClr val="C5CBDC"/>
                 </a:solidFill>
                 <a:latin typeface="Calibri" pitchFamily="34" charset="0"/>
-                <a:ea typeface="Calibri" pitchFamily="34" charset="-122"/>
+                <a:ea typeface="Yu Gothic" pitchFamily="34" charset="-122"/>
                 <a:cs typeface="Calibri" pitchFamily="34" charset="-120"/>
               </a:rPr>
               <a:t>契約数（前年比2倍）</a:t>
             </a:r>
-            <a:endParaRPr lang="en-US" sz="1200" dirty="0"/>
+            <a:endParaRPr lang="ja-JP" altLang="en-US" sz="1200" dirty="0"/>
           </a:p>
         </p:txBody>
       </p:sp>
@@ -9351,17 +9324,17 @@
               <a:buNone/>
             </a:pPr>
             <a:r>
-              <a:rPr lang="en-US" sz="1800" b="1" dirty="0">
+              <a:rPr lang="ja-JP" altLang="en-US" sz="1800" b="1" dirty="0">
                 <a:solidFill>
                   <a:srgbClr val="FF6B35"/>
                 </a:solidFill>
                 <a:latin typeface="Cambria" pitchFamily="34" charset="0"/>
-                <a:ea typeface="Cambria" pitchFamily="34" charset="-122"/>
+                <a:ea typeface="Yu Gothic" pitchFamily="34" charset="-122"/>
                 <a:cs typeface="Cambria" pitchFamily="34" charset="-120"/>
               </a:rPr>
               <a:t>13ヶ月で回収</a:t>
             </a:r>
-            <a:endParaRPr lang="en-US" sz="1800" dirty="0"/>
+            <a:endParaRPr lang="ja-JP" altLang="en-US" sz="1800" dirty="0"/>
           </a:p>
         </p:txBody>
       </p:sp>
@@ -9393,17 +9366,17 @@
               <a:buNone/>
             </a:pPr>
             <a:r>
-              <a:rPr lang="en-US" sz="1150" dirty="0">
+              <a:rPr lang="ja-JP" altLang="en-US" sz="1150" dirty="0">
                 <a:solidFill>
                   <a:srgbClr val="C5CBDC"/>
                 </a:solidFill>
                 <a:latin typeface="Calibri" pitchFamily="34" charset="0"/>
-                <a:ea typeface="Calibri" pitchFamily="34" charset="-122"/>
+                <a:ea typeface="Yu Gothic" pitchFamily="34" charset="-122"/>
                 <a:cs typeface="Calibri" pitchFamily="34" charset="-120"/>
               </a:rPr>
               <a:t>1回$40M（ロケット＋衛星24機）→ 約2.6万契約分の容量 → 月$3.1Mの収入。衛星寿命5年のうち最初の1年で元が取れる。</a:t>
             </a:r>
-            <a:endParaRPr lang="en-US" sz="1150" dirty="0"/>
+            <a:endParaRPr lang="ja-JP" altLang="en-US" sz="1150" dirty="0"/>
           </a:p>
         </p:txBody>
       </p:sp>
@@ -9432,17 +9405,17 @@
               <a:buNone/>
             </a:pPr>
             <a:r>
-              <a:rPr lang="en-US" sz="1150" i="1" dirty="0">
+              <a:rPr lang="ja-JP" altLang="en-US" sz="1150" i="1" dirty="0">
                 <a:solidFill>
                   <a:srgbClr val="858FAB"/>
                 </a:solidFill>
                 <a:latin typeface="Calibri" pitchFamily="34" charset="0"/>
-                <a:ea typeface="Calibri" pitchFamily="34" charset="-122"/>
+                <a:ea typeface="Yu Gothic" pitchFamily="34" charset="-122"/>
                 <a:cs typeface="Calibri" pitchFamily="34" charset="-120"/>
               </a:rPr>
               <a:t>競合は外部からロケットを買うため1回$70〜100M。回収に2〜3年かかり、衛星寿命とのマージンが薄い。</a:t>
             </a:r>
-            <a:endParaRPr lang="en-US" sz="1150" dirty="0"/>
+            <a:endParaRPr lang="ja-JP" altLang="en-US" sz="1150" dirty="0"/>
           </a:p>
         </p:txBody>
       </p:sp>
@@ -9471,17 +9444,17 @@
               <a:buNone/>
             </a:pPr>
             <a:r>
-              <a:rPr lang="en-US" sz="1100" dirty="0">
+              <a:rPr lang="ja-JP" altLang="en-US" sz="1100" dirty="0">
                 <a:solidFill>
                   <a:srgbClr val="858FAB"/>
                 </a:solidFill>
                 <a:latin typeface="Calibri" pitchFamily="34" charset="0"/>
-                <a:ea typeface="Calibri" pitchFamily="34" charset="-122"/>
+                <a:ea typeface="Yu Gothic" pitchFamily="34" charset="-122"/>
                 <a:cs typeface="Calibri" pitchFamily="34" charset="-120"/>
               </a:rPr>
               <a:t>07</a:t>
             </a:r>
-            <a:endParaRPr lang="en-US" sz="1100" dirty="0"/>
+            <a:endParaRPr lang="ja-JP" altLang="en-US" sz="1100" dirty="0"/>
           </a:p>
         </p:txBody>
       </p:sp>
@@ -9542,17 +9515,17 @@
               <a:buNone/>
             </a:pPr>
             <a:r>
-              <a:rPr lang="en-US" sz="3000" b="1" dirty="0">
+              <a:rPr lang="ja-JP" altLang="en-US" sz="3000" b="1" dirty="0">
                 <a:solidFill>
                   <a:srgbClr val="FFFFFF"/>
                 </a:solidFill>
                 <a:latin typeface="Cambria" pitchFamily="34" charset="0"/>
-                <a:ea typeface="Cambria" pitchFamily="34" charset="-122"/>
+                <a:ea typeface="Yu Gothic" pitchFamily="34" charset="-122"/>
                 <a:cs typeface="Cambria" pitchFamily="34" charset="-120"/>
               </a:rPr>
               <a:t>次の主戦場は「電力」</a:t>
             </a:r>
-            <a:endParaRPr lang="en-US" sz="3000" dirty="0"/>
+            <a:endParaRPr lang="ja-JP" altLang="en-US" sz="3000" dirty="0"/>
           </a:p>
         </p:txBody>
       </p:sp>
@@ -9581,17 +9554,17 @@
               <a:buNone/>
             </a:pPr>
             <a:r>
-              <a:rPr lang="en-US" sz="1350" dirty="0">
+              <a:rPr lang="ja-JP" altLang="en-US" sz="1350" dirty="0">
                 <a:solidFill>
                   <a:srgbClr val="FFB627"/>
                 </a:solidFill>
                 <a:latin typeface="Calibri" pitchFamily="34" charset="0"/>
-                <a:ea typeface="Calibri" pitchFamily="34" charset="-122"/>
+                <a:ea typeface="Yu Gothic" pitchFamily="34" charset="-122"/>
                 <a:cs typeface="Calibri" pitchFamily="34" charset="-120"/>
               </a:rPr>
               <a:t>AIデータセンター需要が地球側の限界に当たる</a:t>
             </a:r>
-            <a:endParaRPr lang="en-US" sz="1350" dirty="0"/>
+            <a:endParaRPr lang="ja-JP" altLang="en-US" sz="1350" dirty="0"/>
           </a:p>
         </p:txBody>
       </p:sp>
@@ -9636,17 +9609,17 @@
               <a:buNone/>
             </a:pPr>
             <a:r>
-              <a:rPr lang="en-US" sz="1100" dirty="0">
+              <a:rPr lang="ja-JP" altLang="en-US" sz="1100" dirty="0">
                 <a:solidFill>
                   <a:srgbClr val="858FAB"/>
                 </a:solidFill>
                 <a:latin typeface="Calibri" pitchFamily="34" charset="0"/>
-                <a:ea typeface="Calibri" pitchFamily="34" charset="-122"/>
+                <a:ea typeface="Yu Gothic" pitchFamily="34" charset="-122"/>
                 <a:cs typeface="Calibri" pitchFamily="34" charset="-120"/>
               </a:rPr>
               <a:t>2030年にはAIが全需要の70%を占める（McKinsey）</a:t>
             </a:r>
-            <a:endParaRPr lang="en-US" sz="1100" dirty="0"/>
+            <a:endParaRPr lang="ja-JP" altLang="en-US" sz="1100" dirty="0"/>
           </a:p>
         </p:txBody>
       </p:sp>
@@ -9675,17 +9648,17 @@
               <a:buNone/>
             </a:pPr>
             <a:r>
-              <a:rPr lang="en-US" sz="1800" b="1" dirty="0">
+              <a:rPr lang="ja-JP" altLang="en-US" sz="1800" b="1" dirty="0">
                 <a:solidFill>
                   <a:srgbClr val="FFFFFF"/>
                 </a:solidFill>
                 <a:latin typeface="Cambria" pitchFamily="34" charset="0"/>
-                <a:ea typeface="Cambria" pitchFamily="34" charset="-122"/>
+                <a:ea typeface="Yu Gothic" pitchFamily="34" charset="-122"/>
                 <a:cs typeface="Cambria" pitchFamily="34" charset="-120"/>
               </a:rPr>
               <a:t>土地は足りる。電気が足りない。</a:t>
             </a:r>
-            <a:endParaRPr lang="en-US" sz="1800" dirty="0"/>
+            <a:endParaRPr lang="ja-JP" altLang="en-US" sz="1800" dirty="0"/>
           </a:p>
         </p:txBody>
       </p:sp>
@@ -9741,17 +9714,17 @@
               <a:buNone/>
             </a:pPr>
             <a:r>
-              <a:rPr lang="en-US" sz="1150" dirty="0">
+              <a:rPr lang="ja-JP" altLang="en-US" sz="1150" dirty="0">
                 <a:solidFill>
                   <a:srgbClr val="858FAB"/>
                 </a:solidFill>
                 <a:latin typeface="Calibri" pitchFamily="34" charset="0"/>
-                <a:ea typeface="Calibri" pitchFamily="34" charset="-122"/>
+                <a:ea typeface="Yu Gothic" pitchFamily="34" charset="-122"/>
                 <a:cs typeface="Calibri" pitchFamily="34" charset="-120"/>
               </a:rPr>
               <a:t>建物・キャンパスの土地</a:t>
             </a:r>
-            <a:endParaRPr lang="en-US" sz="1150" dirty="0"/>
+            <a:endParaRPr lang="ja-JP" altLang="en-US" sz="1150" dirty="0"/>
           </a:p>
         </p:txBody>
       </p:sp>
@@ -9780,17 +9753,17 @@
               <a:buNone/>
             </a:pPr>
             <a:r>
-              <a:rPr lang="en-US" sz="1900" b="1" dirty="0">
+              <a:rPr lang="ja-JP" altLang="en-US" sz="1900" b="1" dirty="0">
                 <a:solidFill>
                   <a:srgbClr val="4ECB8E"/>
                 </a:solidFill>
                 <a:latin typeface="Cambria" pitchFamily="34" charset="0"/>
-                <a:ea typeface="Cambria" pitchFamily="34" charset="-122"/>
+                <a:ea typeface="Yu Gothic" pitchFamily="34" charset="-122"/>
                 <a:cs typeface="Cambria" pitchFamily="34" charset="-120"/>
               </a:rPr>
               <a:t>東京都 1個分</a:t>
             </a:r>
-            <a:endParaRPr lang="en-US" sz="1900" dirty="0"/>
+            <a:endParaRPr lang="ja-JP" altLang="en-US" sz="1900" dirty="0"/>
           </a:p>
         </p:txBody>
       </p:sp>
@@ -9819,17 +9792,17 @@
               <a:buNone/>
             </a:pPr>
             <a:r>
-              <a:rPr lang="en-US" sz="1050" dirty="0">
+              <a:rPr lang="ja-JP" altLang="en-US" sz="1050" dirty="0">
                 <a:solidFill>
                   <a:srgbClr val="C5CBDC"/>
                 </a:solidFill>
                 <a:latin typeface="Calibri" pitchFamily="34" charset="0"/>
-                <a:ea typeface="Calibri" pitchFamily="34" charset="-122"/>
+                <a:ea typeface="Yu Gothic" pitchFamily="34" charset="-122"/>
                 <a:cs typeface="Calibri" pitchFamily="34" charset="-120"/>
               </a:rPr>
               <a:t>2030年の219GW分でも約1,300〜2,700km²。陸地のわずか0.002%</a:t>
             </a:r>
-            <a:endParaRPr lang="en-US" sz="1050" dirty="0"/>
+            <a:endParaRPr lang="ja-JP" altLang="en-US" sz="1050" dirty="0"/>
           </a:p>
         </p:txBody>
       </p:sp>
@@ -9885,17 +9858,17 @@
               <a:buNone/>
             </a:pPr>
             <a:r>
-              <a:rPr lang="en-US" sz="1150" dirty="0">
+              <a:rPr lang="ja-JP" altLang="en-US" sz="1150" dirty="0">
                 <a:solidFill>
                   <a:srgbClr val="858FAB"/>
                 </a:solidFill>
                 <a:latin typeface="Calibri" pitchFamily="34" charset="0"/>
-                <a:ea typeface="Calibri" pitchFamily="34" charset="-122"/>
+                <a:ea typeface="Yu Gothic" pitchFamily="34" charset="-122"/>
                 <a:cs typeface="Calibri" pitchFamily="34" charset="-120"/>
               </a:rPr>
               <a:t>それを太陽光で賄う土地</a:t>
             </a:r>
-            <a:endParaRPr lang="en-US" sz="1150" dirty="0"/>
+            <a:endParaRPr lang="ja-JP" altLang="en-US" sz="1150" dirty="0"/>
           </a:p>
         </p:txBody>
       </p:sp>
@@ -9924,17 +9897,17 @@
               <a:buNone/>
             </a:pPr>
             <a:r>
-              <a:rPr lang="en-US" sz="1900" b="1" dirty="0">
+              <a:rPr lang="ja-JP" altLang="en-US" sz="1900" b="1" dirty="0">
                 <a:solidFill>
                   <a:srgbClr val="F4646B"/>
                 </a:solidFill>
                 <a:latin typeface="Cambria" pitchFamily="34" charset="0"/>
-                <a:ea typeface="Cambria" pitchFamily="34" charset="-122"/>
+                <a:ea typeface="Yu Gothic" pitchFamily="34" charset="-122"/>
                 <a:cs typeface="Cambria" pitchFamily="34" charset="-120"/>
               </a:rPr>
               <a:t>長野県 1個分</a:t>
             </a:r>
-            <a:endParaRPr lang="en-US" sz="1900" dirty="0"/>
+            <a:endParaRPr lang="ja-JP" altLang="en-US" sz="1900" dirty="0"/>
           </a:p>
         </p:txBody>
       </p:sp>
@@ -9963,17 +9936,17 @@
               <a:buNone/>
             </a:pPr>
             <a:r>
-              <a:rPr lang="en-US" sz="1050" dirty="0">
+              <a:rPr lang="ja-JP" altLang="en-US" sz="1050" dirty="0">
                 <a:solidFill>
                   <a:srgbClr val="C5CBDC"/>
                 </a:solidFill>
                 <a:latin typeface="Calibri" pitchFamily="34" charset="0"/>
-                <a:ea typeface="Calibri" pitchFamily="34" charset="-122"/>
+                <a:ea typeface="Yu Gothic" pitchFamily="34" charset="-122"/>
                 <a:cs typeface="Calibri" pitchFamily="34" charset="-120"/>
               </a:rPr>
               <a:t>約13,000km²のパネルが要る。しかも稼働率は20〜35%</a:t>
             </a:r>
-            <a:endParaRPr lang="en-US" sz="1050" dirty="0"/>
+            <a:endParaRPr lang="ja-JP" altLang="en-US" sz="1050" dirty="0"/>
           </a:p>
         </p:txBody>
       </p:sp>
@@ -10029,17 +10002,17 @@
               <a:buNone/>
             </a:pPr>
             <a:r>
-              <a:rPr lang="en-US" sz="1300" b="1" dirty="0">
+              <a:rPr lang="ja-JP" altLang="en-US" sz="1300" b="1" dirty="0">
                 <a:solidFill>
                   <a:srgbClr val="FFB627"/>
                 </a:solidFill>
                 <a:latin typeface="Calibri" pitchFamily="34" charset="0"/>
-                <a:ea typeface="Calibri" pitchFamily="34" charset="-122"/>
+                <a:ea typeface="Yu Gothic" pitchFamily="34" charset="-122"/>
                 <a:cs typeface="Calibri" pitchFamily="34" charset="-120"/>
               </a:rPr>
               <a:t>本当の壁は送電網</a:t>
             </a:r>
-            <a:endParaRPr lang="en-US" sz="1300" dirty="0"/>
+            <a:endParaRPr lang="ja-JP" altLang="en-US" sz="1300" dirty="0"/>
           </a:p>
         </p:txBody>
       </p:sp>
@@ -10071,17 +10044,17 @@
               <a:buNone/>
             </a:pPr>
             <a:r>
-              <a:rPr lang="en-US" sz="1100" dirty="0">
+              <a:rPr lang="ja-JP" altLang="en-US" sz="1100" dirty="0">
                 <a:solidFill>
                   <a:srgbClr val="C5CBDC"/>
                 </a:solidFill>
                 <a:latin typeface="Calibri" pitchFamily="34" charset="0"/>
-                <a:ea typeface="Calibri" pitchFamily="34" charset="-122"/>
+                <a:ea typeface="Yu Gothic" pitchFamily="34" charset="-122"/>
                 <a:cs typeface="Calibri" pitchFamily="34" charset="-120"/>
               </a:rPr>
               <a:t>電力網への接続待ちは5年超。冷却水は1日数百万リットル。土地を買っても電気が引けない — これが軌道データセンター構想の出発点。</a:t>
             </a:r>
-            <a:endParaRPr lang="en-US" sz="1100" dirty="0"/>
+            <a:endParaRPr lang="ja-JP" altLang="en-US" sz="1100" dirty="0"/>
           </a:p>
         </p:txBody>
       </p:sp>
@@ -10110,17 +10083,17 @@
               <a:buNone/>
             </a:pPr>
             <a:r>
-              <a:rPr lang="en-US" sz="1100" dirty="0">
+              <a:rPr lang="ja-JP" altLang="en-US" sz="1100" dirty="0">
                 <a:solidFill>
                   <a:srgbClr val="858FAB"/>
                 </a:solidFill>
                 <a:latin typeface="Calibri" pitchFamily="34" charset="0"/>
-                <a:ea typeface="Calibri" pitchFamily="34" charset="-122"/>
+                <a:ea typeface="Yu Gothic" pitchFamily="34" charset="-122"/>
                 <a:cs typeface="Calibri" pitchFamily="34" charset="-120"/>
               </a:rPr>
               <a:t>08</a:t>
             </a:r>
-            <a:endParaRPr lang="en-US" sz="1100" dirty="0"/>
+            <a:endParaRPr lang="ja-JP" altLang="en-US" sz="1100" dirty="0"/>
           </a:p>
         </p:txBody>
       </p:sp>
@@ -10181,17 +10154,17 @@
               <a:buNone/>
             </a:pPr>
             <a:r>
-              <a:rPr lang="en-US" sz="3000" b="1" dirty="0">
+              <a:rPr lang="ja-JP" altLang="en-US" sz="3000" b="1" dirty="0">
                 <a:solidFill>
                   <a:srgbClr val="FFFFFF"/>
                 </a:solidFill>
                 <a:latin typeface="Cambria" pitchFamily="34" charset="0"/>
-                <a:ea typeface="Cambria" pitchFamily="34" charset="-122"/>
+                <a:ea typeface="Yu Gothic" pitchFamily="34" charset="-122"/>
                 <a:cs typeface="Cambria" pitchFamily="34" charset="-120"/>
               </a:rPr>
               <a:t>なぜ核融合ではなく「宇宙」なのか</a:t>
             </a:r>
-            <a:endParaRPr lang="en-US" sz="3000" dirty="0"/>
+            <a:endParaRPr lang="ja-JP" altLang="en-US" sz="3000" dirty="0"/>
           </a:p>
         </p:txBody>
       </p:sp>
@@ -10220,17 +10193,17 @@
               <a:buNone/>
             </a:pPr>
             <a:r>
-              <a:rPr lang="en-US" sz="1350" dirty="0">
+              <a:rPr lang="ja-JP" altLang="en-US" sz="1350" dirty="0">
                 <a:solidFill>
                   <a:srgbClr val="FFB627"/>
                 </a:solidFill>
                 <a:latin typeface="Calibri" pitchFamily="34" charset="0"/>
-                <a:ea typeface="Calibri" pitchFamily="34" charset="-122"/>
+                <a:ea typeface="Yu Gothic" pitchFamily="34" charset="-122"/>
                 <a:cs typeface="Calibri" pitchFamily="34" charset="-120"/>
               </a:rPr>
               <a:t>AI電力戦争の三つ巴と、Muskの一貫した論理</a:t>
             </a:r>
-            <a:endParaRPr lang="en-US" sz="1350" dirty="0"/>
+            <a:endParaRPr lang="ja-JP" altLang="en-US" sz="1350" dirty="0"/>
           </a:p>
         </p:txBody>
       </p:sp>
@@ -10242,12 +10215,12 @@
         </p:nvSpPr>
         <p:spPr>
           <a:xfrm>
-            <a:off x="640080" y="1600200"/>
-            <a:ext cx="6675120" cy="1572768"/>
+            <a:off x="640080" y="1572768"/>
+            <a:ext cx="6949440" cy="1883664"/>
           </a:xfrm>
           <a:prstGeom prst="roundRect">
             <a:avLst>
-              <a:gd name="adj" fmla="val 5233"/>
+              <a:gd name="adj" fmla="val 4369"/>
             </a:avLst>
           </a:prstGeom>
           <a:solidFill>
@@ -10261,55 +10234,79 @@
           </a:ln>
         </p:spPr>
       </p:sp>
-      <p:sp>
-        <p:nvSpPr>
-          <p:cNvPr id="5" name="Text 3"/>
-          <p:cNvSpPr/>
-          <p:nvPr/>
-        </p:nvSpPr>
-        <p:spPr>
-          <a:xfrm>
-            <a:off x="804672" y="1554480"/>
-            <a:ext cx="548640" cy="868680"/>
-          </a:xfrm>
-          <a:prstGeom prst="rect">
-            <a:avLst/>
-          </a:prstGeom>
-          <a:noFill/>
-          <a:ln/>
-        </p:spPr>
-        <p:txBody>
-          <a:bodyPr wrap="square" lIns="0" tIns="0" rIns="0" bIns="0" rtlCol="0" anchor="ctr"/>
-          <a:lstStyle/>
-          <a:p>
-            <a:pPr indent="0" marL="0">
-              <a:buNone/>
-            </a:pPr>
-            <a:r>
-              <a:rPr lang="en-US" sz="5400" b="1" dirty="0">
+      <p:pic>
+        <p:nvPicPr>
+          <p:cNvPr id="5" name="Image 0" descr="art-portrait.png">    </p:cNvPr>
+          <p:cNvPicPr>
+            <a:picLocks noChangeAspect="1"/>
+          </p:cNvPicPr>
+          <p:nvPr/>
+        </p:nvPicPr>
+        <p:blipFill>
+          <a:blip r:embed="rId1"/>
+          <a:stretch>
+            <a:fillRect/>
+          </a:stretch>
+        </p:blipFill>
+        <p:spPr>
+          <a:xfrm>
+            <a:off x="841248" y="1792224"/>
+            <a:ext cx="1389888" cy="1389888"/>
+          </a:xfrm>
+          <a:prstGeom prst="rect">
+            <a:avLst/>
+          </a:prstGeom>
+        </p:spPr>
+      </p:pic>
+      <p:sp>
+        <p:nvSpPr>
+          <p:cNvPr id="6" name="Text 3"/>
+          <p:cNvSpPr/>
+          <p:nvPr/>
+        </p:nvSpPr>
+        <p:spPr>
+          <a:xfrm>
+            <a:off x="2377440" y="1664208"/>
+            <a:ext cx="457200" cy="786384"/>
+          </a:xfrm>
+          <a:prstGeom prst="rect">
+            <a:avLst/>
+          </a:prstGeom>
+          <a:noFill/>
+          <a:ln/>
+        </p:spPr>
+        <p:txBody>
+          <a:bodyPr wrap="square" lIns="0" tIns="0" rIns="0" bIns="0" rtlCol="0" anchor="ctr"/>
+          <a:lstStyle/>
+          <a:p>
+            <a:pPr indent="0" marL="0">
+              <a:buNone/>
+            </a:pPr>
+            <a:r>
+              <a:rPr lang="ja-JP" altLang="en-US" sz="4600" b="1" dirty="0">
                 <a:solidFill>
                   <a:srgbClr val="FF6B35"/>
                 </a:solidFill>
                 <a:latin typeface="Cambria" pitchFamily="34" charset="0"/>
-                <a:ea typeface="Cambria" pitchFamily="34" charset="-122"/>
+                <a:ea typeface="Yu Gothic" pitchFamily="34" charset="-122"/>
                 <a:cs typeface="Cambria" pitchFamily="34" charset="-120"/>
               </a:rPr>
               <a:t>“</a:t>
             </a:r>
-            <a:endParaRPr lang="en-US" sz="5400" dirty="0"/>
-          </a:p>
-        </p:txBody>
-      </p:sp>
-      <p:sp>
-        <p:nvSpPr>
-          <p:cNvPr id="6" name="Text 4"/>
-          <p:cNvSpPr/>
-          <p:nvPr/>
-        </p:nvSpPr>
-        <p:spPr>
-          <a:xfrm>
-            <a:off x="1353312" y="1810512"/>
-            <a:ext cx="5760720" cy="786384"/>
+            <a:endParaRPr lang="ja-JP" altLang="en-US" sz="4600" dirty="0"/>
+          </a:p>
+        </p:txBody>
+      </p:sp>
+      <p:sp>
+        <p:nvSpPr>
+          <p:cNvPr id="7" name="Text 4"/>
+          <p:cNvSpPr/>
+          <p:nvPr/>
+        </p:nvSpPr>
+        <p:spPr>
+          <a:xfrm>
+            <a:off x="2889504" y="1975104"/>
+            <a:ext cx="4526280" cy="822960"/>
           </a:xfrm>
           <a:prstGeom prst="rect">
             <a:avLst/>
@@ -10328,17 +10325,17 @@
               <a:buNone/>
             </a:pPr>
             <a:r>
-              <a:rPr lang="en-US" sz="1550" i="1" dirty="0">
+              <a:rPr lang="ja-JP" altLang="en-US" sz="1550" i="1" dirty="0">
                 <a:solidFill>
                   <a:srgbClr val="FFFFFF"/>
                 </a:solidFill>
                 <a:latin typeface="Cambria" pitchFamily="34" charset="0"/>
-                <a:ea typeface="Cambria" pitchFamily="34" charset="-122"/>
+                <a:ea typeface="Yu Gothic" pitchFamily="34" charset="-122"/>
                 <a:cs typeface="Cambria" pitchFamily="34" charset="-120"/>
               </a:rPr>
               <a:t>空にすでに巨大な核融合炉が浮かんでいる。</a:t>
             </a:r>
-            <a:endParaRPr lang="en-US" sz="1550" dirty="0"/>
+            <a:endParaRPr lang="ja-JP" altLang="en-US" sz="1550" dirty="0"/>
           </a:p>
           <a:p>
             <a:pPr indent="0" marL="0">
@@ -10348,76 +10345,76 @@
               <a:buNone/>
             </a:pPr>
             <a:r>
-              <a:rPr lang="en-US" sz="1550" i="1" dirty="0">
+              <a:rPr lang="ja-JP" altLang="en-US" sz="1550" i="1" dirty="0">
                 <a:solidFill>
                   <a:srgbClr val="FFFFFF"/>
                 </a:solidFill>
                 <a:latin typeface="Cambria" pitchFamily="34" charset="0"/>
-                <a:ea typeface="Cambria" pitchFamily="34" charset="-122"/>
+                <a:ea typeface="Yu Gothic" pitchFamily="34" charset="-122"/>
                 <a:cs typeface="Cambria" pitchFamily="34" charset="-120"/>
               </a:rPr>
               <a:t>太陽という名前で、無料で、メンテナンス不要だ。</a:t>
             </a:r>
-            <a:endParaRPr lang="en-US" sz="1550" dirty="0"/>
-          </a:p>
-        </p:txBody>
-      </p:sp>
-      <p:sp>
-        <p:nvSpPr>
-          <p:cNvPr id="7" name="Text 5"/>
-          <p:cNvSpPr/>
-          <p:nvPr/>
-        </p:nvSpPr>
-        <p:spPr>
-          <a:xfrm>
-            <a:off x="1353312" y="2670048"/>
-            <a:ext cx="5760720" cy="274320"/>
-          </a:xfrm>
-          <a:prstGeom prst="rect">
-            <a:avLst/>
-          </a:prstGeom>
-          <a:noFill/>
-          <a:ln/>
-        </p:spPr>
-        <p:txBody>
-          <a:bodyPr wrap="square" lIns="0" tIns="0" rIns="0" bIns="0" rtlCol="0" anchor="ctr"/>
-          <a:lstStyle/>
-          <a:p>
-            <a:pPr indent="0" marL="0">
-              <a:buNone/>
-            </a:pPr>
-            <a:r>
-              <a:rPr lang="en-US" sz="1100" dirty="0">
+            <a:endParaRPr lang="ja-JP" altLang="en-US" sz="1550" dirty="0"/>
+          </a:p>
+        </p:txBody>
+      </p:sp>
+      <p:sp>
+        <p:nvSpPr>
+          <p:cNvPr id="8" name="Text 5"/>
+          <p:cNvSpPr/>
+          <p:nvPr/>
+        </p:nvSpPr>
+        <p:spPr>
+          <a:xfrm>
+            <a:off x="2889504" y="2889504"/>
+            <a:ext cx="4526280" cy="274320"/>
+          </a:xfrm>
+          <a:prstGeom prst="rect">
+            <a:avLst/>
+          </a:prstGeom>
+          <a:noFill/>
+          <a:ln/>
+        </p:spPr>
+        <p:txBody>
+          <a:bodyPr wrap="square" lIns="0" tIns="0" rIns="0" bIns="0" rtlCol="0" anchor="ctr"/>
+          <a:lstStyle/>
+          <a:p>
+            <a:pPr indent="0" marL="0">
+              <a:buNone/>
+            </a:pPr>
+            <a:r>
+              <a:rPr lang="ja-JP" altLang="en-US" sz="1100" dirty="0">
                 <a:solidFill>
                   <a:srgbClr val="FFB627"/>
                 </a:solidFill>
                 <a:latin typeface="Calibri" pitchFamily="34" charset="0"/>
-                <a:ea typeface="Calibri" pitchFamily="34" charset="-122"/>
+                <a:ea typeface="Yu Gothic" pitchFamily="34" charset="-122"/>
                 <a:cs typeface="Calibri" pitchFamily="34" charset="-120"/>
               </a:rPr>
               <a:t>— Elon Musk（宇宙太陽光をめぐる持論より）</a:t>
             </a:r>
-            <a:endParaRPr lang="en-US" sz="1100" dirty="0"/>
+            <a:endParaRPr lang="ja-JP" altLang="en-US" sz="1100" dirty="0"/>
           </a:p>
         </p:txBody>
       </p:sp>
       <p:pic>
         <p:nvPicPr>
-          <p:cNvPr id="8" name="Image 0" descr="art-orbital-dc.png">    </p:cNvPr>
+          <p:cNvPr id="9" name="Image 1" descr="art-orbital-dc.png">    </p:cNvPr>
           <p:cNvPicPr>
             <a:picLocks noChangeAspect="1"/>
           </p:cNvPicPr>
           <p:nvPr/>
         </p:nvPicPr>
         <p:blipFill>
-          <a:blip r:embed="rId1"/>
+          <a:blip r:embed="rId2"/>
           <a:srcRect l="0" r="0" t="0" b="0"/>
           <a:stretch/>
         </p:blipFill>
         <p:spPr>
           <a:xfrm>
-            <a:off x="7589520" y="1600200"/>
-            <a:ext cx="3931920" cy="1572768"/>
+            <a:off x="7863840" y="1572768"/>
+            <a:ext cx="3657600" cy="1883664"/>
           </a:xfrm>
           <a:prstGeom prst="rect">
             <a:avLst/>
@@ -10426,18 +10423,18 @@
       </p:pic>
       <p:sp>
         <p:nvSpPr>
-          <p:cNvPr id="9" name="Shape 6"/>
-          <p:cNvSpPr/>
-          <p:nvPr/>
-        </p:nvSpPr>
-        <p:spPr>
-          <a:xfrm>
-            <a:off x="640080" y="3364992"/>
-            <a:ext cx="3529584" cy="1755648"/>
+          <p:cNvPr id="10" name="Shape 6"/>
+          <p:cNvSpPr/>
+          <p:nvPr/>
+        </p:nvSpPr>
+        <p:spPr>
+          <a:xfrm>
+            <a:off x="640080" y="3694176"/>
+            <a:ext cx="3529584" cy="1719072"/>
           </a:xfrm>
           <a:prstGeom prst="roundRect">
             <a:avLst>
-              <a:gd name="adj" fmla="val 4688"/>
+              <a:gd name="adj" fmla="val 4787"/>
             </a:avLst>
           </a:prstGeom>
           <a:solidFill>
@@ -10453,13 +10450,13 @@
       </p:sp>
       <p:sp>
         <p:nvSpPr>
-          <p:cNvPr id="10" name="Text 7"/>
-          <p:cNvSpPr/>
-          <p:nvPr/>
-        </p:nvSpPr>
-        <p:spPr>
-          <a:xfrm>
-            <a:off x="822960" y="3511296"/>
+          <p:cNvPr id="11" name="Text 7"/>
+          <p:cNvSpPr/>
+          <p:nvPr/>
+        </p:nvSpPr>
+        <p:spPr>
+          <a:xfrm>
+            <a:off x="822960" y="3831336"/>
             <a:ext cx="3163824" cy="292608"/>
           </a:xfrm>
           <a:prstGeom prst="rect">
@@ -10476,29 +10473,29 @@
               <a:buNone/>
             </a:pPr>
             <a:r>
-              <a:rPr lang="en-US" sz="1200" dirty="0">
+              <a:rPr lang="ja-JP" altLang="en-US" sz="1200" dirty="0">
                 <a:solidFill>
                   <a:srgbClr val="858FAB"/>
                 </a:solidFill>
                 <a:latin typeface="Calibri" pitchFamily="34" charset="0"/>
-                <a:ea typeface="Calibri" pitchFamily="34" charset="-122"/>
+                <a:ea typeface="Yu Gothic" pitchFamily="34" charset="-122"/>
                 <a:cs typeface="Calibri" pitchFamily="34" charset="-120"/>
               </a:rPr>
               <a:t>SpaceX / xAI</a:t>
             </a:r>
-            <a:endParaRPr lang="en-US" sz="1200" dirty="0"/>
-          </a:p>
-        </p:txBody>
-      </p:sp>
-      <p:sp>
-        <p:nvSpPr>
-          <p:cNvPr id="11" name="Text 8"/>
-          <p:cNvSpPr/>
-          <p:nvPr/>
-        </p:nvSpPr>
-        <p:spPr>
-          <a:xfrm>
-            <a:off x="822960" y="3803904"/>
+            <a:endParaRPr lang="ja-JP" altLang="en-US" sz="1200" dirty="0"/>
+          </a:p>
+        </p:txBody>
+      </p:sp>
+      <p:sp>
+        <p:nvSpPr>
+          <p:cNvPr id="12" name="Text 8"/>
+          <p:cNvSpPr/>
+          <p:nvPr/>
+        </p:nvSpPr>
+        <p:spPr>
+          <a:xfrm>
+            <a:off x="822960" y="4123944"/>
             <a:ext cx="3163824" cy="402336"/>
           </a:xfrm>
           <a:prstGeom prst="rect">
@@ -10515,30 +10512,30 @@
               <a:buNone/>
             </a:pPr>
             <a:r>
-              <a:rPr lang="en-US" sz="2000" b="1" dirty="0">
+              <a:rPr lang="ja-JP" altLang="en-US" sz="2000" b="1" dirty="0">
                 <a:solidFill>
                   <a:srgbClr val="FF6B35"/>
                 </a:solidFill>
                 <a:latin typeface="Cambria" pitchFamily="34" charset="0"/>
-                <a:ea typeface="Cambria" pitchFamily="34" charset="-122"/>
+                <a:ea typeface="Yu Gothic" pitchFamily="34" charset="-122"/>
                 <a:cs typeface="Cambria" pitchFamily="34" charset="-120"/>
               </a:rPr>
               <a:t>軌道太陽光</a:t>
             </a:r>
-            <a:endParaRPr lang="en-US" sz="2000" dirty="0"/>
-          </a:p>
-        </p:txBody>
-      </p:sp>
-      <p:sp>
-        <p:nvSpPr>
-          <p:cNvPr id="12" name="Text 9"/>
-          <p:cNvSpPr/>
-          <p:nvPr/>
-        </p:nvSpPr>
-        <p:spPr>
-          <a:xfrm>
-            <a:off x="822960" y="4279392"/>
-            <a:ext cx="3163824" cy="841248"/>
+            <a:endParaRPr lang="ja-JP" altLang="en-US" sz="2000" dirty="0"/>
+          </a:p>
+        </p:txBody>
+      </p:sp>
+      <p:sp>
+        <p:nvSpPr>
+          <p:cNvPr id="13" name="Text 9"/>
+          <p:cNvSpPr/>
+          <p:nvPr/>
+        </p:nvSpPr>
+        <p:spPr>
+          <a:xfrm>
+            <a:off x="822960" y="4599432"/>
+            <a:ext cx="3163824" cy="749808"/>
           </a:xfrm>
           <a:prstGeom prst="rect">
             <a:avLst/>
@@ -10557,34 +10554,34 @@
               <a:buNone/>
             </a:pPr>
             <a:r>
-              <a:rPr lang="en-US" sz="1050" dirty="0">
+              <a:rPr lang="ja-JP" altLang="en-US" sz="1050" dirty="0">
                 <a:solidFill>
                   <a:srgbClr val="C5CBDC"/>
                 </a:solidFill>
                 <a:latin typeface="Calibri" pitchFamily="34" charset="0"/>
-                <a:ea typeface="Calibri" pitchFamily="34" charset="-122"/>
+                <a:ea typeface="Yu Gothic" pitchFamily="34" charset="-122"/>
                 <a:cs typeface="Calibri" pitchFamily="34" charset="-120"/>
               </a:rPr>
               <a:t>FCCに衛星DC 100万機を申請。夜も雲もない軌道なら発電量は地上の約8倍。急所はStarshipのコストカーブ。</a:t>
             </a:r>
-            <a:endParaRPr lang="en-US" sz="1050" dirty="0"/>
-          </a:p>
-        </p:txBody>
-      </p:sp>
-      <p:sp>
-        <p:nvSpPr>
-          <p:cNvPr id="13" name="Shape 10"/>
-          <p:cNvSpPr/>
-          <p:nvPr/>
-        </p:nvSpPr>
-        <p:spPr>
-          <a:xfrm>
-            <a:off x="4361688" y="3364992"/>
-            <a:ext cx="3529584" cy="1755648"/>
+            <a:endParaRPr lang="ja-JP" altLang="en-US" sz="1050" dirty="0"/>
+          </a:p>
+        </p:txBody>
+      </p:sp>
+      <p:sp>
+        <p:nvSpPr>
+          <p:cNvPr id="14" name="Shape 10"/>
+          <p:cNvSpPr/>
+          <p:nvPr/>
+        </p:nvSpPr>
+        <p:spPr>
+          <a:xfrm>
+            <a:off x="4361688" y="3694176"/>
+            <a:ext cx="3529584" cy="1719072"/>
           </a:xfrm>
           <a:prstGeom prst="roundRect">
             <a:avLst>
-              <a:gd name="adj" fmla="val 4688"/>
+              <a:gd name="adj" fmla="val 4787"/>
             </a:avLst>
           </a:prstGeom>
           <a:solidFill>
@@ -10600,13 +10597,13 @@
       </p:sp>
       <p:sp>
         <p:nvSpPr>
-          <p:cNvPr id="14" name="Text 11"/>
-          <p:cNvSpPr/>
-          <p:nvPr/>
-        </p:nvSpPr>
-        <p:spPr>
-          <a:xfrm>
-            <a:off x="4544568" y="3511296"/>
+          <p:cNvPr id="15" name="Text 11"/>
+          <p:cNvSpPr/>
+          <p:nvPr/>
+        </p:nvSpPr>
+        <p:spPr>
+          <a:xfrm>
+            <a:off x="4544568" y="3831336"/>
             <a:ext cx="3163824" cy="292608"/>
           </a:xfrm>
           <a:prstGeom prst="rect">
@@ -10623,29 +10620,29 @@
               <a:buNone/>
             </a:pPr>
             <a:r>
-              <a:rPr lang="en-US" sz="1200" dirty="0">
+              <a:rPr lang="ja-JP" altLang="en-US" sz="1200" dirty="0">
                 <a:solidFill>
                   <a:srgbClr val="858FAB"/>
                 </a:solidFill>
                 <a:latin typeface="Calibri" pitchFamily="34" charset="0"/>
-                <a:ea typeface="Calibri" pitchFamily="34" charset="-122"/>
+                <a:ea typeface="Yu Gothic" pitchFamily="34" charset="-122"/>
                 <a:cs typeface="Calibri" pitchFamily="34" charset="-120"/>
               </a:rPr>
               <a:t>Google</a:t>
             </a:r>
-            <a:endParaRPr lang="en-US" sz="1200" dirty="0"/>
-          </a:p>
-        </p:txBody>
-      </p:sp>
-      <p:sp>
-        <p:nvSpPr>
-          <p:cNvPr id="15" name="Text 12"/>
-          <p:cNvSpPr/>
-          <p:nvPr/>
-        </p:nvSpPr>
-        <p:spPr>
-          <a:xfrm>
-            <a:off x="4544568" y="3803904"/>
+            <a:endParaRPr lang="ja-JP" altLang="en-US" sz="1200" dirty="0"/>
+          </a:p>
+        </p:txBody>
+      </p:sp>
+      <p:sp>
+        <p:nvSpPr>
+          <p:cNvPr id="16" name="Text 12"/>
+          <p:cNvSpPr/>
+          <p:nvPr/>
+        </p:nvSpPr>
+        <p:spPr>
+          <a:xfrm>
+            <a:off x="4544568" y="4123944"/>
             <a:ext cx="3163824" cy="402336"/>
           </a:xfrm>
           <a:prstGeom prst="rect">
@@ -10662,30 +10659,30 @@
               <a:buNone/>
             </a:pPr>
             <a:r>
-              <a:rPr lang="en-US" sz="2000" b="1" dirty="0">
+              <a:rPr lang="ja-JP" altLang="en-US" sz="2000" b="1" dirty="0">
                 <a:solidFill>
                   <a:srgbClr val="5FD3F3"/>
                 </a:solidFill>
                 <a:latin typeface="Cambria" pitchFamily="34" charset="0"/>
-                <a:ea typeface="Cambria" pitchFamily="34" charset="-122"/>
+                <a:ea typeface="Yu Gothic" pitchFamily="34" charset="-122"/>
                 <a:cs typeface="Cambria" pitchFamily="34" charset="-120"/>
               </a:rPr>
               <a:t>両張り</a:t>
             </a:r>
-            <a:endParaRPr lang="en-US" sz="2000" dirty="0"/>
-          </a:p>
-        </p:txBody>
-      </p:sp>
-      <p:sp>
-        <p:nvSpPr>
-          <p:cNvPr id="16" name="Text 13"/>
-          <p:cNvSpPr/>
-          <p:nvPr/>
-        </p:nvSpPr>
-        <p:spPr>
-          <a:xfrm>
-            <a:off x="4544568" y="4279392"/>
-            <a:ext cx="3163824" cy="841248"/>
+            <a:endParaRPr lang="ja-JP" altLang="en-US" sz="2000" dirty="0"/>
+          </a:p>
+        </p:txBody>
+      </p:sp>
+      <p:sp>
+        <p:nvSpPr>
+          <p:cNvPr id="17" name="Text 13"/>
+          <p:cNvSpPr/>
+          <p:nvPr/>
+        </p:nvSpPr>
+        <p:spPr>
+          <a:xfrm>
+            <a:off x="4544568" y="4599432"/>
+            <a:ext cx="3163824" cy="749808"/>
           </a:xfrm>
           <a:prstGeom prst="rect">
             <a:avLst/>
@@ -10704,34 +10701,34 @@
               <a:buNone/>
             </a:pPr>
             <a:r>
-              <a:rPr lang="en-US" sz="1050" dirty="0">
+              <a:rPr lang="ja-JP" altLang="en-US" sz="1050" dirty="0">
                 <a:solidFill>
                   <a:srgbClr val="C5CBDC"/>
                 </a:solidFill>
                 <a:latin typeface="Calibri" pitchFamily="34" charset="0"/>
-                <a:ea typeface="Calibri" pitchFamily="34" charset="-122"/>
+                <a:ea typeface="Yu Gothic" pitchFamily="34" charset="-122"/>
                 <a:cs typeface="Calibri" pitchFamily="34" charset="-120"/>
               </a:rPr>
               <a:t>CFSと核融合200MWの購電契約を結びつつ、Suncatcher衛星でTPUを2027年に軌道投入。最もリスク分散が効く。</a:t>
             </a:r>
-            <a:endParaRPr lang="en-US" sz="1050" dirty="0"/>
-          </a:p>
-        </p:txBody>
-      </p:sp>
-      <p:sp>
-        <p:nvSpPr>
-          <p:cNvPr id="17" name="Shape 14"/>
-          <p:cNvSpPr/>
-          <p:nvPr/>
-        </p:nvSpPr>
-        <p:spPr>
-          <a:xfrm>
-            <a:off x="8083296" y="3364992"/>
-            <a:ext cx="3529584" cy="1755648"/>
+            <a:endParaRPr lang="ja-JP" altLang="en-US" sz="1050" dirty="0"/>
+          </a:p>
+        </p:txBody>
+      </p:sp>
+      <p:sp>
+        <p:nvSpPr>
+          <p:cNvPr id="18" name="Shape 14"/>
+          <p:cNvSpPr/>
+          <p:nvPr/>
+        </p:nvSpPr>
+        <p:spPr>
+          <a:xfrm>
+            <a:off x="8083296" y="3694176"/>
+            <a:ext cx="3529584" cy="1719072"/>
           </a:xfrm>
           <a:prstGeom prst="roundRect">
             <a:avLst>
-              <a:gd name="adj" fmla="val 4688"/>
+              <a:gd name="adj" fmla="val 4787"/>
             </a:avLst>
           </a:prstGeom>
           <a:solidFill>
@@ -10747,13 +10744,13 @@
       </p:sp>
       <p:sp>
         <p:nvSpPr>
-          <p:cNvPr id="18" name="Text 15"/>
-          <p:cNvSpPr/>
-          <p:nvPr/>
-        </p:nvSpPr>
-        <p:spPr>
-          <a:xfrm>
-            <a:off x="8266176" y="3511296"/>
+          <p:cNvPr id="19" name="Text 15"/>
+          <p:cNvSpPr/>
+          <p:nvPr/>
+        </p:nvSpPr>
+        <p:spPr>
+          <a:xfrm>
+            <a:off x="8266176" y="3831336"/>
             <a:ext cx="3163824" cy="292608"/>
           </a:xfrm>
           <a:prstGeom prst="rect">
@@ -10770,29 +10767,29 @@
               <a:buNone/>
             </a:pPr>
             <a:r>
-              <a:rPr lang="en-US" sz="1200" dirty="0">
+              <a:rPr lang="ja-JP" altLang="en-US" sz="1200" dirty="0">
                 <a:solidFill>
                   <a:srgbClr val="858FAB"/>
                 </a:solidFill>
                 <a:latin typeface="Calibri" pitchFamily="34" charset="0"/>
-                <a:ea typeface="Calibri" pitchFamily="34" charset="-122"/>
+                <a:ea typeface="Yu Gothic" pitchFamily="34" charset="-122"/>
                 <a:cs typeface="Calibri" pitchFamily="34" charset="-120"/>
               </a:rPr>
               <a:t>OpenAI / MSFT</a:t>
             </a:r>
-            <a:endParaRPr lang="en-US" sz="1200" dirty="0"/>
-          </a:p>
-        </p:txBody>
-      </p:sp>
-      <p:sp>
-        <p:nvSpPr>
-          <p:cNvPr id="19" name="Text 16"/>
-          <p:cNvSpPr/>
-          <p:nvPr/>
-        </p:nvSpPr>
-        <p:spPr>
-          <a:xfrm>
-            <a:off x="8266176" y="3803904"/>
+            <a:endParaRPr lang="ja-JP" altLang="en-US" sz="1200" dirty="0"/>
+          </a:p>
+        </p:txBody>
+      </p:sp>
+      <p:sp>
+        <p:nvSpPr>
+          <p:cNvPr id="20" name="Text 16"/>
+          <p:cNvSpPr/>
+          <p:nvPr/>
+        </p:nvSpPr>
+        <p:spPr>
+          <a:xfrm>
+            <a:off x="8266176" y="4123944"/>
             <a:ext cx="3163824" cy="402336"/>
           </a:xfrm>
           <a:prstGeom prst="rect">
@@ -10809,30 +10806,30 @@
               <a:buNone/>
             </a:pPr>
             <a:r>
-              <a:rPr lang="en-US" sz="2000" b="1" dirty="0">
+              <a:rPr lang="ja-JP" altLang="en-US" sz="2000" b="1" dirty="0">
                 <a:solidFill>
                   <a:srgbClr val="FFB627"/>
                 </a:solidFill>
                 <a:latin typeface="Cambria" pitchFamily="34" charset="0"/>
-                <a:ea typeface="Cambria" pitchFamily="34" charset="-122"/>
+                <a:ea typeface="Yu Gothic" pitchFamily="34" charset="-122"/>
                 <a:cs typeface="Cambria" pitchFamily="34" charset="-120"/>
               </a:rPr>
               <a:t>核融合</a:t>
             </a:r>
-            <a:endParaRPr lang="en-US" sz="2000" dirty="0"/>
-          </a:p>
-        </p:txBody>
-      </p:sp>
-      <p:sp>
-        <p:nvSpPr>
-          <p:cNvPr id="20" name="Text 17"/>
-          <p:cNvSpPr/>
-          <p:nvPr/>
-        </p:nvSpPr>
-        <p:spPr>
-          <a:xfrm>
-            <a:off x="8266176" y="4279392"/>
-            <a:ext cx="3163824" cy="841248"/>
+            <a:endParaRPr lang="ja-JP" altLang="en-US" sz="2000" dirty="0"/>
+          </a:p>
+        </p:txBody>
+      </p:sp>
+      <p:sp>
+        <p:nvSpPr>
+          <p:cNvPr id="21" name="Text 17"/>
+          <p:cNvSpPr/>
+          <p:nvPr/>
+        </p:nvSpPr>
+        <p:spPr>
+          <a:xfrm>
+            <a:off x="8266176" y="4599432"/>
+            <a:ext cx="3163824" cy="749808"/>
           </a:xfrm>
           <a:prstGeom prst="rect">
             <a:avLst/>
@@ -10851,29 +10848,29 @@
               <a:buNone/>
             </a:pPr>
             <a:r>
-              <a:rPr lang="en-US" sz="1050" dirty="0">
+              <a:rPr lang="ja-JP" altLang="en-US" sz="1050" dirty="0">
                 <a:solidFill>
                   <a:srgbClr val="C5CBDC"/>
                 </a:solidFill>
                 <a:latin typeface="Calibri" pitchFamily="34" charset="0"/>
-                <a:ea typeface="Calibri" pitchFamily="34" charset="-122"/>
+                <a:ea typeface="Yu Gothic" pitchFamily="34" charset="-122"/>
                 <a:cs typeface="Calibri" pitchFamily="34" charset="-120"/>
               </a:rPr>
               <a:t>Helionと2028年50MWの購電契約。ただし商用炉は世界にまだゼロで、必要規模には3桁足りない。</a:t>
             </a:r>
-            <a:endParaRPr lang="en-US" sz="1050" dirty="0"/>
-          </a:p>
-        </p:txBody>
-      </p:sp>
-      <p:sp>
-        <p:nvSpPr>
-          <p:cNvPr id="21" name="Text 18"/>
-          <p:cNvSpPr/>
-          <p:nvPr/>
-        </p:nvSpPr>
-        <p:spPr>
-          <a:xfrm>
-            <a:off x="640080" y="5650992"/>
+            <a:endParaRPr lang="ja-JP" altLang="en-US" sz="1050" dirty="0"/>
+          </a:p>
+        </p:txBody>
+      </p:sp>
+      <p:sp>
+        <p:nvSpPr>
+          <p:cNvPr id="22" name="Text 18"/>
+          <p:cNvSpPr/>
+          <p:nvPr/>
+        </p:nvSpPr>
+        <p:spPr>
+          <a:xfrm>
+            <a:off x="640080" y="5614416"/>
             <a:ext cx="10881360" cy="310896"/>
           </a:xfrm>
           <a:prstGeom prst="rect">
@@ -10890,62 +10887,62 @@
               <a:buNone/>
             </a:pPr>
             <a:r>
-              <a:rPr lang="en-US" sz="1150" i="1" dirty="0">
+              <a:rPr lang="ja-JP" altLang="en-US" sz="1150" i="1" dirty="0">
                 <a:solidFill>
                   <a:srgbClr val="FFB627"/>
                 </a:solidFill>
                 <a:latin typeface="Calibri" pitchFamily="34" charset="0"/>
-                <a:ea typeface="Calibri" pitchFamily="34" charset="-122"/>
+                <a:ea typeface="Yu Gothic" pitchFamily="34" charset="-122"/>
                 <a:cs typeface="Calibri" pitchFamily="34" charset="-120"/>
               </a:rPr>
               <a:t>移行期の現実解はTesla Megapack — 2025年売上$12.8B(+27%)。AIデータセンターが送電網を待つ間の緩衝材として売れている。</a:t>
             </a:r>
-            <a:endParaRPr lang="en-US" sz="1150" dirty="0"/>
-          </a:p>
-        </p:txBody>
-      </p:sp>
-      <p:sp>
-        <p:nvSpPr>
-          <p:cNvPr id="22" name="Text 19"/>
-          <p:cNvSpPr/>
-          <p:nvPr/>
-        </p:nvSpPr>
-        <p:spPr>
-          <a:xfrm>
-            <a:off x="640080" y="5998464"/>
-            <a:ext cx="5486400" cy="256032"/>
-          </a:xfrm>
-          <a:prstGeom prst="rect">
-            <a:avLst/>
-          </a:prstGeom>
-          <a:noFill/>
-          <a:ln/>
-        </p:spPr>
-        <p:txBody>
-          <a:bodyPr wrap="square" lIns="0" tIns="0" rIns="0" bIns="0" rtlCol="0" anchor="ctr"/>
-          <a:lstStyle/>
-          <a:p>
-            <a:pPr indent="0" marL="0">
-              <a:buNone/>
-            </a:pPr>
-            <a:r>
-              <a:rPr lang="en-US" sz="950" dirty="0">
+            <a:endParaRPr lang="ja-JP" altLang="en-US" sz="1150" dirty="0"/>
+          </a:p>
+        </p:txBody>
+      </p:sp>
+      <p:sp>
+        <p:nvSpPr>
+          <p:cNvPr id="23" name="Text 19"/>
+          <p:cNvSpPr/>
+          <p:nvPr/>
+        </p:nvSpPr>
+        <p:spPr>
+          <a:xfrm>
+            <a:off x="640080" y="5961888"/>
+            <a:ext cx="7863840" cy="256032"/>
+          </a:xfrm>
+          <a:prstGeom prst="rect">
+            <a:avLst/>
+          </a:prstGeom>
+          <a:noFill/>
+          <a:ln/>
+        </p:spPr>
+        <p:txBody>
+          <a:bodyPr wrap="square" lIns="0" tIns="0" rIns="0" bIns="0" rtlCol="0" anchor="ctr"/>
+          <a:lstStyle/>
+          <a:p>
+            <a:pPr indent="0" marL="0">
+              <a:buNone/>
+            </a:pPr>
+            <a:r>
+              <a:rPr lang="ja-JP" altLang="en-US" sz="950" dirty="0">
                 <a:solidFill>
                   <a:srgbClr val="858FAB"/>
                 </a:solidFill>
                 <a:latin typeface="Calibri" pitchFamily="34" charset="0"/>
-                <a:ea typeface="Calibri" pitchFamily="34" charset="-122"/>
+                <a:ea typeface="Yu Gothic" pitchFamily="34" charset="-122"/>
                 <a:cs typeface="Calibri" pitchFamily="34" charset="-120"/>
               </a:rPr>
-              <a:t>※ 引用は発言の主旨を日本語に要約したもの</a:t>
-            </a:r>
-            <a:endParaRPr lang="en-US" sz="950" dirty="0"/>
-          </a:p>
-        </p:txBody>
-      </p:sp>
-      <p:sp>
-        <p:nvSpPr>
-          <p:cNvPr id="23" name="Text 20"/>
+              <a:t>※ 引用は発言の主旨を日本語に要約したもの。肖像はオリジナルのイラストであり写真ではありません</a:t>
+            </a:r>
+            <a:endParaRPr lang="ja-JP" altLang="en-US" sz="950" dirty="0"/>
+          </a:p>
+        </p:txBody>
+      </p:sp>
+      <p:sp>
+        <p:nvSpPr>
+          <p:cNvPr id="24" name="Text 20"/>
           <p:cNvSpPr/>
           <p:nvPr/>
         </p:nvSpPr>
@@ -10968,17 +10965,17 @@
               <a:buNone/>
             </a:pPr>
             <a:r>
-              <a:rPr lang="en-US" sz="1100" dirty="0">
+              <a:rPr lang="ja-JP" altLang="en-US" sz="1100" dirty="0">
                 <a:solidFill>
                   <a:srgbClr val="858FAB"/>
                 </a:solidFill>
                 <a:latin typeface="Calibri" pitchFamily="34" charset="0"/>
-                <a:ea typeface="Calibri" pitchFamily="34" charset="-122"/>
+                <a:ea typeface="Yu Gothic" pitchFamily="34" charset="-122"/>
                 <a:cs typeface="Calibri" pitchFamily="34" charset="-120"/>
               </a:rPr>
               <a:t>09</a:t>
             </a:r>
-            <a:endParaRPr lang="en-US" sz="1100" dirty="0"/>
+            <a:endParaRPr lang="ja-JP" altLang="en-US" sz="1100" dirty="0"/>
           </a:p>
         </p:txBody>
       </p:sp>
@@ -11034,7 +11031,7 @@
     <a:fontScheme name="Office">
       <a:majorFont>
         <a:latin typeface="Calibri Light" panose="020F0302020204030204"/>
-        <a:ea typeface=""/>
+        <a:ea typeface="Yu Gothic"/>
         <a:cs typeface=""/>
         <a:font script="Jpan" typeface="游ゴシック Light"/>
         <a:font script="Hang" typeface="맑은 고딕"/>
@@ -11086,7 +11083,7 @@
       </a:majorFont>
       <a:minorFont>
         <a:latin typeface="Calibri" panose="020F0502020204030204"/>
-        <a:ea typeface=""/>
+        <a:ea typeface="Yu Gothic"/>
         <a:cs typeface=""/>
         <a:font script="Jpan" typeface="游ゴシック"/>
         <a:font script="Hang" typeface="맑은 고딕"/>
